--- a/발표자료_최종본.pptx
+++ b/발표자료_최종본.pptx
@@ -24,6 +24,7 @@
     <p:sldId id="271" r:id="rId23"/>
     <p:sldId id="276" r:id="rId28"/>
     <p:sldId id="277" r:id="rId29"/>
+    <p:sldId id="278" r:id="rId30"/>
     <p:sldId id="272" r:id="rId24"/>
     <p:sldId id="273" r:id="rId25"/>
     <p:sldId id="274" r:id="rId26"/>
@@ -1014,6 +1015,76 @@
           <a:p>
             <a:r>
               <a:t>게이트 질문 대비: 검증의 목적은 무엇을 주장해도 되는지 정하는 것이었고, 정확히 그렇게 작동했습니다. 검증 결과가 실제로 서비스 문구를 바꿨습니다.</a:t>
+            </a:r>
+          </a:p>
+        </p:txBody>
+      </p:sp>
+      <p:sp>
+        <p:nvSpPr>
+          <p:cNvPr id="4" name="Slide Number Placeholder 3"/>
+          <p:cNvSpPr>
+            <a:spLocks noGrp="1"/>
+          </p:cNvSpPr>
+          <p:nvPr>
+            <p:ph type="sldNum" idx="5" sz="quarter"/>
+          </p:nvPr>
+        </p:nvSpPr>
+        <p:spPr/>
+      </p:sp>
+    </p:spTree>
+  </p:cSld>
+  <p:clrMapOvr>
+    <a:masterClrMapping/>
+  </p:clrMapOvr>
+</p:notes>
+</file>
+
+<file path=ppt/notesSlides/notesSlide9.xml><?xml version="1.0" encoding="utf-8"?>
+<p:notes xmlns:a="http://schemas.openxmlformats.org/drawingml/2006/main" xmlns:p="http://schemas.openxmlformats.org/presentationml/2006/main" xmlns:r="http://schemas.openxmlformats.org/officeDocument/2006/relationships">
+  <p:cSld>
+    <p:spTree>
+      <p:nvGrpSpPr>
+        <p:cNvPr id="1" name=""/>
+        <p:cNvGrpSpPr/>
+        <p:nvPr/>
+      </p:nvGrpSpPr>
+      <p:grpSpPr>
+        <a:xfrm>
+          <a:off x="0" y="0"/>
+          <a:ext cx="0" cy="0"/>
+          <a:chOff x="0" y="0"/>
+          <a:chExt cx="0" cy="0"/>
+        </a:xfrm>
+      </p:grpSpPr>
+      <p:sp>
+        <p:nvSpPr>
+          <p:cNvPr id="2" name="Slide Image Placeholder 1"/>
+          <p:cNvSpPr>
+            <a:spLocks noGrp="1"/>
+          </p:cNvSpPr>
+          <p:nvPr>
+            <p:ph type="sldImg" idx="2"/>
+          </p:nvPr>
+        </p:nvSpPr>
+        <p:spPr/>
+      </p:sp>
+      <p:sp>
+        <p:nvSpPr>
+          <p:cNvPr id="3" name="Notes Placeholder 2"/>
+          <p:cNvSpPr>
+            <a:spLocks noGrp="1"/>
+          </p:cNvSpPr>
+          <p:nvPr>
+            <p:ph type="body" idx="3" sz="quarter"/>
+          </p:nvPr>
+        </p:nvSpPr>
+        <p:spPr/>
+        <p:txBody>
+          <a:bodyPr/>
+          <a:lstStyle/>
+          <a:p>
+            <a:r>
+              <a:t>상용화 관점 질문 대비: 업로드가 일회성으로 사라지지 않고 DB에 쌓이며, 검진 확진 결과가 연결된 데이터만 재학습에 씁니다. 라벨 없이 학습하면 모델이 자기 예측을 정답처럼 배우는 오염이 생기기 때문입니다. 전체 루프(적재→라벨→재학습→모델 교체)를 실제로 구현하고 테스트까지 마쳤습니다.</a:t>
             </a:r>
           </a:p>
         </p:txBody>
@@ -4274,7 +4345,7 @@
                 </a:solidFill>
                 <a:latin typeface="맑은 고딕"/>
               </a:rPr>
-              <a:t>03. 분석 결과</a:t>
+              <a:t>02. 분석 질문</a:t>
             </a:r>
           </a:p>
         </p:txBody>
@@ -4313,45 +4384,21 @@
                 </a:solidFill>
                 <a:latin typeface="맑은 고딕"/>
               </a:rPr>
-              <a:t>첫 번째 반전 — 걸음수는 위험군이 오히려 많다</a:t>
-            </a:r>
-          </a:p>
-        </p:txBody>
-      </p:sp>
-      <p:pic>
-        <p:nvPicPr>
-          <p:cNvPr id="5" name="Picture 4" descr="01_activity_by_group.png"/>
-          <p:cNvPicPr>
-            <a:picLocks noChangeAspect="1"/>
-          </p:cNvPicPr>
-          <p:nvPr/>
-        </p:nvPicPr>
-        <p:blipFill>
-          <a:blip r:embed="rId2"/>
-          <a:stretch>
-            <a:fillRect/>
-          </a:stretch>
-        </p:blipFill>
-        <p:spPr>
-          <a:xfrm>
-            <a:off x="640080" y="1664208"/>
-            <a:ext cx="5669280" cy="4535424"/>
-          </a:xfrm>
-          <a:prstGeom prst="rect">
-            <a:avLst/>
-          </a:prstGeom>
-        </p:spPr>
-      </p:pic>
-      <p:sp>
-        <p:nvSpPr>
-          <p:cNvPr id="6" name="TextBox 5"/>
+              <a:t>Q1~Q6 — 검증을 통과해야 서비스로 간다</a:t>
+            </a:r>
+          </a:p>
+        </p:txBody>
+      </p:sp>
+      <p:sp>
+        <p:nvSpPr>
+          <p:cNvPr id="5" name="TextBox 4"/>
           <p:cNvSpPr txBox="1"/>
           <p:nvPr/>
         </p:nvSpPr>
         <p:spPr>
           <a:xfrm>
-            <a:off x="6675120" y="2011680"/>
-            <a:ext cx="5029200" cy="4114800"/>
+            <a:off x="1005840" y="1737360"/>
+            <a:ext cx="1188720" cy="457200"/>
           </a:xfrm>
           <a:prstGeom prst="rect">
             <a:avLst/>
@@ -4370,141 +4417,403 @@
               </a:spcAft>
             </a:pPr>
             <a:r>
+              <a:rPr sz="1800" b="1">
+                <a:solidFill>
+                  <a:srgbClr val="2A78D6"/>
+                </a:solidFill>
+                <a:latin typeface="맑은 고딕"/>
+              </a:rPr>
+              <a:t>Q1·Q2</a:t>
+            </a:r>
+          </a:p>
+        </p:txBody>
+      </p:sp>
+      <p:sp>
+        <p:nvSpPr>
+          <p:cNvPr id="6" name="TextBox 5"/>
+          <p:cNvSpPr txBox="1"/>
+          <p:nvPr/>
+        </p:nvSpPr>
+        <p:spPr>
+          <a:xfrm>
+            <a:off x="2286000" y="1737360"/>
+            <a:ext cx="9144000" cy="457200"/>
+          </a:xfrm>
+          <a:prstGeom prst="rect">
+            <a:avLst/>
+          </a:prstGeom>
+          <a:noFill/>
+        </p:spPr>
+        <p:txBody>
+          <a:bodyPr wrap="square">
+            <a:spAutoFit/>
+          </a:bodyPr>
+          <a:lstStyle/>
+          <a:p>
+            <a:pPr algn="l">
+              <a:spcAft>
+                <a:spcPts val="600"/>
+              </a:spcAft>
+            </a:pPr>
+            <a:r>
+              <a:rPr sz="1700" b="0">
+                <a:solidFill>
+                  <a:srgbClr val="202020"/>
+                </a:solidFill>
+                <a:latin typeface="맑은 고딕"/>
+              </a:rPr>
+              <a:t>진단군별로 활동량·수면 패턴이 다른가?</a:t>
+            </a:r>
+          </a:p>
+        </p:txBody>
+      </p:sp>
+      <p:sp>
+        <p:nvSpPr>
+          <p:cNvPr id="7" name="TextBox 6"/>
+          <p:cNvSpPr txBox="1"/>
+          <p:nvPr/>
+        </p:nvSpPr>
+        <p:spPr>
+          <a:xfrm>
+            <a:off x="1005840" y="2450591"/>
+            <a:ext cx="1188720" cy="457200"/>
+          </a:xfrm>
+          <a:prstGeom prst="rect">
+            <a:avLst/>
+          </a:prstGeom>
+          <a:noFill/>
+        </p:spPr>
+        <p:txBody>
+          <a:bodyPr wrap="square">
+            <a:spAutoFit/>
+          </a:bodyPr>
+          <a:lstStyle/>
+          <a:p>
+            <a:pPr algn="l">
+              <a:spcAft>
+                <a:spcPts val="600"/>
+              </a:spcAft>
+            </a:pPr>
+            <a:r>
+              <a:rPr sz="1800" b="1">
+                <a:solidFill>
+                  <a:srgbClr val="2A78D6"/>
+                </a:solidFill>
+                <a:latin typeface="맑은 고딕"/>
+              </a:rPr>
+              <a:t>Q3</a:t>
+            </a:r>
+          </a:p>
+        </p:txBody>
+      </p:sp>
+      <p:sp>
+        <p:nvSpPr>
+          <p:cNvPr id="8" name="TextBox 7"/>
+          <p:cNvSpPr txBox="1"/>
+          <p:nvPr/>
+        </p:nvSpPr>
+        <p:spPr>
+          <a:xfrm>
+            <a:off x="2286000" y="2450591"/>
+            <a:ext cx="9144000" cy="457200"/>
+          </a:xfrm>
+          <a:prstGeom prst="rect">
+            <a:avLst/>
+          </a:prstGeom>
+          <a:noFill/>
+        </p:spPr>
+        <p:txBody>
+          <a:bodyPr wrap="square">
+            <a:spAutoFit/>
+          </a:bodyPr>
+          <a:lstStyle/>
+          <a:p>
+            <a:pPr algn="l">
+              <a:spcAft>
+                <a:spcPts val="600"/>
+              </a:spcAft>
+            </a:pPr>
+            <a:r>
+              <a:rPr sz="1700" b="0">
+                <a:solidFill>
+                  <a:srgbClr val="202020"/>
+                </a:solidFill>
+                <a:latin typeface="맑은 고딕"/>
+              </a:rPr>
+              <a:t>병원 검사 없이 생활 기록만으로 위험군을 걸러낼 수 있는가?</a:t>
+            </a:r>
+          </a:p>
+        </p:txBody>
+      </p:sp>
+      <p:sp>
+        <p:nvSpPr>
+          <p:cNvPr id="9" name="TextBox 8"/>
+          <p:cNvSpPr txBox="1"/>
+          <p:nvPr/>
+        </p:nvSpPr>
+        <p:spPr>
+          <a:xfrm>
+            <a:off x="1005840" y="3163824"/>
+            <a:ext cx="1188720" cy="457200"/>
+          </a:xfrm>
+          <a:prstGeom prst="rect">
+            <a:avLst/>
+          </a:prstGeom>
+          <a:noFill/>
+        </p:spPr>
+        <p:txBody>
+          <a:bodyPr wrap="square">
+            <a:spAutoFit/>
+          </a:bodyPr>
+          <a:lstStyle/>
+          <a:p>
+            <a:pPr algn="l">
+              <a:spcAft>
+                <a:spcPts val="600"/>
+              </a:spcAft>
+            </a:pPr>
+            <a:r>
+              <a:rPr sz="1800" b="1">
+                <a:solidFill>
+                  <a:srgbClr val="2A78D6"/>
+                </a:solidFill>
+                <a:latin typeface="맑은 고딕"/>
+              </a:rPr>
+              <a:t>Q4</a:t>
+            </a:r>
+          </a:p>
+        </p:txBody>
+      </p:sp>
+      <p:sp>
+        <p:nvSpPr>
+          <p:cNvPr id="10" name="TextBox 9"/>
+          <p:cNvSpPr txBox="1"/>
+          <p:nvPr/>
+        </p:nvSpPr>
+        <p:spPr>
+          <a:xfrm>
+            <a:off x="2286000" y="3163824"/>
+            <a:ext cx="9144000" cy="457200"/>
+          </a:xfrm>
+          <a:prstGeom prst="rect">
+            <a:avLst/>
+          </a:prstGeom>
+          <a:noFill/>
+        </p:spPr>
+        <p:txBody>
+          <a:bodyPr wrap="square">
+            <a:spAutoFit/>
+          </a:bodyPr>
+          <a:lstStyle/>
+          <a:p>
+            <a:pPr algn="l">
+              <a:spcAft>
+                <a:spcPts val="600"/>
+              </a:spcAft>
+            </a:pPr>
+            <a:r>
+              <a:rPr sz="1700" b="0">
+                <a:solidFill>
+                  <a:srgbClr val="202020"/>
+                </a:solidFill>
+                <a:latin typeface="맑은 고딕"/>
+              </a:rPr>
+              <a:t>어떤 생활 지표가 판별에 가장 크게 기여하는가?</a:t>
+            </a:r>
+          </a:p>
+        </p:txBody>
+      </p:sp>
+      <p:sp>
+        <p:nvSpPr>
+          <p:cNvPr id="11" name="TextBox 10"/>
+          <p:cNvSpPr txBox="1"/>
+          <p:nvPr/>
+        </p:nvSpPr>
+        <p:spPr>
+          <a:xfrm>
+            <a:off x="1005840" y="3877056"/>
+            <a:ext cx="1188720" cy="457200"/>
+          </a:xfrm>
+          <a:prstGeom prst="rect">
+            <a:avLst/>
+          </a:prstGeom>
+          <a:noFill/>
+        </p:spPr>
+        <p:txBody>
+          <a:bodyPr wrap="square">
+            <a:spAutoFit/>
+          </a:bodyPr>
+          <a:lstStyle/>
+          <a:p>
+            <a:pPr algn="l">
+              <a:spcAft>
+                <a:spcPts val="600"/>
+              </a:spcAft>
+            </a:pPr>
+            <a:r>
+              <a:rPr sz="1800" b="1">
+                <a:solidFill>
+                  <a:srgbClr val="2A78D6"/>
+                </a:solidFill>
+                <a:latin typeface="맑은 고딕"/>
+              </a:rPr>
+              <a:t>Q5</a:t>
+            </a:r>
+          </a:p>
+        </p:txBody>
+      </p:sp>
+      <p:sp>
+        <p:nvSpPr>
+          <p:cNvPr id="12" name="TextBox 11"/>
+          <p:cNvSpPr txBox="1"/>
+          <p:nvPr/>
+        </p:nvSpPr>
+        <p:spPr>
+          <a:xfrm>
+            <a:off x="2286000" y="3877056"/>
+            <a:ext cx="9144000" cy="457200"/>
+          </a:xfrm>
+          <a:prstGeom prst="rect">
+            <a:avLst/>
+          </a:prstGeom>
+          <a:noFill/>
+        </p:spPr>
+        <p:txBody>
+          <a:bodyPr wrap="square">
+            <a:spAutoFit/>
+          </a:bodyPr>
+          <a:lstStyle/>
+          <a:p>
+            <a:pPr algn="l">
+              <a:spcAft>
+                <a:spcPts val="600"/>
+              </a:spcAft>
+            </a:pPr>
+            <a:r>
+              <a:rPr sz="1700" b="1">
+                <a:solidFill>
+                  <a:srgbClr val="202020"/>
+                </a:solidFill>
+                <a:latin typeface="맑은 고딕"/>
+              </a:rPr>
+              <a:t>그 신호는 치매를 빼고 경도인지장애만 남겨도 유지되는가?  ← 검증 게이트</a:t>
+            </a:r>
+          </a:p>
+        </p:txBody>
+      </p:sp>
+      <p:sp>
+        <p:nvSpPr>
+          <p:cNvPr id="13" name="TextBox 12"/>
+          <p:cNvSpPr txBox="1"/>
+          <p:nvPr/>
+        </p:nvSpPr>
+        <p:spPr>
+          <a:xfrm>
+            <a:off x="1005840" y="4590288"/>
+            <a:ext cx="1188720" cy="457200"/>
+          </a:xfrm>
+          <a:prstGeom prst="rect">
+            <a:avLst/>
+          </a:prstGeom>
+          <a:noFill/>
+        </p:spPr>
+        <p:txBody>
+          <a:bodyPr wrap="square">
+            <a:spAutoFit/>
+          </a:bodyPr>
+          <a:lstStyle/>
+          <a:p>
+            <a:pPr algn="l">
+              <a:spcAft>
+                <a:spcPts val="600"/>
+              </a:spcAft>
+            </a:pPr>
+            <a:r>
+              <a:rPr sz="1800" b="1">
+                <a:solidFill>
+                  <a:srgbClr val="2A78D6"/>
+                </a:solidFill>
+                <a:latin typeface="맑은 고딕"/>
+              </a:rPr>
+              <a:t>Q6</a:t>
+            </a:r>
+          </a:p>
+        </p:txBody>
+      </p:sp>
+      <p:sp>
+        <p:nvSpPr>
+          <p:cNvPr id="14" name="TextBox 13"/>
+          <p:cNvSpPr txBox="1"/>
+          <p:nvPr/>
+        </p:nvSpPr>
+        <p:spPr>
+          <a:xfrm>
+            <a:off x="2286000" y="4590288"/>
+            <a:ext cx="9144000" cy="457200"/>
+          </a:xfrm>
+          <a:prstGeom prst="rect">
+            <a:avLst/>
+          </a:prstGeom>
+          <a:noFill/>
+        </p:spPr>
+        <p:txBody>
+          <a:bodyPr wrap="square">
+            <a:spAutoFit/>
+          </a:bodyPr>
+          <a:lstStyle/>
+          <a:p>
+            <a:pPr algn="l">
+              <a:spcAft>
+                <a:spcPts val="600"/>
+              </a:spcAft>
+            </a:pPr>
+            <a:r>
+              <a:rPr sz="1700" b="1">
+                <a:solidFill>
+                  <a:srgbClr val="202020"/>
+                </a:solidFill>
+                <a:latin typeface="맑은 고딕"/>
+              </a:rPr>
+              <a:t>그 성능은 우연이 아니라 통계적으로 의미 있는 수준인가?  ← 검증 게이트</a:t>
+            </a:r>
+          </a:p>
+        </p:txBody>
+      </p:sp>
+      <p:sp>
+        <p:nvSpPr>
+          <p:cNvPr id="15" name="TextBox 14"/>
+          <p:cNvSpPr txBox="1"/>
+          <p:nvPr/>
+        </p:nvSpPr>
+        <p:spPr>
+          <a:xfrm>
+            <a:off x="1005840" y="5486400"/>
+            <a:ext cx="10058400" cy="548640"/>
+          </a:xfrm>
+          <a:prstGeom prst="rect">
+            <a:avLst/>
+          </a:prstGeom>
+          <a:noFill/>
+        </p:spPr>
+        <p:txBody>
+          <a:bodyPr wrap="square">
+            <a:spAutoFit/>
+          </a:bodyPr>
+          <a:lstStyle/>
+          <a:p>
+            <a:pPr algn="l">
+              <a:spcAft>
+                <a:spcPts val="600"/>
+              </a:spcAft>
+            </a:pPr>
+            <a:r>
               <a:rPr sz="1500" b="0">
                 <a:solidFill>
                   <a:srgbClr val="666666"/>
                 </a:solidFill>
                 <a:latin typeface="맑은 고딕"/>
               </a:rPr>
-              <a:t>일평균 걸음수</a:t>
-            </a:r>
-          </a:p>
-          <a:p>
-            <a:pPr algn="l">
-              <a:spcAft>
-                <a:spcPts val="600"/>
-              </a:spcAft>
-            </a:pPr>
-            <a:r>
-              <a:rPr sz="1900" b="1">
-                <a:solidFill>
-                  <a:srgbClr val="C44E52"/>
-                </a:solidFill>
-                <a:latin typeface="맑은 고딕"/>
-              </a:rPr>
-              <a:t>정상 10,635  &lt;  경도인지장애 11,383</a:t>
-            </a:r>
-          </a:p>
-          <a:p>
-            <a:pPr algn="l">
-              <a:spcAft>
-                <a:spcPts val="600"/>
-              </a:spcAft>
-            </a:pPr>
-            <a:r>
-              <a:rPr sz="800" b="0">
-                <a:solidFill>
-                  <a:srgbClr val="202020"/>
-                </a:solidFill>
-                <a:latin typeface="맑은 고딕"/>
-              </a:rPr>
-              <a:t/>
-            </a:r>
-          </a:p>
-          <a:p>
-            <a:pPr algn="l">
-              <a:spcAft>
-                <a:spcPts val="600"/>
-              </a:spcAft>
-            </a:pPr>
-            <a:r>
-              <a:rPr sz="1700" b="0">
-                <a:solidFill>
-                  <a:srgbClr val="202020"/>
-                </a:solidFill>
-                <a:latin typeface="맑은 고딕"/>
-              </a:rPr>
-              <a:t>"활동량이 줄면 위험군"이라는</a:t>
-            </a:r>
-          </a:p>
-          <a:p>
-            <a:pPr algn="l">
-              <a:spcAft>
-                <a:spcPts val="600"/>
-              </a:spcAft>
-            </a:pPr>
-            <a:r>
-              <a:rPr sz="1700" b="0">
-                <a:solidFill>
-                  <a:srgbClr val="202020"/>
-                </a:solidFill>
-                <a:latin typeface="맑은 고딕"/>
-              </a:rPr>
-              <a:t>단순한 가설은 성립하지 않았다</a:t>
-            </a:r>
-          </a:p>
-          <a:p>
-            <a:pPr algn="l">
-              <a:spcAft>
-                <a:spcPts val="600"/>
-              </a:spcAft>
-            </a:pPr>
-            <a:r>
-              <a:rPr sz="800" b="0">
-                <a:solidFill>
-                  <a:srgbClr val="202020"/>
-                </a:solidFill>
-                <a:latin typeface="맑은 고딕"/>
-              </a:rPr>
-              <a:t/>
-            </a:r>
-          </a:p>
-          <a:p>
-            <a:pPr algn="l">
-              <a:spcAft>
-                <a:spcPts val="600"/>
-              </a:spcAft>
-            </a:pPr>
-            <a:r>
-              <a:rPr sz="1900" b="1">
-                <a:solidFill>
-                  <a:srgbClr val="104281"/>
-                </a:solidFill>
-                <a:latin typeface="맑은 고딕"/>
-              </a:rPr>
-              <a:t>→ 평균이 아니라,</a:t>
-            </a:r>
-          </a:p>
-          <a:p>
-            <a:pPr algn="l">
-              <a:spcAft>
-                <a:spcPts val="600"/>
-              </a:spcAft>
-            </a:pPr>
-            <a:r>
-              <a:rPr sz="1900" b="1">
-                <a:solidFill>
-                  <a:srgbClr val="104281"/>
-                </a:solidFill>
-                <a:latin typeface="맑은 고딕"/>
-              </a:rPr>
-              <a:t>   "날마다 얼마나 들쭉날쭉한가"로</a:t>
-            </a:r>
-          </a:p>
-          <a:p>
-            <a:pPr algn="l">
-              <a:spcAft>
-                <a:spcPts val="600"/>
-              </a:spcAft>
-            </a:pPr>
-            <a:r>
-              <a:rPr sz="1900" b="1">
-                <a:solidFill>
-                  <a:srgbClr val="104281"/>
-                </a:solidFill>
-                <a:latin typeface="맑은 고딕"/>
-              </a:rPr>
-              <a:t>   시선을 돌리게 된 계기</a:t>
+              <a:t>계획서 원칙: Q5·Q6 검증 결과에 따라 서비스가 주장할 수 있는 범위를 정한다</a:t>
             </a:r>
           </a:p>
         </p:txBody>
@@ -4643,14 +4952,14 @@
                 </a:solidFill>
                 <a:latin typeface="맑은 고딕"/>
               </a:rPr>
-              <a:t>핵심 신호는 '생활 패턴의 불규칙함'이었다</a:t>
+              <a:t>첫 번째 반전 — 걸음수는 위험군이 오히려 많다</a:t>
             </a:r>
           </a:p>
         </p:txBody>
       </p:sp>
       <p:pic>
         <p:nvPicPr>
-          <p:cNvPr id="5" name="Picture 4" descr="04_feature_importance.png"/>
+          <p:cNvPr id="5" name="Picture 4" descr="01_activity_by_group.png"/>
           <p:cNvPicPr>
             <a:picLocks noChangeAspect="1"/>
           </p:cNvPicPr>
@@ -4664,8 +4973,8 @@
         </p:blipFill>
         <p:spPr>
           <a:xfrm>
-            <a:off x="804672" y="1554480"/>
-            <a:ext cx="5705856" cy="4754880"/>
+            <a:off x="640080" y="1664208"/>
+            <a:ext cx="5669280" cy="4535424"/>
           </a:xfrm>
           <a:prstGeom prst="rect">
             <a:avLst/>
@@ -4680,8 +4989,8 @@
         </p:nvSpPr>
         <p:spPr>
           <a:xfrm>
-            <a:off x="6858000" y="2011680"/>
-            <a:ext cx="4846320" cy="4114800"/>
+            <a:off x="6675120" y="2011680"/>
+            <a:ext cx="5029200" cy="4114800"/>
           </a:xfrm>
           <a:prstGeom prst="rect">
             <a:avLst/>
@@ -4706,17 +5015,33 @@
                 </a:solidFill>
                 <a:latin typeface="맑은 고딕"/>
               </a:rPr>
-              <a:t>50번 반복 검증에서 가장 안정적으로 뽑힌 지표</a:t>
-            </a:r>
-          </a:p>
-          <a:p>
-            <a:pPr algn="l">
-              <a:spcAft>
-                <a:spcPts val="600"/>
-              </a:spcAft>
-            </a:pPr>
-            <a:r>
-              <a:rPr sz="600" b="0">
+              <a:t>일평균 걸음수</a:t>
+            </a:r>
+          </a:p>
+          <a:p>
+            <a:pPr algn="l">
+              <a:spcAft>
+                <a:spcPts val="600"/>
+              </a:spcAft>
+            </a:pPr>
+            <a:r>
+              <a:rPr sz="1900" b="1">
+                <a:solidFill>
+                  <a:srgbClr val="C44E52"/>
+                </a:solidFill>
+                <a:latin typeface="맑은 고딕"/>
+              </a:rPr>
+              <a:t>정상 10,635  &lt;  경도인지장애 11,383</a:t>
+            </a:r>
+          </a:p>
+          <a:p>
+            <a:pPr algn="l">
+              <a:spcAft>
+                <a:spcPts val="600"/>
+              </a:spcAft>
+            </a:pPr>
+            <a:r>
+              <a:rPr sz="800" b="0">
                 <a:solidFill>
                   <a:srgbClr val="202020"/>
                 </a:solidFill>
@@ -4732,29 +5057,29 @@
               </a:spcAft>
             </a:pPr>
             <a:r>
-              <a:rPr sz="1700" b="1">
+              <a:rPr sz="1700" b="0">
                 <a:solidFill>
                   <a:srgbClr val="202020"/>
                 </a:solidFill>
                 <a:latin typeface="맑은 고딕"/>
               </a:rPr>
-              <a:t>1위  저강도 활동 시간의 변동성 (50/50회)</a:t>
-            </a:r>
-          </a:p>
-          <a:p>
-            <a:pPr algn="l">
-              <a:spcAft>
-                <a:spcPts val="600"/>
-              </a:spcAft>
-            </a:pPr>
-            <a:r>
-              <a:rPr sz="1700" b="1">
+              <a:t>"활동량이 줄면 위험군"이라는</a:t>
+            </a:r>
+          </a:p>
+          <a:p>
+            <a:pPr algn="l">
+              <a:spcAft>
+                <a:spcPts val="600"/>
+              </a:spcAft>
+            </a:pPr>
+            <a:r>
+              <a:rPr sz="1700" b="0">
                 <a:solidFill>
                   <a:srgbClr val="202020"/>
                 </a:solidFill>
                 <a:latin typeface="맑은 고딕"/>
               </a:rPr>
-              <a:t>2위  수면 중 뒤척임의 변동성 (48/50회)</a:t>
+              <a:t>단순한 가설은 성립하지 않았다</a:t>
             </a:r>
           </a:p>
           <a:p>
@@ -4780,45 +5105,45 @@
               </a:spcAft>
             </a:pPr>
             <a:r>
-              <a:rPr sz="1700" b="0">
-                <a:solidFill>
-                  <a:srgbClr val="202020"/>
-                </a:solidFill>
-                <a:latin typeface="맑은 고딕"/>
-              </a:rPr>
-              <a:t>인지기능이 흔들리면, 매일 비슷하게</a:t>
-            </a:r>
-          </a:p>
-          <a:p>
-            <a:pPr algn="l">
-              <a:spcAft>
-                <a:spcPts val="600"/>
-              </a:spcAft>
-            </a:pPr>
-            <a:r>
-              <a:rPr sz="1700" b="0">
-                <a:solidFill>
-                  <a:srgbClr val="202020"/>
-                </a:solidFill>
-                <a:latin typeface="맑은 고딕"/>
-              </a:rPr>
-              <a:t>자고 움직이는 '일상 루틴 유지 능력'이</a:t>
-            </a:r>
-          </a:p>
-          <a:p>
-            <a:pPr algn="l">
-              <a:spcAft>
-                <a:spcPts val="600"/>
-              </a:spcAft>
-            </a:pPr>
-            <a:r>
-              <a:rPr sz="1700" b="0">
-                <a:solidFill>
-                  <a:srgbClr val="202020"/>
-                </a:solidFill>
-                <a:latin typeface="맑은 고딕"/>
-              </a:rPr>
-              <a:t>먼저 무너진다는 해석과 일치 (상관관계)</a:t>
+              <a:rPr sz="1900" b="1">
+                <a:solidFill>
+                  <a:srgbClr val="104281"/>
+                </a:solidFill>
+                <a:latin typeface="맑은 고딕"/>
+              </a:rPr>
+              <a:t>→ 평균이 아니라,</a:t>
+            </a:r>
+          </a:p>
+          <a:p>
+            <a:pPr algn="l">
+              <a:spcAft>
+                <a:spcPts val="600"/>
+              </a:spcAft>
+            </a:pPr>
+            <a:r>
+              <a:rPr sz="1900" b="1">
+                <a:solidFill>
+                  <a:srgbClr val="104281"/>
+                </a:solidFill>
+                <a:latin typeface="맑은 고딕"/>
+              </a:rPr>
+              <a:t>   "날마다 얼마나 들쭉날쭉한가"로</a:t>
+            </a:r>
+          </a:p>
+          <a:p>
+            <a:pPr algn="l">
+              <a:spcAft>
+                <a:spcPts val="600"/>
+              </a:spcAft>
+            </a:pPr>
+            <a:r>
+              <a:rPr sz="1900" b="1">
+                <a:solidFill>
+                  <a:srgbClr val="104281"/>
+                </a:solidFill>
+                <a:latin typeface="맑은 고딕"/>
+              </a:rPr>
+              <a:t>   시선을 돌리게 된 계기</a:t>
             </a:r>
           </a:p>
         </p:txBody>
@@ -4832,6 +5157,320 @@
 </file>
 
 <file path=ppt/slides/slide12.xml><?xml version="1.0" encoding="utf-8"?>
+<p:sld xmlns:a="http://schemas.openxmlformats.org/drawingml/2006/main" xmlns:p="http://schemas.openxmlformats.org/presentationml/2006/main" xmlns:r="http://schemas.openxmlformats.org/officeDocument/2006/relationships">
+  <p:cSld>
+    <p:spTree>
+      <p:nvGrpSpPr>
+        <p:cNvPr id="1" name=""/>
+        <p:cNvGrpSpPr/>
+        <p:nvPr/>
+      </p:nvGrpSpPr>
+      <p:grpSpPr/>
+      <p:sp>
+        <p:nvSpPr>
+          <p:cNvPr id="2" name="Rectangle 1"/>
+          <p:cNvSpPr/>
+          <p:nvPr/>
+        </p:nvSpPr>
+        <p:spPr>
+          <a:xfrm>
+            <a:off x="0" y="0"/>
+            <a:ext cx="12191695" cy="146304"/>
+          </a:xfrm>
+          <a:prstGeom prst="rect">
+            <a:avLst/>
+          </a:prstGeom>
+          <a:solidFill>
+            <a:srgbClr val="104281"/>
+          </a:solidFill>
+          <a:ln>
+            <a:noFill/>
+          </a:ln>
+        </p:spPr>
+        <p:style>
+          <a:lnRef idx="1">
+            <a:schemeClr val="accent1"/>
+          </a:lnRef>
+          <a:fillRef idx="3">
+            <a:schemeClr val="accent1"/>
+          </a:fillRef>
+          <a:effectRef idx="2">
+            <a:schemeClr val="accent1"/>
+          </a:effectRef>
+          <a:fontRef idx="minor">
+            <a:schemeClr val="lt1"/>
+          </a:fontRef>
+        </p:style>
+        <p:txBody>
+          <a:bodyPr rtlCol="0" anchor="ctr"/>
+          <a:lstStyle/>
+          <a:p>
+            <a:pPr algn="ctr"/>
+          </a:p>
+        </p:txBody>
+      </p:sp>
+      <p:sp>
+        <p:nvSpPr>
+          <p:cNvPr id="3" name="TextBox 2"/>
+          <p:cNvSpPr txBox="1"/>
+          <p:nvPr/>
+        </p:nvSpPr>
+        <p:spPr>
+          <a:xfrm>
+            <a:off x="502920" y="292608"/>
+            <a:ext cx="10515600" cy="365760"/>
+          </a:xfrm>
+          <a:prstGeom prst="rect">
+            <a:avLst/>
+          </a:prstGeom>
+          <a:noFill/>
+        </p:spPr>
+        <p:txBody>
+          <a:bodyPr wrap="square">
+            <a:spAutoFit/>
+          </a:bodyPr>
+          <a:lstStyle/>
+          <a:p>
+            <a:pPr algn="l">
+              <a:spcAft>
+                <a:spcPts val="600"/>
+              </a:spcAft>
+            </a:pPr>
+            <a:r>
+              <a:rPr sz="1300" b="1">
+                <a:solidFill>
+                  <a:srgbClr val="2A78D6"/>
+                </a:solidFill>
+                <a:latin typeface="맑은 고딕"/>
+              </a:rPr>
+              <a:t>03. 분석 결과</a:t>
+            </a:r>
+          </a:p>
+        </p:txBody>
+      </p:sp>
+      <p:sp>
+        <p:nvSpPr>
+          <p:cNvPr id="4" name="TextBox 3"/>
+          <p:cNvSpPr txBox="1"/>
+          <p:nvPr/>
+        </p:nvSpPr>
+        <p:spPr>
+          <a:xfrm>
+            <a:off x="502920" y="621792"/>
+            <a:ext cx="11155680" cy="731520"/>
+          </a:xfrm>
+          <a:prstGeom prst="rect">
+            <a:avLst/>
+          </a:prstGeom>
+          <a:noFill/>
+        </p:spPr>
+        <p:txBody>
+          <a:bodyPr wrap="square">
+            <a:spAutoFit/>
+          </a:bodyPr>
+          <a:lstStyle/>
+          <a:p>
+            <a:pPr algn="l">
+              <a:spcAft>
+                <a:spcPts val="600"/>
+              </a:spcAft>
+            </a:pPr>
+            <a:r>
+              <a:rPr sz="2800" b="1">
+                <a:solidFill>
+                  <a:srgbClr val="104281"/>
+                </a:solidFill>
+                <a:latin typeface="맑은 고딕"/>
+              </a:rPr>
+              <a:t>핵심 신호는 '생활 패턴의 불규칙함'이었다</a:t>
+            </a:r>
+          </a:p>
+        </p:txBody>
+      </p:sp>
+      <p:pic>
+        <p:nvPicPr>
+          <p:cNvPr id="5" name="Picture 4" descr="04_feature_importance.png"/>
+          <p:cNvPicPr>
+            <a:picLocks noChangeAspect="1"/>
+          </p:cNvPicPr>
+          <p:nvPr/>
+        </p:nvPicPr>
+        <p:blipFill>
+          <a:blip r:embed="rId2"/>
+          <a:stretch>
+            <a:fillRect/>
+          </a:stretch>
+        </p:blipFill>
+        <p:spPr>
+          <a:xfrm>
+            <a:off x="804672" y="1554480"/>
+            <a:ext cx="5705856" cy="4754880"/>
+          </a:xfrm>
+          <a:prstGeom prst="rect">
+            <a:avLst/>
+          </a:prstGeom>
+        </p:spPr>
+      </p:pic>
+      <p:sp>
+        <p:nvSpPr>
+          <p:cNvPr id="6" name="TextBox 5"/>
+          <p:cNvSpPr txBox="1"/>
+          <p:nvPr/>
+        </p:nvSpPr>
+        <p:spPr>
+          <a:xfrm>
+            <a:off x="6858000" y="2011680"/>
+            <a:ext cx="4846320" cy="4114800"/>
+          </a:xfrm>
+          <a:prstGeom prst="rect">
+            <a:avLst/>
+          </a:prstGeom>
+          <a:noFill/>
+        </p:spPr>
+        <p:txBody>
+          <a:bodyPr wrap="square">
+            <a:spAutoFit/>
+          </a:bodyPr>
+          <a:lstStyle/>
+          <a:p>
+            <a:pPr algn="l">
+              <a:spcAft>
+                <a:spcPts val="600"/>
+              </a:spcAft>
+            </a:pPr>
+            <a:r>
+              <a:rPr sz="1500" b="0">
+                <a:solidFill>
+                  <a:srgbClr val="666666"/>
+                </a:solidFill>
+                <a:latin typeface="맑은 고딕"/>
+              </a:rPr>
+              <a:t>50번 반복 검증에서 가장 안정적으로 뽑힌 지표</a:t>
+            </a:r>
+          </a:p>
+          <a:p>
+            <a:pPr algn="l">
+              <a:spcAft>
+                <a:spcPts val="600"/>
+              </a:spcAft>
+            </a:pPr>
+            <a:r>
+              <a:rPr sz="600" b="0">
+                <a:solidFill>
+                  <a:srgbClr val="202020"/>
+                </a:solidFill>
+                <a:latin typeface="맑은 고딕"/>
+              </a:rPr>
+              <a:t/>
+            </a:r>
+          </a:p>
+          <a:p>
+            <a:pPr algn="l">
+              <a:spcAft>
+                <a:spcPts val="600"/>
+              </a:spcAft>
+            </a:pPr>
+            <a:r>
+              <a:rPr sz="1700" b="1">
+                <a:solidFill>
+                  <a:srgbClr val="202020"/>
+                </a:solidFill>
+                <a:latin typeface="맑은 고딕"/>
+              </a:rPr>
+              <a:t>1위  저강도 활동 시간의 변동성 (50/50회)</a:t>
+            </a:r>
+          </a:p>
+          <a:p>
+            <a:pPr algn="l">
+              <a:spcAft>
+                <a:spcPts val="600"/>
+              </a:spcAft>
+            </a:pPr>
+            <a:r>
+              <a:rPr sz="1700" b="1">
+                <a:solidFill>
+                  <a:srgbClr val="202020"/>
+                </a:solidFill>
+                <a:latin typeface="맑은 고딕"/>
+              </a:rPr>
+              <a:t>2위  수면 중 뒤척임의 변동성 (48/50회)</a:t>
+            </a:r>
+          </a:p>
+          <a:p>
+            <a:pPr algn="l">
+              <a:spcAft>
+                <a:spcPts val="600"/>
+              </a:spcAft>
+            </a:pPr>
+            <a:r>
+              <a:rPr sz="800" b="0">
+                <a:solidFill>
+                  <a:srgbClr val="202020"/>
+                </a:solidFill>
+                <a:latin typeface="맑은 고딕"/>
+              </a:rPr>
+              <a:t/>
+            </a:r>
+          </a:p>
+          <a:p>
+            <a:pPr algn="l">
+              <a:spcAft>
+                <a:spcPts val="600"/>
+              </a:spcAft>
+            </a:pPr>
+            <a:r>
+              <a:rPr sz="1700" b="0">
+                <a:solidFill>
+                  <a:srgbClr val="202020"/>
+                </a:solidFill>
+                <a:latin typeface="맑은 고딕"/>
+              </a:rPr>
+              <a:t>인지기능이 흔들리면, 매일 비슷하게</a:t>
+            </a:r>
+          </a:p>
+          <a:p>
+            <a:pPr algn="l">
+              <a:spcAft>
+                <a:spcPts val="600"/>
+              </a:spcAft>
+            </a:pPr>
+            <a:r>
+              <a:rPr sz="1700" b="0">
+                <a:solidFill>
+                  <a:srgbClr val="202020"/>
+                </a:solidFill>
+                <a:latin typeface="맑은 고딕"/>
+              </a:rPr>
+              <a:t>자고 움직이는 '일상 루틴 유지 능력'이</a:t>
+            </a:r>
+          </a:p>
+          <a:p>
+            <a:pPr algn="l">
+              <a:spcAft>
+                <a:spcPts val="600"/>
+              </a:spcAft>
+            </a:pPr>
+            <a:r>
+              <a:rPr sz="1700" b="0">
+                <a:solidFill>
+                  <a:srgbClr val="202020"/>
+                </a:solidFill>
+                <a:latin typeface="맑은 고딕"/>
+              </a:rPr>
+              <a:t>먼저 무너진다는 해석과 일치 (상관관계)</a:t>
+            </a:r>
+          </a:p>
+        </p:txBody>
+      </p:sp>
+    </p:spTree>
+  </p:cSld>
+  <p:clrMapOvr>
+    <a:masterClrMapping/>
+  </p:clrMapOvr>
+</p:sld>
+</file>
+
+<file path=ppt/slides/slide13.xml><?xml version="1.0" encoding="utf-8"?>
 <p:sld xmlns:a="http://schemas.openxmlformats.org/drawingml/2006/main" xmlns:p="http://schemas.openxmlformats.org/presentationml/2006/main" xmlns:r="http://schemas.openxmlformats.org/officeDocument/2006/relationships">
   <p:cSld>
     <p:spTree>
@@ -5467,7 +6106,7 @@
 </p:sld>
 </file>
 
-<file path=ppt/slides/slide13.xml><?xml version="1.0" encoding="utf-8"?>
+<file path=ppt/slides/slide14.xml><?xml version="1.0" encoding="utf-8"?>
 <p:sld xmlns:a="http://schemas.openxmlformats.org/drawingml/2006/main" xmlns:p="http://schemas.openxmlformats.org/presentationml/2006/main" xmlns:r="http://schemas.openxmlformats.org/officeDocument/2006/relationships">
   <p:cSld>
     <p:spTree>
@@ -5777,375 +6416,6 @@
                 <a:latin typeface="맑은 고딕"/>
               </a:rPr>
               <a:t>· "위험군(경도인지장애+치매)을 걸러 검진으로 안내한다"  →  이 범위만 주장</a:t>
-            </a:r>
-          </a:p>
-        </p:txBody>
-      </p:sp>
-    </p:spTree>
-  </p:cSld>
-  <p:clrMapOvr>
-    <a:masterClrMapping/>
-  </p:clrMapOvr>
-</p:sld>
-</file>
-
-<file path=ppt/slides/slide14.xml><?xml version="1.0" encoding="utf-8"?>
-<p:sld xmlns:a="http://schemas.openxmlformats.org/drawingml/2006/main" xmlns:p="http://schemas.openxmlformats.org/presentationml/2006/main" xmlns:r="http://schemas.openxmlformats.org/officeDocument/2006/relationships">
-  <p:cSld>
-    <p:spTree>
-      <p:nvGrpSpPr>
-        <p:cNvPr id="1" name=""/>
-        <p:cNvGrpSpPr/>
-        <p:nvPr/>
-      </p:nvGrpSpPr>
-      <p:grpSpPr/>
-      <p:sp>
-        <p:nvSpPr>
-          <p:cNvPr id="2" name="Rectangle 1"/>
-          <p:cNvSpPr/>
-          <p:nvPr/>
-        </p:nvSpPr>
-        <p:spPr>
-          <a:xfrm>
-            <a:off x="0" y="0"/>
-            <a:ext cx="12191695" cy="146304"/>
-          </a:xfrm>
-          <a:prstGeom prst="rect">
-            <a:avLst/>
-          </a:prstGeom>
-          <a:solidFill>
-            <a:srgbClr val="104281"/>
-          </a:solidFill>
-          <a:ln>
-            <a:noFill/>
-          </a:ln>
-        </p:spPr>
-        <p:style>
-          <a:lnRef idx="1">
-            <a:schemeClr val="accent1"/>
-          </a:lnRef>
-          <a:fillRef idx="3">
-            <a:schemeClr val="accent1"/>
-          </a:fillRef>
-          <a:effectRef idx="2">
-            <a:schemeClr val="accent1"/>
-          </a:effectRef>
-          <a:fontRef idx="minor">
-            <a:schemeClr val="lt1"/>
-          </a:fontRef>
-        </p:style>
-        <p:txBody>
-          <a:bodyPr rtlCol="0" anchor="ctr"/>
-          <a:lstStyle/>
-          <a:p>
-            <a:pPr algn="ctr"/>
-          </a:p>
-        </p:txBody>
-      </p:sp>
-      <p:sp>
-        <p:nvSpPr>
-          <p:cNvPr id="3" name="TextBox 2"/>
-          <p:cNvSpPr txBox="1"/>
-          <p:nvPr/>
-        </p:nvSpPr>
-        <p:spPr>
-          <a:xfrm>
-            <a:off x="502920" y="292608"/>
-            <a:ext cx="10515600" cy="365760"/>
-          </a:xfrm>
-          <a:prstGeom prst="rect">
-            <a:avLst/>
-          </a:prstGeom>
-          <a:noFill/>
-        </p:spPr>
-        <p:txBody>
-          <a:bodyPr wrap="square">
-            <a:spAutoFit/>
-          </a:bodyPr>
-          <a:lstStyle/>
-          <a:p>
-            <a:pPr algn="l">
-              <a:spcAft>
-                <a:spcPts val="600"/>
-              </a:spcAft>
-            </a:pPr>
-            <a:r>
-              <a:rPr sz="1300" b="1">
-                <a:solidFill>
-                  <a:srgbClr val="2A78D6"/>
-                </a:solidFill>
-                <a:latin typeface="맑은 고딕"/>
-              </a:rPr>
-              <a:t>04. 검증 ②</a:t>
-            </a:r>
-          </a:p>
-        </p:txBody>
-      </p:sp>
-      <p:sp>
-        <p:nvSpPr>
-          <p:cNvPr id="4" name="TextBox 3"/>
-          <p:cNvSpPr txBox="1"/>
-          <p:nvPr/>
-        </p:nvSpPr>
-        <p:spPr>
-          <a:xfrm>
-            <a:off x="502920" y="621792"/>
-            <a:ext cx="11155680" cy="731520"/>
-          </a:xfrm>
-          <a:prstGeom prst="rect">
-            <a:avLst/>
-          </a:prstGeom>
-          <a:noFill/>
-        </p:spPr>
-        <p:txBody>
-          <a:bodyPr wrap="square">
-            <a:spAutoFit/>
-          </a:bodyPr>
-          <a:lstStyle/>
-          <a:p>
-            <a:pPr algn="l">
-              <a:spcAft>
-                <a:spcPts val="600"/>
-              </a:spcAft>
-            </a:pPr>
-            <a:r>
-              <a:rPr sz="2800" b="1">
-                <a:solidFill>
-                  <a:srgbClr val="104281"/>
-                </a:solidFill>
-                <a:latin typeface="맑은 고딕"/>
-              </a:rPr>
-              <a:t>Q6 — 우연은 아닌가?  →  구분 능력은 진짜다 (우연일 확률 0.6%)</a:t>
-            </a:r>
-          </a:p>
-        </p:txBody>
-      </p:sp>
-      <p:pic>
-        <p:nvPicPr>
-          <p:cNvPr id="5" name="Picture 4" descr="11_permutation_test.png"/>
-          <p:cNvPicPr>
-            <a:picLocks noChangeAspect="1"/>
-          </p:cNvPicPr>
-          <p:nvPr/>
-        </p:nvPicPr>
-        <p:blipFill>
-          <a:blip r:embed="rId2"/>
-          <a:stretch>
-            <a:fillRect/>
-          </a:stretch>
-        </p:blipFill>
-        <p:spPr>
-          <a:xfrm>
-            <a:off x="640080" y="2144684"/>
-            <a:ext cx="6949440" cy="2842952"/>
-          </a:xfrm>
-          <a:prstGeom prst="rect">
-            <a:avLst/>
-          </a:prstGeom>
-        </p:spPr>
-      </p:pic>
-      <p:sp>
-        <p:nvSpPr>
-          <p:cNvPr id="6" name="TextBox 5"/>
-          <p:cNvSpPr txBox="1"/>
-          <p:nvPr/>
-        </p:nvSpPr>
-        <p:spPr>
-          <a:xfrm>
-            <a:off x="7772400" y="1828800"/>
-            <a:ext cx="4023360" cy="4206240"/>
-          </a:xfrm>
-          <a:prstGeom prst="rect">
-            <a:avLst/>
-          </a:prstGeom>
-          <a:noFill/>
-        </p:spPr>
-        <p:txBody>
-          <a:bodyPr wrap="square">
-            <a:spAutoFit/>
-          </a:bodyPr>
-          <a:lstStyle/>
-          <a:p>
-            <a:pPr algn="l">
-              <a:spcAft>
-                <a:spcPts val="600"/>
-              </a:spcAft>
-            </a:pPr>
-            <a:r>
-              <a:rPr sz="1500" b="0">
-                <a:solidFill>
-                  <a:srgbClr val="666666"/>
-                </a:solidFill>
-                <a:latin typeface="맑은 고딕"/>
-              </a:rPr>
-              <a:t>정답(진단 결과)을 일부러 뒤섞은 가짜 데이터 500개와 비교</a:t>
-            </a:r>
-          </a:p>
-          <a:p>
-            <a:pPr algn="l">
-              <a:spcAft>
-                <a:spcPts val="600"/>
-              </a:spcAft>
-            </a:pPr>
-            <a:r>
-              <a:rPr sz="600" b="0">
-                <a:solidFill>
-                  <a:srgbClr val="202020"/>
-                </a:solidFill>
-                <a:latin typeface="맑은 고딕"/>
-              </a:rPr>
-              <a:t/>
-            </a:r>
-          </a:p>
-          <a:p>
-            <a:pPr algn="l">
-              <a:spcAft>
-                <a:spcPts val="600"/>
-              </a:spcAft>
-            </a:pPr>
-            <a:r>
-              <a:rPr sz="1900" b="1">
-                <a:solidFill>
-                  <a:srgbClr val="104281"/>
-                </a:solidFill>
-                <a:latin typeface="맑은 고딕"/>
-              </a:rPr>
-              <a:t>정확도  p = 0.006</a:t>
-            </a:r>
-          </a:p>
-          <a:p>
-            <a:pPr algn="l">
-              <a:spcAft>
-                <a:spcPts val="600"/>
-              </a:spcAft>
-            </a:pPr>
-            <a:r>
-              <a:rPr sz="1500" b="0">
-                <a:solidFill>
-                  <a:srgbClr val="202020"/>
-                </a:solidFill>
-                <a:latin typeface="맑은 고딕"/>
-              </a:rPr>
-              <a:t>→ 우연히 나올 확률 0.6%. 통과</a:t>
-            </a:r>
-          </a:p>
-          <a:p>
-            <a:pPr algn="l">
-              <a:spcAft>
-                <a:spcPts val="600"/>
-              </a:spcAft>
-            </a:pPr>
-            <a:r>
-              <a:rPr sz="600" b="0">
-                <a:solidFill>
-                  <a:srgbClr val="202020"/>
-                </a:solidFill>
-                <a:latin typeface="맑은 고딕"/>
-              </a:rPr>
-              <a:t/>
-            </a:r>
-          </a:p>
-          <a:p>
-            <a:pPr algn="l">
-              <a:spcAft>
-                <a:spcPts val="600"/>
-              </a:spcAft>
-            </a:pPr>
-            <a:r>
-              <a:rPr sz="1900" b="1">
-                <a:solidFill>
-                  <a:srgbClr val="C44E52"/>
-                </a:solidFill>
-                <a:latin typeface="맑은 고딕"/>
-              </a:rPr>
-              <a:t>재현율  p = 0.132</a:t>
-            </a:r>
-          </a:p>
-          <a:p>
-            <a:pPr algn="l">
-              <a:spcAft>
-                <a:spcPts val="600"/>
-              </a:spcAft>
-            </a:pPr>
-            <a:r>
-              <a:rPr sz="1500" b="0">
-                <a:solidFill>
-                  <a:srgbClr val="202020"/>
-                </a:solidFill>
-                <a:latin typeface="맑은 고딕"/>
-              </a:rPr>
-              <a:t>→ 통계적으로 단정 불가.</a:t>
-            </a:r>
-          </a:p>
-          <a:p>
-            <a:pPr algn="l">
-              <a:spcAft>
-                <a:spcPts val="600"/>
-              </a:spcAft>
-            </a:pPr>
-            <a:r>
-              <a:rPr sz="1500" b="0">
-                <a:solidFill>
-                  <a:srgbClr val="202020"/>
-                </a:solidFill>
-                <a:latin typeface="맑은 고딕"/>
-              </a:rPr>
-              <a:t>→ 그래서 "52.7%를 잡아낸다"고</a:t>
-            </a:r>
-          </a:p>
-          <a:p>
-            <a:pPr algn="l">
-              <a:spcAft>
-                <a:spcPts val="600"/>
-              </a:spcAft>
-            </a:pPr>
-            <a:r>
-              <a:rPr sz="1500" b="0">
-                <a:solidFill>
-                  <a:srgbClr val="202020"/>
-                </a:solidFill>
-                <a:latin typeface="맑은 고딕"/>
-              </a:rPr>
-              <a:t>   수치를 못박지 않는다</a:t>
-            </a:r>
-          </a:p>
-        </p:txBody>
-      </p:sp>
-      <p:sp>
-        <p:nvSpPr>
-          <p:cNvPr id="7" name="TextBox 6"/>
-          <p:cNvSpPr txBox="1"/>
-          <p:nvPr/>
-        </p:nvSpPr>
-        <p:spPr>
-          <a:xfrm>
-            <a:off x="822960" y="5806440"/>
-            <a:ext cx="10607040" cy="731520"/>
-          </a:xfrm>
-          <a:prstGeom prst="rect">
-            <a:avLst/>
-          </a:prstGeom>
-          <a:noFill/>
-        </p:spPr>
-        <p:txBody>
-          <a:bodyPr wrap="square">
-            <a:spAutoFit/>
-          </a:bodyPr>
-          <a:lstStyle/>
-          <a:p>
-            <a:pPr algn="ctr">
-              <a:spcAft>
-                <a:spcPts val="600"/>
-              </a:spcAft>
-            </a:pPr>
-            <a:r>
-              <a:rPr sz="1600" b="1">
-                <a:solidFill>
-                  <a:srgbClr val="104281"/>
-                </a:solidFill>
-                <a:latin typeface="맑은 고딕"/>
-              </a:rPr>
-              <a:t>숫자를 좋게 만드는 대신, 말할 수 있는 것과 없는 것을 정확히 갈랐습니다</a:t>
             </a:r>
           </a:p>
         </p:txBody>
@@ -6245,7 +6515,7 @@
                 </a:solidFill>
                 <a:latin typeface="맑은 고딕"/>
               </a:rPr>
-              <a:t>05. 서비스</a:t>
+              <a:t>04. 검증 ②</a:t>
             </a:r>
           </a:p>
         </p:txBody>
@@ -6284,21 +6554,45 @@
                 </a:solidFill>
                 <a:latin typeface="맑은 고딕"/>
               </a:rPr>
-              <a:t>웹 스크리닝 서비스(FastAPI) — 업로드에서 안내까지</a:t>
-            </a:r>
-          </a:p>
-        </p:txBody>
-      </p:sp>
-      <p:sp>
-        <p:nvSpPr>
-          <p:cNvPr id="5" name="TextBox 4"/>
+              <a:t>Q6 — 우연은 아닌가?  →  구분 능력은 진짜다 (우연일 확률 0.6%)</a:t>
+            </a:r>
+          </a:p>
+        </p:txBody>
+      </p:sp>
+      <p:pic>
+        <p:nvPicPr>
+          <p:cNvPr id="5" name="Picture 4" descr="11_permutation_test.png"/>
+          <p:cNvPicPr>
+            <a:picLocks noChangeAspect="1"/>
+          </p:cNvPicPr>
+          <p:nvPr/>
+        </p:nvPicPr>
+        <p:blipFill>
+          <a:blip r:embed="rId2"/>
+          <a:stretch>
+            <a:fillRect/>
+          </a:stretch>
+        </p:blipFill>
+        <p:spPr>
+          <a:xfrm>
+            <a:off x="640080" y="2144684"/>
+            <a:ext cx="6949440" cy="2842952"/>
+          </a:xfrm>
+          <a:prstGeom prst="rect">
+            <a:avLst/>
+          </a:prstGeom>
+        </p:spPr>
+      </p:pic>
+      <p:sp>
+        <p:nvSpPr>
+          <p:cNvPr id="6" name="TextBox 5"/>
           <p:cNvSpPr txBox="1"/>
           <p:nvPr/>
         </p:nvSpPr>
         <p:spPr>
           <a:xfrm>
-            <a:off x="914400" y="1691640"/>
-            <a:ext cx="4754880" cy="457200"/>
+            <a:off x="7772400" y="1828800"/>
+            <a:ext cx="4023360" cy="4206240"/>
           </a:xfrm>
           <a:prstGeom prst="rect">
             <a:avLst/>
@@ -6317,27 +6611,155 @@
               </a:spcAft>
             </a:pPr>
             <a:r>
-              <a:rPr sz="1700" b="1">
+              <a:rPr sz="1500" b="0">
+                <a:solidFill>
+                  <a:srgbClr val="666666"/>
+                </a:solidFill>
+                <a:latin typeface="맑은 고딕"/>
+              </a:rPr>
+              <a:t>정답(진단 결과)을 일부러 뒤섞은 가짜 데이터 500개와 비교</a:t>
+            </a:r>
+          </a:p>
+          <a:p>
+            <a:pPr algn="l">
+              <a:spcAft>
+                <a:spcPts val="600"/>
+              </a:spcAft>
+            </a:pPr>
+            <a:r>
+              <a:rPr sz="600" b="0">
+                <a:solidFill>
+                  <a:srgbClr val="202020"/>
+                </a:solidFill>
+                <a:latin typeface="맑은 고딕"/>
+              </a:rPr>
+              <a:t/>
+            </a:r>
+          </a:p>
+          <a:p>
+            <a:pPr algn="l">
+              <a:spcAft>
+                <a:spcPts val="600"/>
+              </a:spcAft>
+            </a:pPr>
+            <a:r>
+              <a:rPr sz="1900" b="1">
                 <a:solidFill>
                   <a:srgbClr val="104281"/>
                 </a:solidFill>
                 <a:latin typeface="맑은 고딕"/>
               </a:rPr>
-              <a:t>①  생활 기록 CSV 업로드</a:t>
-            </a:r>
-          </a:p>
-        </p:txBody>
-      </p:sp>
-      <p:sp>
-        <p:nvSpPr>
-          <p:cNvPr id="6" name="TextBox 5"/>
+              <a:t>정확도  p = 0.006</a:t>
+            </a:r>
+          </a:p>
+          <a:p>
+            <a:pPr algn="l">
+              <a:spcAft>
+                <a:spcPts val="600"/>
+              </a:spcAft>
+            </a:pPr>
+            <a:r>
+              <a:rPr sz="1500" b="0">
+                <a:solidFill>
+                  <a:srgbClr val="202020"/>
+                </a:solidFill>
+                <a:latin typeface="맑은 고딕"/>
+              </a:rPr>
+              <a:t>→ 우연히 나올 확률 0.6%. 통과</a:t>
+            </a:r>
+          </a:p>
+          <a:p>
+            <a:pPr algn="l">
+              <a:spcAft>
+                <a:spcPts val="600"/>
+              </a:spcAft>
+            </a:pPr>
+            <a:r>
+              <a:rPr sz="600" b="0">
+                <a:solidFill>
+                  <a:srgbClr val="202020"/>
+                </a:solidFill>
+                <a:latin typeface="맑은 고딕"/>
+              </a:rPr>
+              <a:t/>
+            </a:r>
+          </a:p>
+          <a:p>
+            <a:pPr algn="l">
+              <a:spcAft>
+                <a:spcPts val="600"/>
+              </a:spcAft>
+            </a:pPr>
+            <a:r>
+              <a:rPr sz="1900" b="1">
+                <a:solidFill>
+                  <a:srgbClr val="C44E52"/>
+                </a:solidFill>
+                <a:latin typeface="맑은 고딕"/>
+              </a:rPr>
+              <a:t>재현율  p = 0.132</a:t>
+            </a:r>
+          </a:p>
+          <a:p>
+            <a:pPr algn="l">
+              <a:spcAft>
+                <a:spcPts val="600"/>
+              </a:spcAft>
+            </a:pPr>
+            <a:r>
+              <a:rPr sz="1500" b="0">
+                <a:solidFill>
+                  <a:srgbClr val="202020"/>
+                </a:solidFill>
+                <a:latin typeface="맑은 고딕"/>
+              </a:rPr>
+              <a:t>→ 통계적으로 단정 불가.</a:t>
+            </a:r>
+          </a:p>
+          <a:p>
+            <a:pPr algn="l">
+              <a:spcAft>
+                <a:spcPts val="600"/>
+              </a:spcAft>
+            </a:pPr>
+            <a:r>
+              <a:rPr sz="1500" b="0">
+                <a:solidFill>
+                  <a:srgbClr val="202020"/>
+                </a:solidFill>
+                <a:latin typeface="맑은 고딕"/>
+              </a:rPr>
+              <a:t>→ 그래서 "52.7%를 잡아낸다"고</a:t>
+            </a:r>
+          </a:p>
+          <a:p>
+            <a:pPr algn="l">
+              <a:spcAft>
+                <a:spcPts val="600"/>
+              </a:spcAft>
+            </a:pPr>
+            <a:r>
+              <a:rPr sz="1500" b="0">
+                <a:solidFill>
+                  <a:srgbClr val="202020"/>
+                </a:solidFill>
+                <a:latin typeface="맑은 고딕"/>
+              </a:rPr>
+              <a:t>   수치를 못박지 않는다</a:t>
+            </a:r>
+          </a:p>
+        </p:txBody>
+      </p:sp>
+      <p:sp>
+        <p:nvSpPr>
+          <p:cNvPr id="7" name="TextBox 6"/>
           <p:cNvSpPr txBox="1"/>
           <p:nvPr/>
         </p:nvSpPr>
         <p:spPr>
           <a:xfrm>
-            <a:off x="5120640" y="1719072"/>
-            <a:ext cx="6675120" cy="457200"/>
+            <a:off x="822960" y="5806440"/>
+            <a:ext cx="10607040" cy="731520"/>
           </a:xfrm>
           <a:prstGeom prst="rect">
             <a:avLst/>
@@ -6350,370 +6772,19 @@
           </a:bodyPr>
           <a:lstStyle/>
           <a:p>
-            <a:pPr algn="l">
-              <a:spcAft>
-                <a:spcPts val="600"/>
-              </a:spcAft>
-            </a:pPr>
-            <a:r>
-              <a:rPr sz="1350" b="0">
-                <a:solidFill>
-                  <a:srgbClr val="202020"/>
-                </a:solidFill>
-                <a:latin typeface="맑은 고딕"/>
-              </a:rPr>
-              <a:t>웨어러블에서 내려받은 기록 파일 · 유효 기록 14일 미만이면 판정하지 않음</a:t>
-            </a:r>
-          </a:p>
-        </p:txBody>
-      </p:sp>
-      <p:sp>
-        <p:nvSpPr>
-          <p:cNvPr id="7" name="TextBox 6"/>
-          <p:cNvSpPr txBox="1"/>
-          <p:nvPr/>
-        </p:nvSpPr>
-        <p:spPr>
-          <a:xfrm>
-            <a:off x="914400" y="2532888"/>
-            <a:ext cx="4754880" cy="457200"/>
-          </a:xfrm>
-          <a:prstGeom prst="rect">
-            <a:avLst/>
-          </a:prstGeom>
-          <a:noFill/>
-        </p:spPr>
-        <p:txBody>
-          <a:bodyPr wrap="square">
-            <a:spAutoFit/>
-          </a:bodyPr>
-          <a:lstStyle/>
-          <a:p>
-            <a:pPr algn="l">
-              <a:spcAft>
-                <a:spcPts val="600"/>
-              </a:spcAft>
-            </a:pPr>
-            <a:r>
-              <a:rPr sz="1700" b="1">
+            <a:pPr algn="ctr">
+              <a:spcAft>
+                <a:spcPts val="600"/>
+              </a:spcAft>
+            </a:pPr>
+            <a:r>
+              <a:rPr sz="1600" b="1">
                 <a:solidFill>
                   <a:srgbClr val="104281"/>
                 </a:solidFill>
                 <a:latin typeface="맑은 고딕"/>
               </a:rPr>
-              <a:t>②  위험 점수 산출</a:t>
-            </a:r>
-          </a:p>
-        </p:txBody>
-      </p:sp>
-      <p:sp>
-        <p:nvSpPr>
-          <p:cNvPr id="8" name="TextBox 7"/>
-          <p:cNvSpPr txBox="1"/>
-          <p:nvPr/>
-        </p:nvSpPr>
-        <p:spPr>
-          <a:xfrm>
-            <a:off x="5120640" y="2560320"/>
-            <a:ext cx="6675120" cy="457200"/>
-          </a:xfrm>
-          <a:prstGeom prst="rect">
-            <a:avLst/>
-          </a:prstGeom>
-          <a:noFill/>
-        </p:spPr>
-        <p:txBody>
-          <a:bodyPr wrap="square">
-            <a:spAutoFit/>
-          </a:bodyPr>
-          <a:lstStyle/>
-          <a:p>
-            <a:pPr algn="l">
-              <a:spcAft>
-                <a:spcPts val="600"/>
-              </a:spcAft>
-            </a:pPr>
-            <a:r>
-              <a:rPr sz="1350" b="0">
-                <a:solidFill>
-                  <a:srgbClr val="202020"/>
-                </a:solidFill>
-                <a:latin typeface="맑은 고딕"/>
-              </a:rPr>
-              <a:t>학습과 동일한 지표 계산 → 검증된 모델로 예측 (0~1 점수)</a:t>
-            </a:r>
-          </a:p>
-        </p:txBody>
-      </p:sp>
-      <p:sp>
-        <p:nvSpPr>
-          <p:cNvPr id="9" name="TextBox 8"/>
-          <p:cNvSpPr txBox="1"/>
-          <p:nvPr/>
-        </p:nvSpPr>
-        <p:spPr>
-          <a:xfrm>
-            <a:off x="914400" y="3374136"/>
-            <a:ext cx="4754880" cy="457200"/>
-          </a:xfrm>
-          <a:prstGeom prst="rect">
-            <a:avLst/>
-          </a:prstGeom>
-          <a:noFill/>
-        </p:spPr>
-        <p:txBody>
-          <a:bodyPr wrap="square">
-            <a:spAutoFit/>
-          </a:bodyPr>
-          <a:lstStyle/>
-          <a:p>
-            <a:pPr algn="l">
-              <a:spcAft>
-                <a:spcPts val="600"/>
-              </a:spcAft>
-            </a:pPr>
-            <a:r>
-              <a:rPr sz="1700" b="1">
-                <a:solidFill>
-                  <a:srgbClr val="104281"/>
-                </a:solidFill>
-                <a:latin typeface="맑은 고딕"/>
-              </a:rPr>
-              <a:t>③  판단 근거 제시</a:t>
-            </a:r>
-          </a:p>
-        </p:txBody>
-      </p:sp>
-      <p:sp>
-        <p:nvSpPr>
-          <p:cNvPr id="10" name="TextBox 9"/>
-          <p:cNvSpPr txBox="1"/>
-          <p:nvPr/>
-        </p:nvSpPr>
-        <p:spPr>
-          <a:xfrm>
-            <a:off x="5120640" y="3401568"/>
-            <a:ext cx="6675120" cy="457200"/>
-          </a:xfrm>
-          <a:prstGeom prst="rect">
-            <a:avLst/>
-          </a:prstGeom>
-          <a:noFill/>
-        </p:spPr>
-        <p:txBody>
-          <a:bodyPr wrap="square">
-            <a:spAutoFit/>
-          </a:bodyPr>
-          <a:lstStyle/>
-          <a:p>
-            <a:pPr algn="l">
-              <a:spcAft>
-                <a:spcPts val="600"/>
-              </a:spcAft>
-            </a:pPr>
-            <a:r>
-              <a:rPr sz="1350" b="0">
-                <a:solidFill>
-                  <a:srgbClr val="202020"/>
-                </a:solidFill>
-                <a:latin typeface="맑은 고딕"/>
-              </a:rPr>
-              <a:t>정상군 평균과 가장 크게 다른 지표 3가지를 그래프로 비교</a:t>
-            </a:r>
-          </a:p>
-        </p:txBody>
-      </p:sp>
-      <p:sp>
-        <p:nvSpPr>
-          <p:cNvPr id="11" name="TextBox 10"/>
-          <p:cNvSpPr txBox="1"/>
-          <p:nvPr/>
-        </p:nvSpPr>
-        <p:spPr>
-          <a:xfrm>
-            <a:off x="914400" y="4215384"/>
-            <a:ext cx="4754880" cy="457200"/>
-          </a:xfrm>
-          <a:prstGeom prst="rect">
-            <a:avLst/>
-          </a:prstGeom>
-          <a:noFill/>
-        </p:spPr>
-        <p:txBody>
-          <a:bodyPr wrap="square">
-            <a:spAutoFit/>
-          </a:bodyPr>
-          <a:lstStyle/>
-          <a:p>
-            <a:pPr algn="l">
-              <a:spcAft>
-                <a:spcPts val="600"/>
-              </a:spcAft>
-            </a:pPr>
-            <a:r>
-              <a:rPr sz="1700" b="1">
-                <a:solidFill>
-                  <a:srgbClr val="104281"/>
-                </a:solidFill>
-                <a:latin typeface="맑은 고딕"/>
-              </a:rPr>
-              <a:t>④  치매안심센터 연결</a:t>
-            </a:r>
-          </a:p>
-        </p:txBody>
-      </p:sp>
-      <p:sp>
-        <p:nvSpPr>
-          <p:cNvPr id="12" name="TextBox 11"/>
-          <p:cNvSpPr txBox="1"/>
-          <p:nvPr/>
-        </p:nvSpPr>
-        <p:spPr>
-          <a:xfrm>
-            <a:off x="5120640" y="4242816"/>
-            <a:ext cx="6675120" cy="457200"/>
-          </a:xfrm>
-          <a:prstGeom prst="rect">
-            <a:avLst/>
-          </a:prstGeom>
-          <a:noFill/>
-        </p:spPr>
-        <p:txBody>
-          <a:bodyPr wrap="square">
-            <a:spAutoFit/>
-          </a:bodyPr>
-          <a:lstStyle/>
-          <a:p>
-            <a:pPr algn="l">
-              <a:spcAft>
-                <a:spcPts val="600"/>
-              </a:spcAft>
-            </a:pPr>
-            <a:r>
-              <a:rPr sz="1350" b="0">
-                <a:solidFill>
-                  <a:srgbClr val="202020"/>
-                </a:solidFill>
-                <a:latin typeface="맑은 고딕"/>
-              </a:rPr>
-              <a:t>공공데이터포털 전국 317곳 연동 — 내 위치 기준 가까운 순, 지도 표시</a:t>
-            </a:r>
-          </a:p>
-        </p:txBody>
-      </p:sp>
-      <p:sp>
-        <p:nvSpPr>
-          <p:cNvPr id="13" name="TextBox 12"/>
-          <p:cNvSpPr txBox="1"/>
-          <p:nvPr/>
-        </p:nvSpPr>
-        <p:spPr>
-          <a:xfrm>
-            <a:off x="914400" y="5056632"/>
-            <a:ext cx="4754880" cy="457200"/>
-          </a:xfrm>
-          <a:prstGeom prst="rect">
-            <a:avLst/>
-          </a:prstGeom>
-          <a:noFill/>
-        </p:spPr>
-        <p:txBody>
-          <a:bodyPr wrap="square">
-            <a:spAutoFit/>
-          </a:bodyPr>
-          <a:lstStyle/>
-          <a:p>
-            <a:pPr algn="l">
-              <a:spcAft>
-                <a:spcPts val="600"/>
-              </a:spcAft>
-            </a:pPr>
-            <a:r>
-              <a:rPr sz="1700" b="1">
-                <a:solidFill>
-                  <a:srgbClr val="104281"/>
-                </a:solidFill>
-                <a:latin typeface="맑은 고딕"/>
-              </a:rPr>
-              <a:t>⑤  한계 고지</a:t>
-            </a:r>
-          </a:p>
-        </p:txBody>
-      </p:sp>
-      <p:sp>
-        <p:nvSpPr>
-          <p:cNvPr id="14" name="TextBox 13"/>
-          <p:cNvSpPr txBox="1"/>
-          <p:nvPr/>
-        </p:nvSpPr>
-        <p:spPr>
-          <a:xfrm>
-            <a:off x="5120640" y="5084064"/>
-            <a:ext cx="6675120" cy="457200"/>
-          </a:xfrm>
-          <a:prstGeom prst="rect">
-            <a:avLst/>
-          </a:prstGeom>
-          <a:noFill/>
-        </p:spPr>
-        <p:txBody>
-          <a:bodyPr wrap="square">
-            <a:spAutoFit/>
-          </a:bodyPr>
-          <a:lstStyle/>
-          <a:p>
-            <a:pPr algn="l">
-              <a:spcAft>
-                <a:spcPts val="600"/>
-              </a:spcAft>
-            </a:pPr>
-            <a:r>
-              <a:rPr sz="1350" b="0">
-                <a:solidFill>
-                  <a:srgbClr val="202020"/>
-                </a:solidFill>
-                <a:latin typeface="맑은 고딕"/>
-              </a:rPr>
-              <a:t>"진단이 아닌 참고용 · 표본 174명" — 모든 결과 화면에 명시</a:t>
-            </a:r>
-          </a:p>
-        </p:txBody>
-      </p:sp>
-      <p:sp>
-        <p:nvSpPr>
-          <p:cNvPr id="15" name="TextBox 14"/>
-          <p:cNvSpPr txBox="1"/>
-          <p:nvPr/>
-        </p:nvSpPr>
-        <p:spPr>
-          <a:xfrm>
-            <a:off x="914400" y="5943600"/>
-            <a:ext cx="10515600" cy="548640"/>
-          </a:xfrm>
-          <a:prstGeom prst="rect">
-            <a:avLst/>
-          </a:prstGeom>
-          <a:noFill/>
-        </p:spPr>
-        <p:txBody>
-          <a:bodyPr wrap="square">
-            <a:spAutoFit/>
-          </a:bodyPr>
-          <a:lstStyle/>
-          <a:p>
-            <a:pPr algn="l">
-              <a:spcAft>
-                <a:spcPts val="600"/>
-              </a:spcAft>
-            </a:pPr>
-            <a:r>
-              <a:rPr sz="1400" b="0">
-                <a:solidFill>
-                  <a:srgbClr val="666666"/>
-                </a:solidFill>
-                <a:latin typeface="맑은 고딕"/>
-              </a:rPr>
-              <a:t>모델 파일만 갈아끼우면 서비스가 그대로 새 모델을 쓰는 구조 — 데이터가 좋아지면 즉시 반영</a:t>
+              <a:t>숫자를 좋게 만드는 대신, 말할 수 있는 것과 없는 것을 정확히 갈랐습니다</a:t>
             </a:r>
           </a:p>
         </p:txBody>
@@ -6813,7 +6884,7 @@
                 </a:solidFill>
                 <a:latin typeface="맑은 고딕"/>
               </a:rPr>
-              <a:t>05. 서비스 시연</a:t>
+              <a:t>05. 서비스</a:t>
             </a:r>
           </a:p>
         </p:txBody>
@@ -6852,7 +6923,7 @@
                 </a:solidFill>
                 <a:latin typeface="맑은 고딕"/>
               </a:rPr>
-              <a:t>시연 순서</a:t>
+              <a:t>웹 스크리닝 서비스(FastAPI) — 업로드에서 안내까지</a:t>
             </a:r>
           </a:p>
         </p:txBody>
@@ -6865,8 +6936,8 @@
         </p:nvSpPr>
         <p:spPr>
           <a:xfrm>
-            <a:off x="914400" y="2286000"/>
-            <a:ext cx="10607040" cy="4389120"/>
+            <a:off x="914400" y="1691640"/>
+            <a:ext cx="4754880" cy="457200"/>
           </a:xfrm>
           <a:prstGeom prst="rect">
             <a:avLst/>
@@ -6885,125 +6956,403 @@
               </a:spcAft>
             </a:pPr>
             <a:r>
-              <a:rPr sz="1900" b="0">
+              <a:rPr sz="1700" b="1">
+                <a:solidFill>
+                  <a:srgbClr val="104281"/>
+                </a:solidFill>
+                <a:latin typeface="맑은 고딕"/>
+              </a:rPr>
+              <a:t>①  생활 기록 CSV 업로드</a:t>
+            </a:r>
+          </a:p>
+        </p:txBody>
+      </p:sp>
+      <p:sp>
+        <p:nvSpPr>
+          <p:cNvPr id="6" name="TextBox 5"/>
+          <p:cNvSpPr txBox="1"/>
+          <p:nvPr/>
+        </p:nvSpPr>
+        <p:spPr>
+          <a:xfrm>
+            <a:off x="5120640" y="1719072"/>
+            <a:ext cx="6675120" cy="457200"/>
+          </a:xfrm>
+          <a:prstGeom prst="rect">
+            <a:avLst/>
+          </a:prstGeom>
+          <a:noFill/>
+        </p:spPr>
+        <p:txBody>
+          <a:bodyPr wrap="square">
+            <a:spAutoFit/>
+          </a:bodyPr>
+          <a:lstStyle/>
+          <a:p>
+            <a:pPr algn="l">
+              <a:spcAft>
+                <a:spcPts val="600"/>
+              </a:spcAft>
+            </a:pPr>
+            <a:r>
+              <a:rPr sz="1350" b="0">
                 <a:solidFill>
                   <a:srgbClr val="202020"/>
                 </a:solidFill>
                 <a:latin typeface="맑은 고딕"/>
               </a:rPr>
-              <a:t>1.  정상군 샘플 업로드  →  위험 점수 0.29, "뚜렷한 위험 신호 없음"</a:t>
-            </a:r>
-          </a:p>
-          <a:p>
-            <a:pPr algn="l">
-              <a:spcAft>
-                <a:spcPts val="600"/>
-              </a:spcAft>
-            </a:pPr>
-            <a:r>
-              <a:rPr sz="600" b="0">
+              <a:t>웨어러블에서 내려받은 기록 파일 · 유효 기록 14일 미만이면 판정하지 않음</a:t>
+            </a:r>
+          </a:p>
+        </p:txBody>
+      </p:sp>
+      <p:sp>
+        <p:nvSpPr>
+          <p:cNvPr id="7" name="TextBox 6"/>
+          <p:cNvSpPr txBox="1"/>
+          <p:nvPr/>
+        </p:nvSpPr>
+        <p:spPr>
+          <a:xfrm>
+            <a:off x="914400" y="2532888"/>
+            <a:ext cx="4754880" cy="457200"/>
+          </a:xfrm>
+          <a:prstGeom prst="rect">
+            <a:avLst/>
+          </a:prstGeom>
+          <a:noFill/>
+        </p:spPr>
+        <p:txBody>
+          <a:bodyPr wrap="square">
+            <a:spAutoFit/>
+          </a:bodyPr>
+          <a:lstStyle/>
+          <a:p>
+            <a:pPr algn="l">
+              <a:spcAft>
+                <a:spcPts val="600"/>
+              </a:spcAft>
+            </a:pPr>
+            <a:r>
+              <a:rPr sz="1700" b="1">
+                <a:solidFill>
+                  <a:srgbClr val="104281"/>
+                </a:solidFill>
+                <a:latin typeface="맑은 고딕"/>
+              </a:rPr>
+              <a:t>②  위험 점수 산출</a:t>
+            </a:r>
+          </a:p>
+        </p:txBody>
+      </p:sp>
+      <p:sp>
+        <p:nvSpPr>
+          <p:cNvPr id="8" name="TextBox 7"/>
+          <p:cNvSpPr txBox="1"/>
+          <p:nvPr/>
+        </p:nvSpPr>
+        <p:spPr>
+          <a:xfrm>
+            <a:off x="5120640" y="2560320"/>
+            <a:ext cx="6675120" cy="457200"/>
+          </a:xfrm>
+          <a:prstGeom prst="rect">
+            <a:avLst/>
+          </a:prstGeom>
+          <a:noFill/>
+        </p:spPr>
+        <p:txBody>
+          <a:bodyPr wrap="square">
+            <a:spAutoFit/>
+          </a:bodyPr>
+          <a:lstStyle/>
+          <a:p>
+            <a:pPr algn="l">
+              <a:spcAft>
+                <a:spcPts val="600"/>
+              </a:spcAft>
+            </a:pPr>
+            <a:r>
+              <a:rPr sz="1350" b="0">
                 <a:solidFill>
                   <a:srgbClr val="202020"/>
                 </a:solidFill>
                 <a:latin typeface="맑은 고딕"/>
               </a:rPr>
-              <a:t/>
-            </a:r>
-          </a:p>
-          <a:p>
-            <a:pPr algn="l">
-              <a:spcAft>
-                <a:spcPts val="600"/>
-              </a:spcAft>
-            </a:pPr>
-            <a:r>
-              <a:rPr sz="1900" b="0">
+              <a:t>학습과 동일한 지표 계산 → 검증된 모델로 예측 (0~1 점수)</a:t>
+            </a:r>
+          </a:p>
+        </p:txBody>
+      </p:sp>
+      <p:sp>
+        <p:nvSpPr>
+          <p:cNvPr id="9" name="TextBox 8"/>
+          <p:cNvSpPr txBox="1"/>
+          <p:nvPr/>
+        </p:nvSpPr>
+        <p:spPr>
+          <a:xfrm>
+            <a:off x="914400" y="3374136"/>
+            <a:ext cx="4754880" cy="457200"/>
+          </a:xfrm>
+          <a:prstGeom prst="rect">
+            <a:avLst/>
+          </a:prstGeom>
+          <a:noFill/>
+        </p:spPr>
+        <p:txBody>
+          <a:bodyPr wrap="square">
+            <a:spAutoFit/>
+          </a:bodyPr>
+          <a:lstStyle/>
+          <a:p>
+            <a:pPr algn="l">
+              <a:spcAft>
+                <a:spcPts val="600"/>
+              </a:spcAft>
+            </a:pPr>
+            <a:r>
+              <a:rPr sz="1700" b="1">
+                <a:solidFill>
+                  <a:srgbClr val="104281"/>
+                </a:solidFill>
+                <a:latin typeface="맑은 고딕"/>
+              </a:rPr>
+              <a:t>③  판단 근거 제시</a:t>
+            </a:r>
+          </a:p>
+        </p:txBody>
+      </p:sp>
+      <p:sp>
+        <p:nvSpPr>
+          <p:cNvPr id="10" name="TextBox 9"/>
+          <p:cNvSpPr txBox="1"/>
+          <p:nvPr/>
+        </p:nvSpPr>
+        <p:spPr>
+          <a:xfrm>
+            <a:off x="5120640" y="3401568"/>
+            <a:ext cx="6675120" cy="457200"/>
+          </a:xfrm>
+          <a:prstGeom prst="rect">
+            <a:avLst/>
+          </a:prstGeom>
+          <a:noFill/>
+        </p:spPr>
+        <p:txBody>
+          <a:bodyPr wrap="square">
+            <a:spAutoFit/>
+          </a:bodyPr>
+          <a:lstStyle/>
+          <a:p>
+            <a:pPr algn="l">
+              <a:spcAft>
+                <a:spcPts val="600"/>
+              </a:spcAft>
+            </a:pPr>
+            <a:r>
+              <a:rPr sz="1350" b="0">
                 <a:solidFill>
                   <a:srgbClr val="202020"/>
                 </a:solidFill>
                 <a:latin typeface="맑은 고딕"/>
               </a:rPr>
-              <a:t>2.  위험군 샘플 업로드  →  위험 점수 0.644, "위험군 추정"</a:t>
-            </a:r>
-          </a:p>
-          <a:p>
-            <a:pPr algn="l">
-              <a:spcAft>
-                <a:spcPts val="600"/>
-              </a:spcAft>
-            </a:pPr>
-            <a:r>
-              <a:rPr sz="1500" b="0">
+              <a:t>정상군 평균과 가장 크게 다른 지표 3가지를 그래프로 비교</a:t>
+            </a:r>
+          </a:p>
+        </p:txBody>
+      </p:sp>
+      <p:sp>
+        <p:nvSpPr>
+          <p:cNvPr id="11" name="TextBox 10"/>
+          <p:cNvSpPr txBox="1"/>
+          <p:nvPr/>
+        </p:nvSpPr>
+        <p:spPr>
+          <a:xfrm>
+            <a:off x="914400" y="4215384"/>
+            <a:ext cx="4754880" cy="457200"/>
+          </a:xfrm>
+          <a:prstGeom prst="rect">
+            <a:avLst/>
+          </a:prstGeom>
+          <a:noFill/>
+        </p:spPr>
+        <p:txBody>
+          <a:bodyPr wrap="square">
+            <a:spAutoFit/>
+          </a:bodyPr>
+          <a:lstStyle/>
+          <a:p>
+            <a:pPr algn="l">
+              <a:spcAft>
+                <a:spcPts val="600"/>
+              </a:spcAft>
+            </a:pPr>
+            <a:r>
+              <a:rPr sz="1700" b="1">
+                <a:solidFill>
+                  <a:srgbClr val="104281"/>
+                </a:solidFill>
+                <a:latin typeface="맑은 고딕"/>
+              </a:rPr>
+              <a:t>④  치매안심센터 연결</a:t>
+            </a:r>
+          </a:p>
+        </p:txBody>
+      </p:sp>
+      <p:sp>
+        <p:nvSpPr>
+          <p:cNvPr id="12" name="TextBox 11"/>
+          <p:cNvSpPr txBox="1"/>
+          <p:nvPr/>
+        </p:nvSpPr>
+        <p:spPr>
+          <a:xfrm>
+            <a:off x="5120640" y="4242816"/>
+            <a:ext cx="6675120" cy="457200"/>
+          </a:xfrm>
+          <a:prstGeom prst="rect">
+            <a:avLst/>
+          </a:prstGeom>
+          <a:noFill/>
+        </p:spPr>
+        <p:txBody>
+          <a:bodyPr wrap="square">
+            <a:spAutoFit/>
+          </a:bodyPr>
+          <a:lstStyle/>
+          <a:p>
+            <a:pPr algn="l">
+              <a:spcAft>
+                <a:spcPts val="600"/>
+              </a:spcAft>
+            </a:pPr>
+            <a:r>
+              <a:rPr sz="1350" b="0">
+                <a:solidFill>
+                  <a:srgbClr val="202020"/>
+                </a:solidFill>
+                <a:latin typeface="맑은 고딕"/>
+              </a:rPr>
+              <a:t>공공데이터포털 전국 317곳 연동 — 내 위치 기준 가까운 순, 지도 표시</a:t>
+            </a:r>
+          </a:p>
+        </p:txBody>
+      </p:sp>
+      <p:sp>
+        <p:nvSpPr>
+          <p:cNvPr id="13" name="TextBox 12"/>
+          <p:cNvSpPr txBox="1"/>
+          <p:nvPr/>
+        </p:nvSpPr>
+        <p:spPr>
+          <a:xfrm>
+            <a:off x="914400" y="5056632"/>
+            <a:ext cx="4754880" cy="457200"/>
+          </a:xfrm>
+          <a:prstGeom prst="rect">
+            <a:avLst/>
+          </a:prstGeom>
+          <a:noFill/>
+        </p:spPr>
+        <p:txBody>
+          <a:bodyPr wrap="square">
+            <a:spAutoFit/>
+          </a:bodyPr>
+          <a:lstStyle/>
+          <a:p>
+            <a:pPr algn="l">
+              <a:spcAft>
+                <a:spcPts val="600"/>
+              </a:spcAft>
+            </a:pPr>
+            <a:r>
+              <a:rPr sz="1700" b="1">
+                <a:solidFill>
+                  <a:srgbClr val="104281"/>
+                </a:solidFill>
+                <a:latin typeface="맑은 고딕"/>
+              </a:rPr>
+              <a:t>⑤  한계 고지</a:t>
+            </a:r>
+          </a:p>
+        </p:txBody>
+      </p:sp>
+      <p:sp>
+        <p:nvSpPr>
+          <p:cNvPr id="14" name="TextBox 13"/>
+          <p:cNvSpPr txBox="1"/>
+          <p:nvPr/>
+        </p:nvSpPr>
+        <p:spPr>
+          <a:xfrm>
+            <a:off x="5120640" y="5084064"/>
+            <a:ext cx="6675120" cy="457200"/>
+          </a:xfrm>
+          <a:prstGeom prst="rect">
+            <a:avLst/>
+          </a:prstGeom>
+          <a:noFill/>
+        </p:spPr>
+        <p:txBody>
+          <a:bodyPr wrap="square">
+            <a:spAutoFit/>
+          </a:bodyPr>
+          <a:lstStyle/>
+          <a:p>
+            <a:pPr algn="l">
+              <a:spcAft>
+                <a:spcPts val="600"/>
+              </a:spcAft>
+            </a:pPr>
+            <a:r>
+              <a:rPr sz="1350" b="0">
+                <a:solidFill>
+                  <a:srgbClr val="202020"/>
+                </a:solidFill>
+                <a:latin typeface="맑은 고딕"/>
+              </a:rPr>
+              <a:t>"진단이 아닌 참고용 · 표본 174명" — 모든 결과 화면에 명시</a:t>
+            </a:r>
+          </a:p>
+        </p:txBody>
+      </p:sp>
+      <p:sp>
+        <p:nvSpPr>
+          <p:cNvPr id="15" name="TextBox 14"/>
+          <p:cNvSpPr txBox="1"/>
+          <p:nvPr/>
+        </p:nvSpPr>
+        <p:spPr>
+          <a:xfrm>
+            <a:off x="914400" y="5943600"/>
+            <a:ext cx="10515600" cy="548640"/>
+          </a:xfrm>
+          <a:prstGeom prst="rect">
+            <a:avLst/>
+          </a:prstGeom>
+          <a:noFill/>
+        </p:spPr>
+        <p:txBody>
+          <a:bodyPr wrap="square">
+            <a:spAutoFit/>
+          </a:bodyPr>
+          <a:lstStyle/>
+          <a:p>
+            <a:pPr algn="l">
+              <a:spcAft>
+                <a:spcPts val="600"/>
+              </a:spcAft>
+            </a:pPr>
+            <a:r>
+              <a:rPr sz="1400" b="0">
                 <a:solidFill>
                   <a:srgbClr val="666666"/>
                 </a:solidFill>
                 <a:latin typeface="맑은 고딕"/>
               </a:rPr>
-              <a:t>     · 근거: 활동/수면 변동성이 정상군 평균 대비 높음</a:t>
-            </a:r>
-          </a:p>
-          <a:p>
-            <a:pPr algn="l">
-              <a:spcAft>
-                <a:spcPts val="600"/>
-              </a:spcAft>
-            </a:pPr>
-            <a:r>
-              <a:rPr sz="600" b="0">
-                <a:solidFill>
-                  <a:srgbClr val="202020"/>
-                </a:solidFill>
-                <a:latin typeface="맑은 고딕"/>
-              </a:rPr>
-              <a:t/>
-            </a:r>
-          </a:p>
-          <a:p>
-            <a:pPr algn="l">
-              <a:spcAft>
-                <a:spcPts val="600"/>
-              </a:spcAft>
-            </a:pPr>
-            <a:r>
-              <a:rPr sz="1900" b="0">
-                <a:solidFill>
-                  <a:srgbClr val="202020"/>
-                </a:solidFill>
-                <a:latin typeface="맑은 고딕"/>
-              </a:rPr>
-              <a:t>3.  "내 위치에서 가까운 센터 찾기"  →  지도에 가까운 치매안심센터 5곳 + 전화번호</a:t>
-            </a:r>
-          </a:p>
-          <a:p>
-            <a:pPr algn="l">
-              <a:spcAft>
-                <a:spcPts val="600"/>
-              </a:spcAft>
-            </a:pPr>
-            <a:r>
-              <a:rPr sz="1400" b="0">
-                <a:solidFill>
-                  <a:srgbClr val="202020"/>
-                </a:solidFill>
-                <a:latin typeface="맑은 고딕"/>
-              </a:rPr>
-              <a:t/>
-            </a:r>
-          </a:p>
-          <a:p>
-            <a:pPr algn="l">
-              <a:spcAft>
-                <a:spcPts val="600"/>
-              </a:spcAft>
-            </a:pPr>
-            <a:r>
-              <a:rPr sz="1400" b="0">
-                <a:solidFill>
-                  <a:srgbClr val="666666"/>
-                </a:solidFill>
-                <a:latin typeface="맑은 고딕"/>
-              </a:rPr>
-              <a:t>다음 두 페이지가 실제 서비스 화면 — 발표에서는 라이브 시연을 우선하고, 시연이 어려우면 화면으로 대체</a:t>
+              <a:t>모델 파일만 갈아끼우면 서비스가 그대로 새 모델을 쓰는 구조 — 데이터가 좋아지면 즉시 반영</a:t>
             </a:r>
           </a:p>
         </p:txBody>
@@ -7103,7 +7452,7 @@
                 </a:solidFill>
                 <a:latin typeface="맑은 고딕"/>
               </a:rPr>
-              <a:t>06. 결론</a:t>
+              <a:t>05. 서비스 시연</a:t>
             </a:r>
           </a:p>
         </p:txBody>
@@ -7142,7 +7491,7 @@
                 </a:solidFill>
                 <a:latin typeface="맑은 고딕"/>
               </a:rPr>
-              <a:t>5일 동안 만든 것은 숫자가 아니라, 믿을 수 있는 절차입니다</a:t>
+              <a:t>시연 순서</a:t>
             </a:r>
           </a:p>
         </p:txBody>
@@ -7155,8 +7504,8 @@
         </p:nvSpPr>
         <p:spPr>
           <a:xfrm>
-            <a:off x="914400" y="1691640"/>
-            <a:ext cx="10607040" cy="4846320"/>
+            <a:off x="914400" y="2286000"/>
+            <a:ext cx="10607040" cy="4389120"/>
           </a:xfrm>
           <a:prstGeom prst="rect">
             <a:avLst/>
@@ -7175,60 +7524,76 @@
               </a:spcAft>
             </a:pPr>
             <a:r>
-              <a:rPr sz="1800" b="1">
-                <a:solidFill>
-                  <a:srgbClr val="2A78D6"/>
-                </a:solidFill>
-                <a:latin typeface="맑은 고딕"/>
-              </a:rPr>
-              <a:t>확인한 것</a:t>
-            </a:r>
-          </a:p>
-          <a:p>
-            <a:pPr algn="l">
-              <a:spcAft>
-                <a:spcPts val="600"/>
-              </a:spcAft>
-            </a:pPr>
-            <a:r>
-              <a:rPr sz="1600" b="0">
+              <a:rPr sz="1900" b="0">
                 <a:solidFill>
                   <a:srgbClr val="202020"/>
                 </a:solidFill>
                 <a:latin typeface="맑은 고딕"/>
               </a:rPr>
-              <a:t>· 활동량 평균이 아니라 "생활 패턴의 불규칙함"이 위험군을 가른다</a:t>
-            </a:r>
-          </a:p>
-          <a:p>
-            <a:pPr algn="l">
-              <a:spcAft>
-                <a:spcPts val="600"/>
-              </a:spcAft>
-            </a:pPr>
-            <a:r>
-              <a:rPr sz="1600" b="0">
+              <a:t>1.  정상군 샘플 업로드  →  위험 점수 0.29, "뚜렷한 위험 신호 없음"</a:t>
+            </a:r>
+          </a:p>
+          <a:p>
+            <a:pPr algn="l">
+              <a:spcAft>
+                <a:spcPts val="600"/>
+              </a:spcAft>
+            </a:pPr>
+            <a:r>
+              <a:rPr sz="600" b="0">
                 <a:solidFill>
                   <a:srgbClr val="202020"/>
                 </a:solidFill>
                 <a:latin typeface="맑은 고딕"/>
               </a:rPr>
-              <a:t>· 그 구분 능력은 우연이 아니다 (우연일 확률 0.6%)</a:t>
-            </a:r>
-          </a:p>
-          <a:p>
-            <a:pPr algn="l">
-              <a:spcAft>
-                <a:spcPts val="600"/>
-              </a:spcAft>
-            </a:pPr>
-            <a:r>
-              <a:rPr sz="800" b="0">
+              <a:t/>
+            </a:r>
+          </a:p>
+          <a:p>
+            <a:pPr algn="l">
+              <a:spcAft>
+                <a:spcPts val="600"/>
+              </a:spcAft>
+            </a:pPr>
+            <a:r>
+              <a:rPr sz="1900" b="0">
                 <a:solidFill>
                   <a:srgbClr val="202020"/>
                 </a:solidFill>
                 <a:latin typeface="맑은 고딕"/>
               </a:rPr>
+              <a:t>2.  위험군 샘플 업로드  →  위험 점수 0.644, "위험군 추정"</a:t>
+            </a:r>
+          </a:p>
+          <a:p>
+            <a:pPr algn="l">
+              <a:spcAft>
+                <a:spcPts val="600"/>
+              </a:spcAft>
+            </a:pPr>
+            <a:r>
+              <a:rPr sz="1500" b="0">
+                <a:solidFill>
+                  <a:srgbClr val="666666"/>
+                </a:solidFill>
+                <a:latin typeface="맑은 고딕"/>
+              </a:rPr>
+              <a:t>     · 근거: 활동/수면 변동성이 정상군 평균 대비 높음</a:t>
+            </a:r>
+          </a:p>
+          <a:p>
+            <a:pPr algn="l">
+              <a:spcAft>
+                <a:spcPts val="600"/>
+              </a:spcAft>
+            </a:pPr>
+            <a:r>
+              <a:rPr sz="600" b="0">
+                <a:solidFill>
+                  <a:srgbClr val="202020"/>
+                </a:solidFill>
+                <a:latin typeface="맑은 고딕"/>
+              </a:rPr>
               <a:t/>
             </a:r>
           </a:p>
@@ -7239,60 +7604,28 @@
               </a:spcAft>
             </a:pPr>
             <a:r>
-              <a:rPr sz="1800" b="1">
-                <a:solidFill>
-                  <a:srgbClr val="2A78D6"/>
-                </a:solidFill>
-                <a:latin typeface="맑은 고딕"/>
-              </a:rPr>
-              <a:t>한계 — 숨기지 않고 명시</a:t>
-            </a:r>
-          </a:p>
-          <a:p>
-            <a:pPr algn="l">
-              <a:spcAft>
-                <a:spcPts val="600"/>
-              </a:spcAft>
-            </a:pPr>
-            <a:r>
-              <a:rPr sz="1600" b="0">
+              <a:rPr sz="1900" b="0">
                 <a:solidFill>
                   <a:srgbClr val="202020"/>
                 </a:solidFill>
                 <a:latin typeface="맑은 고딕"/>
               </a:rPr>
-              <a:t>· 표본 174명(치매 12명), 한 지역(광주)·한 시기 데이터 — 일반화에는 더 큰 데이터 필요</a:t>
-            </a:r>
-          </a:p>
-          <a:p>
-            <a:pPr algn="l">
-              <a:spcAft>
-                <a:spcPts val="600"/>
-              </a:spcAft>
-            </a:pPr>
-            <a:r>
-              <a:rPr sz="1600" b="0">
+              <a:t>3.  "내 위치에서 가까운 센터 찾기"  →  지도에 가까운 치매안심센터 5곳 + 전화번호</a:t>
+            </a:r>
+          </a:p>
+          <a:p>
+            <a:pPr algn="l">
+              <a:spcAft>
+                <a:spcPts val="600"/>
+              </a:spcAft>
+            </a:pPr>
+            <a:r>
+              <a:rPr sz="1400" b="0">
                 <a:solidFill>
                   <a:srgbClr val="202020"/>
                 </a:solidFill>
                 <a:latin typeface="맑은 고딕"/>
               </a:rPr>
-              <a:t>· 경도인지장애 단독 조기 신호는 미확인 · 재현율 수치는 통계적으로 미확정</a:t>
-            </a:r>
-          </a:p>
-          <a:p>
-            <a:pPr algn="l">
-              <a:spcAft>
-                <a:spcPts val="600"/>
-              </a:spcAft>
-            </a:pPr>
-            <a:r>
-              <a:rPr sz="800" b="0">
-                <a:solidFill>
-                  <a:srgbClr val="202020"/>
-                </a:solidFill>
-                <a:latin typeface="맑은 고딕"/>
-              </a:rPr>
               <a:t/>
             </a:r>
           </a:p>
@@ -7303,45 +7636,13 @@
               </a:spcAft>
             </a:pPr>
             <a:r>
-              <a:rPr sz="1800" b="1">
-                <a:solidFill>
-                  <a:srgbClr val="2A78D6"/>
-                </a:solidFill>
-                <a:latin typeface="맑은 고딕"/>
-              </a:rPr>
-              <a:t>그래서 진짜 산출물은</a:t>
-            </a:r>
-          </a:p>
-          <a:p>
-            <a:pPr algn="l">
-              <a:spcAft>
-                <a:spcPts val="600"/>
-              </a:spcAft>
-            </a:pPr>
-            <a:r>
-              <a:rPr sz="1600" b="1">
-                <a:solidFill>
-                  <a:srgbClr val="104281"/>
-                </a:solidFill>
-                <a:latin typeface="맑은 고딕"/>
-              </a:rPr>
-              <a:t>· "시험 문제를 미리 본 셈"인 데이터 누수 실수를 스스로 찾아 고치고, 우연 여부까지 검증한 분석 절차</a:t>
-            </a:r>
-          </a:p>
-          <a:p>
-            <a:pPr algn="l">
-              <a:spcAft>
-                <a:spcPts val="600"/>
-              </a:spcAft>
-            </a:pPr>
-            <a:r>
-              <a:rPr sz="1600" b="1">
-                <a:solidFill>
-                  <a:srgbClr val="104281"/>
-                </a:solidFill>
-                <a:latin typeface="맑은 고딕"/>
-              </a:rPr>
-              <a:t>· 병원·기관의 정식 데이터가 들어오면 코드 수정 없이 그대로 재학습·재검증 가능</a:t>
+              <a:rPr sz="1400" b="0">
+                <a:solidFill>
+                  <a:srgbClr val="666666"/>
+                </a:solidFill>
+                <a:latin typeface="맑은 고딕"/>
+              </a:rPr>
+              <a:t>다음 두 페이지가 실제 서비스 화면 — 발표에서는 라이브 시연을 우선하고, 시연이 어려우면 화면으로 대체</a:t>
             </a:r>
           </a:p>
         </p:txBody>
@@ -7441,7 +7742,7 @@
                 </a:solidFill>
                 <a:latin typeface="맑은 고딕"/>
               </a:rPr>
-              <a:t>06. 확장 방향</a:t>
+              <a:t>05. 서비스 시연</a:t>
             </a:r>
           </a:p>
         </p:txBody>
@@ -7480,178 +7781,55 @@
                 </a:solidFill>
                 <a:latin typeface="맑은 고딕"/>
               </a:rPr>
-              <a:t>스크리닝에서 끝나지 않는다 — 2단계 로드맵</a:t>
-            </a:r>
-          </a:p>
-        </p:txBody>
-      </p:sp>
-      <p:sp>
-        <p:nvSpPr>
-          <p:cNvPr id="5" name="TextBox 4"/>
-          <p:cNvSpPr txBox="1"/>
-          <p:nvPr/>
-        </p:nvSpPr>
-        <p:spPr>
-          <a:xfrm>
-            <a:off x="914400" y="2286000"/>
-            <a:ext cx="10607040" cy="4389120"/>
-          </a:xfrm>
-          <a:prstGeom prst="rect">
-            <a:avLst/>
-          </a:prstGeom>
-          <a:noFill/>
-        </p:spPr>
-        <p:txBody>
-          <a:bodyPr wrap="square">
-            <a:spAutoFit/>
-          </a:bodyPr>
-          <a:lstStyle/>
-          <a:p>
-            <a:pPr algn="l">
-              <a:spcAft>
-                <a:spcPts val="600"/>
-              </a:spcAft>
-            </a:pPr>
-            <a:r>
-              <a:rPr sz="1900" b="1">
-                <a:solidFill>
-                  <a:srgbClr val="104281"/>
-                </a:solidFill>
-                <a:latin typeface="맑은 고딕"/>
-              </a:rPr>
-              <a:t>1단계 (이번 구현)  —  스크리닝</a:t>
-            </a:r>
-          </a:p>
-          <a:p>
-            <a:pPr algn="l">
-              <a:spcAft>
-                <a:spcPts val="600"/>
-              </a:spcAft>
-            </a:pPr>
-            <a:r>
-              <a:rPr sz="1600" b="0">
-                <a:solidFill>
-                  <a:srgbClr val="202020"/>
-                </a:solidFill>
-                <a:latin typeface="맑은 고딕"/>
-              </a:rPr>
-              <a:t>생활 기록 업로드 → 위험 신호 확인 → 치매안심센터 연결</a:t>
-            </a:r>
-          </a:p>
-          <a:p>
-            <a:pPr algn="l">
-              <a:spcAft>
-                <a:spcPts val="600"/>
-              </a:spcAft>
-            </a:pPr>
-            <a:r>
-              <a:rPr sz="1000" b="0">
-                <a:solidFill>
-                  <a:srgbClr val="202020"/>
-                </a:solidFill>
-                <a:latin typeface="맑은 고딕"/>
-              </a:rPr>
-              <a:t/>
-            </a:r>
-          </a:p>
-          <a:p>
-            <a:pPr algn="l">
-              <a:spcAft>
-                <a:spcPts val="600"/>
-              </a:spcAft>
-            </a:pPr>
-            <a:r>
-              <a:rPr sz="1900" b="1">
-                <a:solidFill>
-                  <a:srgbClr val="104281"/>
-                </a:solidFill>
-                <a:latin typeface="맑은 고딕"/>
-              </a:rPr>
-              <a:t>2단계 (사업 확장 방향)  —  웨어러블 연계 모니터링</a:t>
-            </a:r>
-          </a:p>
-          <a:p>
-            <a:pPr algn="l">
-              <a:spcAft>
-                <a:spcPts val="600"/>
-              </a:spcAft>
-            </a:pPr>
-            <a:r>
-              <a:rPr sz="1600" b="0">
-                <a:solidFill>
-                  <a:srgbClr val="202020"/>
-                </a:solidFill>
-                <a:latin typeface="맑은 고딕"/>
-              </a:rPr>
-              <a:t>· 위험군 판정자가 웨어러블을 계속 착용, 악화 시점을 놓치지 않고 재안내</a:t>
-            </a:r>
-          </a:p>
-          <a:p>
-            <a:pPr algn="l">
-              <a:spcAft>
-                <a:spcPts val="600"/>
-              </a:spcAft>
-            </a:pPr>
-            <a:r>
-              <a:rPr sz="1600" b="0">
-                <a:solidFill>
-                  <a:srgbClr val="202020"/>
-                </a:solidFill>
-                <a:latin typeface="맑은 고딕"/>
-              </a:rPr>
-              <a:t>· 쌓이는 개인별 장기 기록 → 모델 개선 + "판정이 실제로 맞았는지" 확인할 추적 데이터 확보</a:t>
-            </a:r>
-          </a:p>
-          <a:p>
-            <a:pPr algn="l">
-              <a:spcAft>
-                <a:spcPts val="600"/>
-              </a:spcAft>
-            </a:pPr>
-            <a:r>
-              <a:rPr sz="1600" b="0">
-                <a:solidFill>
-                  <a:srgbClr val="202020"/>
-                </a:solidFill>
-                <a:latin typeface="맑은 고딕"/>
-              </a:rPr>
-              <a:t>· 요양기관·치매안심센터 제휴, 개인/기관용 구독형 대시보드</a:t>
-            </a:r>
-          </a:p>
-          <a:p>
-            <a:pPr algn="l">
-              <a:spcAft>
-                <a:spcPts val="600"/>
-              </a:spcAft>
-            </a:pPr>
-            <a:r>
-              <a:rPr sz="1000" b="0">
-                <a:solidFill>
-                  <a:srgbClr val="202020"/>
-                </a:solidFill>
-                <a:latin typeface="맑은 고딕"/>
-              </a:rPr>
-              <a:t/>
-            </a:r>
-          </a:p>
-          <a:p>
-            <a:pPr algn="l">
-              <a:spcAft>
-                <a:spcPts val="600"/>
-              </a:spcAft>
-            </a:pPr>
-            <a:r>
-              <a:rPr sz="1500" b="0">
-                <a:solidFill>
-                  <a:srgbClr val="666666"/>
-                </a:solidFill>
-                <a:latin typeface="맑은 고딕"/>
-              </a:rPr>
-              <a:t>필요한 것: 더 큰 정식 데이터 · 나이/성별/학력 정보 · 실제 발병 여부를 따라가는 추적 검증</a:t>
-            </a:r>
-          </a:p>
-        </p:txBody>
-      </p:sp>
+              <a:t>시연 화면 ① — 업로드 → 위험 점수 → 판단 근거</a:t>
+            </a:r>
+          </a:p>
+        </p:txBody>
+      </p:sp>
+      <p:pic>
+        <p:nvPicPr>
+          <p:cNvPr id="10" name="Picture 10"/>
+          <p:cNvPicPr/>
+          <p:nvPr/>
+        </p:nvPicPr>
+        <p:blipFill>
+          <a:blip r:embed="rId2"/>
+          <a:stretch>
+            <a:fillRect/>
+          </a:stretch>
+        </p:blipFill>
+        <p:spPr>
+          <a:xfrm>
+            <a:off x="710314" y="1645920"/>
+            <a:ext cx="5550942" cy="4114800"/>
+          </a:xfrm>
+          <a:prstGeom prst="rect">
+            <a:avLst/>
+          </a:prstGeom>
+        </p:spPr>
+      </p:pic>
+      <p:pic>
+        <p:nvPicPr>
+          <p:cNvPr id="11" name="Picture 11"/>
+          <p:cNvPicPr/>
+          <p:nvPr/>
+        </p:nvPicPr>
+        <p:blipFill>
+          <a:blip r:embed="rId3"/>
+          <a:stretch>
+            <a:fillRect/>
+          </a:stretch>
+        </p:blipFill>
+        <p:spPr>
+          <a:xfrm>
+            <a:off x="6581296" y="1645920"/>
+            <a:ext cx="4900389" cy="4114800"/>
+          </a:xfrm>
+          <a:prstGeom prst="rect">
+            <a:avLst/>
+          </a:prstGeom>
+        </p:spPr>
+      </p:pic>
     </p:spTree>
   </p:cSld>
   <p:clrMapOvr>
@@ -7679,7 +7857,7 @@
         <p:spPr>
           <a:xfrm>
             <a:off x="0" y="0"/>
-            <a:ext cx="12191695" cy="6858000"/>
+            <a:ext cx="12191695" cy="146304"/>
           </a:xfrm>
           <a:prstGeom prst="rect">
             <a:avLst/>
@@ -7721,8 +7899,8 @@
         </p:nvSpPr>
         <p:spPr>
           <a:xfrm>
-            <a:off x="914400" y="2651760"/>
-            <a:ext cx="10332720" cy="914400"/>
+            <a:off x="502920" y="292608"/>
+            <a:ext cx="10515600" cy="365760"/>
           </a:xfrm>
           <a:prstGeom prst="rect">
             <a:avLst/>
@@ -7735,19 +7913,19 @@
           </a:bodyPr>
           <a:lstStyle/>
           <a:p>
-            <a:pPr algn="ctr">
-              <a:spcAft>
-                <a:spcPts val="600"/>
-              </a:spcAft>
-            </a:pPr>
-            <a:r>
-              <a:rPr sz="4000" b="1">
-                <a:solidFill>
-                  <a:srgbClr val="FFFFFF"/>
-                </a:solidFill>
-                <a:latin typeface="맑은 고딕"/>
-              </a:rPr>
-              <a:t>감사합니다</a:t>
+            <a:pPr algn="l">
+              <a:spcAft>
+                <a:spcPts val="600"/>
+              </a:spcAft>
+            </a:pPr>
+            <a:r>
+              <a:rPr sz="1300" b="1">
+                <a:solidFill>
+                  <a:srgbClr val="2A78D6"/>
+                </a:solidFill>
+                <a:latin typeface="맑은 고딕"/>
+              </a:rPr>
+              <a:t>05. 서비스 시연</a:t>
             </a:r>
           </a:p>
         </p:txBody>
@@ -7760,8 +7938,8 @@
         </p:nvSpPr>
         <p:spPr>
           <a:xfrm>
-            <a:off x="914400" y="3749039"/>
-            <a:ext cx="10332720" cy="731520"/>
+            <a:off x="502920" y="621792"/>
+            <a:ext cx="11155680" cy="731520"/>
           </a:xfrm>
           <a:prstGeom prst="rect">
             <a:avLst/>
@@ -7774,23 +7952,67 @@
           </a:bodyPr>
           <a:lstStyle/>
           <a:p>
-            <a:pPr algn="ctr">
-              <a:spcAft>
-                <a:spcPts val="600"/>
-              </a:spcAft>
-            </a:pPr>
-            <a:r>
-              <a:rPr sz="1800" b="0">
-                <a:solidFill>
-                  <a:srgbClr val="BFD4F0"/>
-                </a:solidFill>
-                <a:latin typeface="맑은 고딕"/>
-              </a:rPr>
-              <a:t>Q&amp;A  |  팀 찾아조</a:t>
-            </a:r>
-          </a:p>
-        </p:txBody>
-      </p:sp>
+            <a:pPr algn="l">
+              <a:spcAft>
+                <a:spcPts val="600"/>
+              </a:spcAft>
+            </a:pPr>
+            <a:r>
+              <a:rPr sz="2800" b="1">
+                <a:solidFill>
+                  <a:srgbClr val="104281"/>
+                </a:solidFill>
+                <a:latin typeface="맑은 고딕"/>
+              </a:rPr>
+              <a:t>시연 화면 ② — 내 기록 추이 → 치매안심센터 안내</a:t>
+            </a:r>
+          </a:p>
+        </p:txBody>
+      </p:sp>
+      <p:pic>
+        <p:nvPicPr>
+          <p:cNvPr id="10" name="Picture 10"/>
+          <p:cNvPicPr/>
+          <p:nvPr/>
+        </p:nvPicPr>
+        <p:blipFill>
+          <a:blip r:embed="rId2"/>
+          <a:stretch>
+            <a:fillRect/>
+          </a:stretch>
+        </p:blipFill>
+        <p:spPr>
+          <a:xfrm>
+            <a:off x="1221553" y="1645920"/>
+            <a:ext cx="4744601" cy="4389120"/>
+          </a:xfrm>
+          <a:prstGeom prst="rect">
+            <a:avLst/>
+          </a:prstGeom>
+        </p:spPr>
+      </p:pic>
+      <p:pic>
+        <p:nvPicPr>
+          <p:cNvPr id="11" name="Picture 11"/>
+          <p:cNvPicPr/>
+          <p:nvPr/>
+        </p:nvPicPr>
+        <p:blipFill>
+          <a:blip r:embed="rId3"/>
+          <a:stretch>
+            <a:fillRect/>
+          </a:stretch>
+        </p:blipFill>
+        <p:spPr>
+          <a:xfrm>
+            <a:off x="6331914" y="1645920"/>
+            <a:ext cx="4638532" cy="4389120"/>
+          </a:xfrm>
+          <a:prstGeom prst="rect">
+            <a:avLst/>
+          </a:prstGeom>
+        </p:spPr>
+      </p:pic>
     </p:spTree>
   </p:cSld>
   <p:clrMapOvr>
@@ -8454,7 +8676,7 @@
                 </a:solidFill>
                 <a:latin typeface="맑은 고딕"/>
               </a:rPr>
-              <a:t>02. 전처리</a:t>
+              <a:t>06. 결론</a:t>
             </a:r>
           </a:p>
         </p:txBody>
@@ -8493,7 +8715,7 @@
                 </a:solidFill>
                 <a:latin typeface="맑은 고딕"/>
               </a:rPr>
-              <a:t>하루 기록 11,499개를 '사람 단위 지표' 44개로 요약</a:t>
+              <a:t>5일 동안 만든 것은 숫자가 아니라, 믿을 수 있는 절차입니다</a:t>
             </a:r>
           </a:p>
         </p:txBody>
@@ -8506,8 +8728,8 @@
         </p:nvSpPr>
         <p:spPr>
           <a:xfrm>
-            <a:off x="1097280" y="2286000"/>
-            <a:ext cx="10058400" cy="3657600"/>
+            <a:off x="914400" y="1691640"/>
+            <a:ext cx="10607040" cy="4846320"/>
           </a:xfrm>
           <a:prstGeom prst="rect">
             <a:avLst/>
@@ -8526,60 +8748,124 @@
               </a:spcAft>
             </a:pPr>
             <a:r>
-              <a:rPr sz="1800" b="0">
+              <a:rPr sz="1800" b="1">
+                <a:solidFill>
+                  <a:srgbClr val="2A78D6"/>
+                </a:solidFill>
+                <a:latin typeface="맑은 고딕"/>
+              </a:rPr>
+              <a:t>확인한 것</a:t>
+            </a:r>
+          </a:p>
+          <a:p>
+            <a:pPr algn="l">
+              <a:spcAft>
+                <a:spcPts val="600"/>
+              </a:spcAft>
+            </a:pPr>
+            <a:r>
+              <a:rPr sz="1600" b="0">
                 <a:solidFill>
                   <a:srgbClr val="202020"/>
                 </a:solidFill>
                 <a:latin typeface="맑은 고딕"/>
               </a:rPr>
-              <a:t>① 신뢰 필터 — 반지 미착용이 긴 날(180분 이상)은 그날 기록 전체를 제외</a:t>
-            </a:r>
-          </a:p>
-          <a:p>
-            <a:pPr algn="l">
-              <a:spcAft>
-                <a:spcPts val="600"/>
-              </a:spcAft>
-            </a:pPr>
-            <a:r>
-              <a:rPr sz="1800" b="0">
+              <a:t>· 활동량 평균이 아니라 "생활 패턴의 불규칙함"이 위험군을 가른다</a:t>
+            </a:r>
+          </a:p>
+          <a:p>
+            <a:pPr algn="l">
+              <a:spcAft>
+                <a:spcPts val="600"/>
+              </a:spcAft>
+            </a:pPr>
+            <a:r>
+              <a:rPr sz="1600" b="0">
                 <a:solidFill>
                   <a:srgbClr val="202020"/>
                 </a:solidFill>
                 <a:latin typeface="맑은 고딕"/>
               </a:rPr>
-              <a:t>② 매칭 — 활동·수면 기록을 사람 기준으로 진단 결과와 연결 (174명 전원 확인)</a:t>
-            </a:r>
-          </a:p>
-          <a:p>
-            <a:pPr algn="l">
-              <a:spcAft>
-                <a:spcPts val="600"/>
-              </a:spcAft>
-            </a:pPr>
-            <a:r>
-              <a:rPr sz="1800" b="0">
+              <a:t>· 그 구분 능력은 우연이 아니다 (우연일 확률 0.6%)</a:t>
+            </a:r>
+          </a:p>
+          <a:p>
+            <a:pPr algn="l">
+              <a:spcAft>
+                <a:spcPts val="600"/>
+              </a:spcAft>
+            </a:pPr>
+            <a:r>
+              <a:rPr sz="800" b="0">
                 <a:solidFill>
                   <a:srgbClr val="202020"/>
                 </a:solidFill>
                 <a:latin typeface="맑은 고딕"/>
               </a:rPr>
-              <a:t>③ 요약 — 사람 1명당 28~118일 기록을 지표별 평균(수준) + 표준편차(들쭉날쭉함)로 압축</a:t>
-            </a:r>
-          </a:p>
-          <a:p>
-            <a:pPr algn="l">
-              <a:spcAft>
-                <a:spcPts val="600"/>
-              </a:spcAft>
-            </a:pPr>
-            <a:r>
-              <a:rPr sz="1000" b="0">
+              <a:t/>
+            </a:r>
+          </a:p>
+          <a:p>
+            <a:pPr algn="l">
+              <a:spcAft>
+                <a:spcPts val="600"/>
+              </a:spcAft>
+            </a:pPr>
+            <a:r>
+              <a:rPr sz="1800" b="1">
+                <a:solidFill>
+                  <a:srgbClr val="2A78D6"/>
+                </a:solidFill>
+                <a:latin typeface="맑은 고딕"/>
+              </a:rPr>
+              <a:t>한계 — 숨기지 않고 명시</a:t>
+            </a:r>
+          </a:p>
+          <a:p>
+            <a:pPr algn="l">
+              <a:spcAft>
+                <a:spcPts val="600"/>
+              </a:spcAft>
+            </a:pPr>
+            <a:r>
+              <a:rPr sz="1600" b="0">
                 <a:solidFill>
                   <a:srgbClr val="202020"/>
                 </a:solidFill>
                 <a:latin typeface="맑은 고딕"/>
               </a:rPr>
+              <a:t>· 표본 174명(치매 12명), 한 지역(광주)·한 시기 데이터 — 일반화에는 더 큰 데이터 필요</a:t>
+            </a:r>
+          </a:p>
+          <a:p>
+            <a:pPr algn="l">
+              <a:spcAft>
+                <a:spcPts val="600"/>
+              </a:spcAft>
+            </a:pPr>
+            <a:r>
+              <a:rPr sz="1600" b="0">
+                <a:solidFill>
+                  <a:srgbClr val="202020"/>
+                </a:solidFill>
+                <a:latin typeface="맑은 고딕"/>
+              </a:rPr>
+              <a:t>· 경도인지장애 단독 조기 신호는 미확인 · 재현율 수치는 통계적으로 미확정</a:t>
+            </a:r>
+          </a:p>
+          <a:p>
+            <a:pPr algn="l">
+              <a:spcAft>
+                <a:spcPts val="600"/>
+              </a:spcAft>
+            </a:pPr>
+            <a:r>
+              <a:rPr sz="800" b="0">
+                <a:solidFill>
+                  <a:srgbClr val="202020"/>
+                </a:solidFill>
+                <a:latin typeface="맑은 고딕"/>
+              </a:rPr>
               <a:t/>
             </a:r>
           </a:p>
@@ -8590,45 +8876,45 @@
               </a:spcAft>
             </a:pPr>
             <a:r>
-              <a:rPr sz="2000" b="1">
+              <a:rPr sz="1800" b="1">
+                <a:solidFill>
+                  <a:srgbClr val="2A78D6"/>
+                </a:solidFill>
+                <a:latin typeface="맑은 고딕"/>
+              </a:rPr>
+              <a:t>그래서 진짜 산출물은</a:t>
+            </a:r>
+          </a:p>
+          <a:p>
+            <a:pPr algn="l">
+              <a:spcAft>
+                <a:spcPts val="600"/>
+              </a:spcAft>
+            </a:pPr>
+            <a:r>
+              <a:rPr sz="1600" b="1">
                 <a:solidFill>
                   <a:srgbClr val="104281"/>
                 </a:solidFill>
                 <a:latin typeface="맑은 고딕"/>
               </a:rPr>
-              <a:t>→ 174명 × 44개 지표 테이블 완성 — 이후 모든 분석·모델·서비스가 이 표 하나에서 출발</a:t>
-            </a:r>
-          </a:p>
-          <a:p>
-            <a:pPr algn="l">
-              <a:spcAft>
-                <a:spcPts val="600"/>
-              </a:spcAft>
-            </a:pPr>
-            <a:r>
-              <a:rPr sz="1000" b="0">
-                <a:solidFill>
-                  <a:srgbClr val="202020"/>
-                </a:solidFill>
-                <a:latin typeface="맑은 고딕"/>
-              </a:rPr>
-              <a:t/>
-            </a:r>
-          </a:p>
-          <a:p>
-            <a:pPr algn="l">
-              <a:spcAft>
-                <a:spcPts val="600"/>
-              </a:spcAft>
-            </a:pPr>
-            <a:r>
-              <a:rPr sz="1500" b="0">
-                <a:solidFill>
-                  <a:srgbClr val="666666"/>
-                </a:solidFill>
-                <a:latin typeface="맑은 고딕"/>
-              </a:rPr>
-              <a:t>전처리 기준은 전부 코드로 고정 — 같은 원본을 넣으면 누가 실행해도 같은 표가 나온다</a:t>
+              <a:t>· "시험 문제를 미리 본 셈"인 데이터 누수 실수를 스스로 찾아 고치고, 우연 여부까지 검증한 분석 절차</a:t>
+            </a:r>
+          </a:p>
+          <a:p>
+            <a:pPr algn="l">
+              <a:spcAft>
+                <a:spcPts val="600"/>
+              </a:spcAft>
+            </a:pPr>
+            <a:r>
+              <a:rPr sz="1600" b="1">
+                <a:solidFill>
+                  <a:srgbClr val="104281"/>
+                </a:solidFill>
+                <a:latin typeface="맑은 고딕"/>
+              </a:rPr>
+              <a:t>· 병원·기관의 정식 데이터가 들어오면 코드 수정 없이 그대로 재학습·재검증 가능</a:t>
             </a:r>
           </a:p>
         </p:txBody>
@@ -8728,7 +9014,7 @@
                 </a:solidFill>
                 <a:latin typeface="맑은 고딕"/>
               </a:rPr>
-              <a:t>05. 서비스 시연</a:t>
+              <a:t>06. 확장 방향</a:t>
             </a:r>
           </a:p>
         </p:txBody>
@@ -8767,55 +9053,178 @@
                 </a:solidFill>
                 <a:latin typeface="맑은 고딕"/>
               </a:rPr>
-              <a:t>시연 화면 ① — 업로드 → 위험 점수 → 판단 근거</a:t>
-            </a:r>
-          </a:p>
-        </p:txBody>
-      </p:sp>
-      <p:pic>
-        <p:nvPicPr>
-          <p:cNvPr id="10" name="Picture 10"/>
-          <p:cNvPicPr/>
-          <p:nvPr/>
-        </p:nvPicPr>
-        <p:blipFill>
-          <a:blip r:embed="rId2"/>
-          <a:stretch>
-            <a:fillRect/>
-          </a:stretch>
-        </p:blipFill>
-        <p:spPr>
-          <a:xfrm>
-            <a:off x="710314" y="1645920"/>
-            <a:ext cx="5550942" cy="4114800"/>
-          </a:xfrm>
-          <a:prstGeom prst="rect">
-            <a:avLst/>
-          </a:prstGeom>
-        </p:spPr>
-      </p:pic>
-      <p:pic>
-        <p:nvPicPr>
-          <p:cNvPr id="11" name="Picture 11"/>
-          <p:cNvPicPr/>
-          <p:nvPr/>
-        </p:nvPicPr>
-        <p:blipFill>
-          <a:blip r:embed="rId3"/>
-          <a:stretch>
-            <a:fillRect/>
-          </a:stretch>
-        </p:blipFill>
-        <p:spPr>
-          <a:xfrm>
-            <a:off x="6581296" y="1645920"/>
-            <a:ext cx="4900389" cy="4114800"/>
-          </a:xfrm>
-          <a:prstGeom prst="rect">
-            <a:avLst/>
-          </a:prstGeom>
-        </p:spPr>
-      </p:pic>
+              <a:t>스크리닝에서 끝나지 않는다 — 2단계 로드맵</a:t>
+            </a:r>
+          </a:p>
+        </p:txBody>
+      </p:sp>
+      <p:sp>
+        <p:nvSpPr>
+          <p:cNvPr id="5" name="TextBox 4"/>
+          <p:cNvSpPr txBox="1"/>
+          <p:nvPr/>
+        </p:nvSpPr>
+        <p:spPr>
+          <a:xfrm>
+            <a:off x="914400" y="2286000"/>
+            <a:ext cx="10607040" cy="4389120"/>
+          </a:xfrm>
+          <a:prstGeom prst="rect">
+            <a:avLst/>
+          </a:prstGeom>
+          <a:noFill/>
+        </p:spPr>
+        <p:txBody>
+          <a:bodyPr wrap="square">
+            <a:spAutoFit/>
+          </a:bodyPr>
+          <a:lstStyle/>
+          <a:p>
+            <a:pPr algn="l">
+              <a:spcAft>
+                <a:spcPts val="600"/>
+              </a:spcAft>
+            </a:pPr>
+            <a:r>
+              <a:rPr sz="1900" b="1">
+                <a:solidFill>
+                  <a:srgbClr val="104281"/>
+                </a:solidFill>
+                <a:latin typeface="맑은 고딕"/>
+              </a:rPr>
+              <a:t>1단계 (이번 구현)  —  스크리닝</a:t>
+            </a:r>
+          </a:p>
+          <a:p>
+            <a:pPr algn="l">
+              <a:spcAft>
+                <a:spcPts val="600"/>
+              </a:spcAft>
+            </a:pPr>
+            <a:r>
+              <a:rPr sz="1600" b="0">
+                <a:solidFill>
+                  <a:srgbClr val="202020"/>
+                </a:solidFill>
+                <a:latin typeface="맑은 고딕"/>
+              </a:rPr>
+              <a:t>생활 기록 업로드 → 위험 신호 확인 → 치매안심센터 연결</a:t>
+            </a:r>
+          </a:p>
+          <a:p>
+            <a:pPr algn="l">
+              <a:spcAft>
+                <a:spcPts val="600"/>
+              </a:spcAft>
+            </a:pPr>
+            <a:r>
+              <a:rPr sz="1000" b="0">
+                <a:solidFill>
+                  <a:srgbClr val="202020"/>
+                </a:solidFill>
+                <a:latin typeface="맑은 고딕"/>
+              </a:rPr>
+              <a:t/>
+            </a:r>
+          </a:p>
+          <a:p>
+            <a:pPr algn="l">
+              <a:spcAft>
+                <a:spcPts val="600"/>
+              </a:spcAft>
+            </a:pPr>
+            <a:r>
+              <a:rPr sz="1900" b="1">
+                <a:solidFill>
+                  <a:srgbClr val="104281"/>
+                </a:solidFill>
+                <a:latin typeface="맑은 고딕"/>
+              </a:rPr>
+              <a:t>2단계 (사업 확장 방향)  —  웨어러블 연계 모니터링</a:t>
+            </a:r>
+          </a:p>
+          <a:p>
+            <a:pPr algn="l">
+              <a:spcAft>
+                <a:spcPts val="600"/>
+              </a:spcAft>
+            </a:pPr>
+            <a:r>
+              <a:rPr sz="1600" b="0">
+                <a:solidFill>
+                  <a:srgbClr val="202020"/>
+                </a:solidFill>
+                <a:latin typeface="맑은 고딕"/>
+              </a:rPr>
+              <a:t>· 위험군 판정자가 웨어러블을 계속 착용, 악화 시점을 놓치지 않고 재안내</a:t>
+            </a:r>
+          </a:p>
+          <a:p>
+            <a:pPr algn="l">
+              <a:spcAft>
+                <a:spcPts val="600"/>
+              </a:spcAft>
+            </a:pPr>
+            <a:r>
+              <a:rPr sz="1600" b="0">
+                <a:solidFill>
+                  <a:srgbClr val="202020"/>
+                </a:solidFill>
+                <a:latin typeface="맑은 고딕"/>
+              </a:rPr>
+              <a:t>· 데이터 적재·재학습 루프는 이번에 구현 완료 — 검진 결과가 연결될수록 모델이 계속 좋아지는 구조</a:t>
+            </a:r>
+          </a:p>
+          <a:p>
+            <a:pPr algn="l">
+              <a:spcAft>
+                <a:spcPts val="600"/>
+              </a:spcAft>
+            </a:pPr>
+            <a:r>
+              <a:rPr sz="1600" b="0">
+                <a:solidFill>
+                  <a:srgbClr val="202020"/>
+                </a:solidFill>
+                <a:latin typeface="맑은 고딕"/>
+              </a:rPr>
+              <a:t>· 요양기관·치매안심센터 제휴, 개인/기관용 구독형 대시보드</a:t>
+            </a:r>
+          </a:p>
+          <a:p>
+            <a:pPr algn="l">
+              <a:spcAft>
+                <a:spcPts val="600"/>
+              </a:spcAft>
+            </a:pPr>
+            <a:r>
+              <a:rPr sz="1000" b="0">
+                <a:solidFill>
+                  <a:srgbClr val="202020"/>
+                </a:solidFill>
+                <a:latin typeface="맑은 고딕"/>
+              </a:rPr>
+              <a:t/>
+            </a:r>
+          </a:p>
+          <a:p>
+            <a:pPr algn="l">
+              <a:spcAft>
+                <a:spcPts val="600"/>
+              </a:spcAft>
+            </a:pPr>
+            <a:r>
+              <a:rPr sz="1500" b="0">
+                <a:solidFill>
+                  <a:srgbClr val="666666"/>
+                </a:solidFill>
+                <a:latin typeface="맑은 고딕"/>
+              </a:rPr>
+              <a:t>필요한 것: 더 큰 정식 데이터 · 나이/성별/학력 정보 · 실제 발병 여부를 따라가는 추적 검증</a:t>
+            </a:r>
+          </a:p>
+        </p:txBody>
+      </p:sp>
     </p:spTree>
   </p:cSld>
   <p:clrMapOvr>
@@ -8843,7 +9252,7 @@
         <p:spPr>
           <a:xfrm>
             <a:off x="0" y="0"/>
-            <a:ext cx="12191695" cy="146304"/>
+            <a:ext cx="12191695" cy="6858000"/>
           </a:xfrm>
           <a:prstGeom prst="rect">
             <a:avLst/>
@@ -8885,8 +9294,8 @@
         </p:nvSpPr>
         <p:spPr>
           <a:xfrm>
-            <a:off x="502920" y="292608"/>
-            <a:ext cx="10515600" cy="365760"/>
+            <a:off x="914400" y="2651760"/>
+            <a:ext cx="10332720" cy="914400"/>
           </a:xfrm>
           <a:prstGeom prst="rect">
             <a:avLst/>
@@ -8899,19 +9308,19 @@
           </a:bodyPr>
           <a:lstStyle/>
           <a:p>
-            <a:pPr algn="l">
-              <a:spcAft>
-                <a:spcPts val="600"/>
-              </a:spcAft>
-            </a:pPr>
-            <a:r>
-              <a:rPr sz="1300" b="1">
-                <a:solidFill>
-                  <a:srgbClr val="2A78D6"/>
-                </a:solidFill>
-                <a:latin typeface="맑은 고딕"/>
-              </a:rPr>
-              <a:t>05. 서비스 시연</a:t>
+            <a:pPr algn="ctr">
+              <a:spcAft>
+                <a:spcPts val="600"/>
+              </a:spcAft>
+            </a:pPr>
+            <a:r>
+              <a:rPr sz="4000" b="1">
+                <a:solidFill>
+                  <a:srgbClr val="FFFFFF"/>
+                </a:solidFill>
+                <a:latin typeface="맑은 고딕"/>
+              </a:rPr>
+              <a:t>감사합니다</a:t>
             </a:r>
           </a:p>
         </p:txBody>
@@ -8924,8 +9333,8 @@
         </p:nvSpPr>
         <p:spPr>
           <a:xfrm>
-            <a:off x="502920" y="621792"/>
-            <a:ext cx="11155680" cy="731520"/>
+            <a:off x="914400" y="3749039"/>
+            <a:ext cx="10332720" cy="731520"/>
           </a:xfrm>
           <a:prstGeom prst="rect">
             <a:avLst/>
@@ -8938,6 +9347,145 @@
           </a:bodyPr>
           <a:lstStyle/>
           <a:p>
+            <a:pPr algn="ctr">
+              <a:spcAft>
+                <a:spcPts val="600"/>
+              </a:spcAft>
+            </a:pPr>
+            <a:r>
+              <a:rPr sz="1800" b="0">
+                <a:solidFill>
+                  <a:srgbClr val="BFD4F0"/>
+                </a:solidFill>
+                <a:latin typeface="맑은 고딕"/>
+              </a:rPr>
+              <a:t>Q&amp;A  |  팀 찾아조</a:t>
+            </a:r>
+          </a:p>
+        </p:txBody>
+      </p:sp>
+    </p:spTree>
+  </p:cSld>
+  <p:clrMapOvr>
+    <a:masterClrMapping/>
+  </p:clrMapOvr>
+</p:sld>
+</file>
+
+<file path=ppt/slides/slide23.xml><?xml version="1.0" encoding="utf-8"?>
+<p:sld xmlns:a="http://schemas.openxmlformats.org/drawingml/2006/main" xmlns:p="http://schemas.openxmlformats.org/presentationml/2006/main" xmlns:r="http://schemas.openxmlformats.org/officeDocument/2006/relationships">
+  <p:cSld>
+    <p:spTree>
+      <p:nvGrpSpPr>
+        <p:cNvPr id="1" name=""/>
+        <p:cNvGrpSpPr/>
+        <p:nvPr/>
+      </p:nvGrpSpPr>
+      <p:grpSpPr/>
+      <p:sp>
+        <p:nvSpPr>
+          <p:cNvPr id="2" name="Rectangle 1"/>
+          <p:cNvSpPr/>
+          <p:nvPr/>
+        </p:nvSpPr>
+        <p:spPr>
+          <a:xfrm>
+            <a:off x="0" y="0"/>
+            <a:ext cx="12191695" cy="146304"/>
+          </a:xfrm>
+          <a:prstGeom prst="rect">
+            <a:avLst/>
+          </a:prstGeom>
+          <a:solidFill>
+            <a:srgbClr val="104281"/>
+          </a:solidFill>
+          <a:ln>
+            <a:noFill/>
+          </a:ln>
+        </p:spPr>
+        <p:style>
+          <a:lnRef idx="1">
+            <a:schemeClr val="accent1"/>
+          </a:lnRef>
+          <a:fillRef idx="3">
+            <a:schemeClr val="accent1"/>
+          </a:fillRef>
+          <a:effectRef idx="2">
+            <a:schemeClr val="accent1"/>
+          </a:effectRef>
+          <a:fontRef idx="minor">
+            <a:schemeClr val="lt1"/>
+          </a:fontRef>
+        </p:style>
+        <p:txBody>
+          <a:bodyPr rtlCol="0" anchor="ctr"/>
+          <a:lstStyle/>
+          <a:p>
+            <a:pPr algn="ctr"/>
+          </a:p>
+        </p:txBody>
+      </p:sp>
+      <p:sp>
+        <p:nvSpPr>
+          <p:cNvPr id="3" name="TextBox 2"/>
+          <p:cNvSpPr txBox="1"/>
+          <p:nvPr/>
+        </p:nvSpPr>
+        <p:spPr>
+          <a:xfrm>
+            <a:off x="502920" y="292608"/>
+            <a:ext cx="10515600" cy="365760"/>
+          </a:xfrm>
+          <a:prstGeom prst="rect">
+            <a:avLst/>
+          </a:prstGeom>
+          <a:noFill/>
+        </p:spPr>
+        <p:txBody>
+          <a:bodyPr wrap="square">
+            <a:spAutoFit/>
+          </a:bodyPr>
+          <a:lstStyle/>
+          <a:p>
+            <a:pPr algn="l">
+              <a:spcAft>
+                <a:spcPts val="600"/>
+              </a:spcAft>
+            </a:pPr>
+            <a:r>
+              <a:rPr sz="1300" b="1">
+                <a:solidFill>
+                  <a:srgbClr val="2A78D6"/>
+                </a:solidFill>
+                <a:latin typeface="맑은 고딕"/>
+              </a:rPr>
+              <a:t>05. 서비스</a:t>
+            </a:r>
+          </a:p>
+        </p:txBody>
+      </p:sp>
+      <p:sp>
+        <p:nvSpPr>
+          <p:cNvPr id="4" name="TextBox 3"/>
+          <p:cNvSpPr txBox="1"/>
+          <p:nvPr/>
+        </p:nvSpPr>
+        <p:spPr>
+          <a:xfrm>
+            <a:off x="502920" y="621792"/>
+            <a:ext cx="11155680" cy="731520"/>
+          </a:xfrm>
+          <a:prstGeom prst="rect">
+            <a:avLst/>
+          </a:prstGeom>
+          <a:noFill/>
+        </p:spPr>
+        <p:txBody>
+          <a:bodyPr wrap="square">
+            <a:spAutoFit/>
+          </a:bodyPr>
+          <a:lstStyle/>
+          <a:p>
             <a:pPr algn="l">
               <a:spcAft>
                 <a:spcPts val="600"/>
@@ -8950,55 +9498,378 @@
                 </a:solidFill>
                 <a:latin typeface="맑은 고딕"/>
               </a:rPr>
-              <a:t>시연 화면 ② — 내 기록 추이 → 치매안심센터 안내</a:t>
-            </a:r>
-          </a:p>
-        </p:txBody>
-      </p:sp>
-      <p:pic>
-        <p:nvPicPr>
-          <p:cNvPr id="10" name="Picture 10"/>
-          <p:cNvPicPr/>
-          <p:nvPr/>
-        </p:nvPicPr>
-        <p:blipFill>
-          <a:blip r:embed="rId2"/>
-          <a:stretch>
-            <a:fillRect/>
-          </a:stretch>
-        </p:blipFill>
-        <p:spPr>
-          <a:xfrm>
-            <a:off x="1221553" y="1645920"/>
-            <a:ext cx="4744601" cy="4389120"/>
-          </a:xfrm>
-          <a:prstGeom prst="rect">
-            <a:avLst/>
-          </a:prstGeom>
-        </p:spPr>
-      </p:pic>
-      <p:pic>
-        <p:nvPicPr>
-          <p:cNvPr id="11" name="Picture 11"/>
-          <p:cNvPicPr/>
-          <p:nvPr/>
-        </p:nvPicPr>
-        <p:blipFill>
-          <a:blip r:embed="rId3"/>
-          <a:stretch>
-            <a:fillRect/>
-          </a:stretch>
-        </p:blipFill>
-        <p:spPr>
-          <a:xfrm>
-            <a:off x="6331914" y="1645920"/>
-            <a:ext cx="4638532" cy="4389120"/>
-          </a:xfrm>
-          <a:prstGeom prst="rect">
-            <a:avLst/>
-          </a:prstGeom>
-        </p:spPr>
-      </p:pic>
+              <a:t>업로드는 사라지지 않는다 — 적재·재학습 파이프라인 (구현 완료)</a:t>
+            </a:r>
+          </a:p>
+        </p:txBody>
+      </p:sp>
+      <p:sp>
+        <p:nvSpPr>
+          <p:cNvPr id="5" name="TextBox 4"/>
+          <p:cNvSpPr txBox="1"/>
+          <p:nvPr/>
+        </p:nvSpPr>
+        <p:spPr>
+          <a:xfrm>
+            <a:off x="914400" y="1691640"/>
+            <a:ext cx="3108960" cy="457200"/>
+          </a:xfrm>
+          <a:prstGeom prst="rect">
+            <a:avLst/>
+          </a:prstGeom>
+          <a:noFill/>
+        </p:spPr>
+        <p:txBody>
+          <a:bodyPr wrap="square">
+            <a:spAutoFit/>
+          </a:bodyPr>
+          <a:lstStyle/>
+          <a:p>
+            <a:pPr algn="l">
+              <a:spcAft>
+                <a:spcPts val="600"/>
+              </a:spcAft>
+            </a:pPr>
+            <a:r>
+              <a:rPr sz="1800" b="1">
+                <a:solidFill>
+                  <a:srgbClr val="104281"/>
+                </a:solidFill>
+                <a:latin typeface="맑은 고딕"/>
+              </a:rPr>
+              <a:t>①  업로드 자동 적재</a:t>
+            </a:r>
+          </a:p>
+        </p:txBody>
+      </p:sp>
+      <p:sp>
+        <p:nvSpPr>
+          <p:cNvPr id="6" name="TextBox 5"/>
+          <p:cNvSpPr txBox="1"/>
+          <p:nvPr/>
+        </p:nvSpPr>
+        <p:spPr>
+          <a:xfrm>
+            <a:off x="4114800" y="1719072"/>
+            <a:ext cx="7589520" cy="457200"/>
+          </a:xfrm>
+          <a:prstGeom prst="rect">
+            <a:avLst/>
+          </a:prstGeom>
+          <a:noFill/>
+        </p:spPr>
+        <p:txBody>
+          <a:bodyPr wrap="square">
+            <a:spAutoFit/>
+          </a:bodyPr>
+          <a:lstStyle/>
+          <a:p>
+            <a:pPr algn="l">
+              <a:spcAft>
+                <a:spcPts val="600"/>
+              </a:spcAft>
+            </a:pPr>
+            <a:r>
+              <a:rPr sz="1400" b="0">
+                <a:solidFill>
+                  <a:srgbClr val="202020"/>
+                </a:solidFill>
+                <a:latin typeface="맑은 고딕"/>
+              </a:rPr>
+              <a:t>예측과 동시에 DB에 익명 저장 — 일 단위 기록 + 예측 결과 (개인 식별 정보 없음)</a:t>
+            </a:r>
+          </a:p>
+        </p:txBody>
+      </p:sp>
+      <p:sp>
+        <p:nvSpPr>
+          <p:cNvPr id="7" name="TextBox 6"/>
+          <p:cNvSpPr txBox="1"/>
+          <p:nvPr/>
+        </p:nvSpPr>
+        <p:spPr>
+          <a:xfrm>
+            <a:off x="914400" y="2468880"/>
+            <a:ext cx="3108960" cy="457200"/>
+          </a:xfrm>
+          <a:prstGeom prst="rect">
+            <a:avLst/>
+          </a:prstGeom>
+          <a:noFill/>
+        </p:spPr>
+        <p:txBody>
+          <a:bodyPr wrap="square">
+            <a:spAutoFit/>
+          </a:bodyPr>
+          <a:lstStyle/>
+          <a:p>
+            <a:pPr algn="l">
+              <a:spcAft>
+                <a:spcPts val="600"/>
+              </a:spcAft>
+            </a:pPr>
+            <a:r>
+              <a:rPr sz="1800" b="1">
+                <a:solidFill>
+                  <a:srgbClr val="104281"/>
+                </a:solidFill>
+                <a:latin typeface="맑은 고딕"/>
+              </a:rPr>
+              <a:t>②  검진 결과 연결</a:t>
+            </a:r>
+          </a:p>
+        </p:txBody>
+      </p:sp>
+      <p:sp>
+        <p:nvSpPr>
+          <p:cNvPr id="8" name="TextBox 7"/>
+          <p:cNvSpPr txBox="1"/>
+          <p:nvPr/>
+        </p:nvSpPr>
+        <p:spPr>
+          <a:xfrm>
+            <a:off x="4114800" y="2496312"/>
+            <a:ext cx="7589520" cy="457200"/>
+          </a:xfrm>
+          <a:prstGeom prst="rect">
+            <a:avLst/>
+          </a:prstGeom>
+          <a:noFill/>
+        </p:spPr>
+        <p:txBody>
+          <a:bodyPr wrap="square">
+            <a:spAutoFit/>
+          </a:bodyPr>
+          <a:lstStyle/>
+          <a:p>
+            <a:pPr algn="l">
+              <a:spcAft>
+                <a:spcPts val="600"/>
+              </a:spcAft>
+            </a:pPr>
+            <a:r>
+              <a:rPr sz="1400" b="0">
+                <a:solidFill>
+                  <a:srgbClr val="202020"/>
+                </a:solidFill>
+                <a:latin typeface="맑은 고딕"/>
+              </a:rPr>
+              <a:t>위험군 안내를 받고 검진한 사용자의 확진 결과를 기관이 입력 (API 구현)</a:t>
+            </a:r>
+          </a:p>
+        </p:txBody>
+      </p:sp>
+      <p:sp>
+        <p:nvSpPr>
+          <p:cNvPr id="9" name="TextBox 8"/>
+          <p:cNvSpPr txBox="1"/>
+          <p:nvPr/>
+        </p:nvSpPr>
+        <p:spPr>
+          <a:xfrm>
+            <a:off x="914400" y="3246120"/>
+            <a:ext cx="3108960" cy="457200"/>
+          </a:xfrm>
+          <a:prstGeom prst="rect">
+            <a:avLst/>
+          </a:prstGeom>
+          <a:noFill/>
+        </p:spPr>
+        <p:txBody>
+          <a:bodyPr wrap="square">
+            <a:spAutoFit/>
+          </a:bodyPr>
+          <a:lstStyle/>
+          <a:p>
+            <a:pPr algn="l">
+              <a:spcAft>
+                <a:spcPts val="600"/>
+              </a:spcAft>
+            </a:pPr>
+            <a:r>
+              <a:rPr sz="1800" b="1">
+                <a:solidFill>
+                  <a:srgbClr val="104281"/>
+                </a:solidFill>
+                <a:latin typeface="맑은 고딕"/>
+              </a:rPr>
+              <a:t>③  재학습</a:t>
+            </a:r>
+          </a:p>
+        </p:txBody>
+      </p:sp>
+      <p:sp>
+        <p:nvSpPr>
+          <p:cNvPr id="10" name="TextBox 9"/>
+          <p:cNvSpPr txBox="1"/>
+          <p:nvPr/>
+        </p:nvSpPr>
+        <p:spPr>
+          <a:xfrm>
+            <a:off x="4114800" y="3273552"/>
+            <a:ext cx="7589520" cy="457200"/>
+          </a:xfrm>
+          <a:prstGeom prst="rect">
+            <a:avLst/>
+          </a:prstGeom>
+          <a:noFill/>
+        </p:spPr>
+        <p:txBody>
+          <a:bodyPr wrap="square">
+            <a:spAutoFit/>
+          </a:bodyPr>
+          <a:lstStyle/>
+          <a:p>
+            <a:pPr algn="l">
+              <a:spcAft>
+                <a:spcPts val="600"/>
+              </a:spcAft>
+            </a:pPr>
+            <a:r>
+              <a:rPr sz="1400" b="0">
+                <a:solidFill>
+                  <a:srgbClr val="202020"/>
+                </a:solidFill>
+                <a:latin typeface="맑은 고딕"/>
+              </a:rPr>
+              <a:t>확진 라벨이 붙은 데이터만 기존 174명과 결합 — 같은 무누수 검증 절차로 재학습</a:t>
+            </a:r>
+          </a:p>
+        </p:txBody>
+      </p:sp>
+      <p:sp>
+        <p:nvSpPr>
+          <p:cNvPr id="11" name="TextBox 10"/>
+          <p:cNvSpPr txBox="1"/>
+          <p:nvPr/>
+        </p:nvSpPr>
+        <p:spPr>
+          <a:xfrm>
+            <a:off x="914400" y="4023360"/>
+            <a:ext cx="3108960" cy="457200"/>
+          </a:xfrm>
+          <a:prstGeom prst="rect">
+            <a:avLst/>
+          </a:prstGeom>
+          <a:noFill/>
+        </p:spPr>
+        <p:txBody>
+          <a:bodyPr wrap="square">
+            <a:spAutoFit/>
+          </a:bodyPr>
+          <a:lstStyle/>
+          <a:p>
+            <a:pPr algn="l">
+              <a:spcAft>
+                <a:spcPts val="600"/>
+              </a:spcAft>
+            </a:pPr>
+            <a:r>
+              <a:rPr sz="1800" b="1">
+                <a:solidFill>
+                  <a:srgbClr val="104281"/>
+                </a:solidFill>
+                <a:latin typeface="맑은 고딕"/>
+              </a:rPr>
+              <a:t>④  모델 교체</a:t>
+            </a:r>
+          </a:p>
+        </p:txBody>
+      </p:sp>
+      <p:sp>
+        <p:nvSpPr>
+          <p:cNvPr id="12" name="TextBox 11"/>
+          <p:cNvSpPr txBox="1"/>
+          <p:nvPr/>
+        </p:nvSpPr>
+        <p:spPr>
+          <a:xfrm>
+            <a:off x="4114800" y="4050792"/>
+            <a:ext cx="7589520" cy="457200"/>
+          </a:xfrm>
+          <a:prstGeom prst="rect">
+            <a:avLst/>
+          </a:prstGeom>
+          <a:noFill/>
+        </p:spPr>
+        <p:txBody>
+          <a:bodyPr wrap="square">
+            <a:spAutoFit/>
+          </a:bodyPr>
+          <a:lstStyle/>
+          <a:p>
+            <a:pPr algn="l">
+              <a:spcAft>
+                <a:spcPts val="600"/>
+              </a:spcAft>
+            </a:pPr>
+            <a:r>
+              <a:rPr sz="1400" b="0">
+                <a:solidFill>
+                  <a:srgbClr val="202020"/>
+                </a:solidFill>
+                <a:latin typeface="맑은 고딕"/>
+              </a:rPr>
+              <a:t>기존 모델 자동 백업 후 교체 → 서비스 재시작만 하면 새 모델 적용</a:t>
+            </a:r>
+          </a:p>
+        </p:txBody>
+      </p:sp>
+      <p:sp>
+        <p:nvSpPr>
+          <p:cNvPr id="13" name="TextBox 12"/>
+          <p:cNvSpPr txBox="1"/>
+          <p:nvPr/>
+        </p:nvSpPr>
+        <p:spPr>
+          <a:xfrm>
+            <a:off x="914400" y="5029200"/>
+            <a:ext cx="10515600" cy="1188720"/>
+          </a:xfrm>
+          <a:prstGeom prst="rect">
+            <a:avLst/>
+          </a:prstGeom>
+          <a:noFill/>
+        </p:spPr>
+        <p:txBody>
+          <a:bodyPr wrap="square">
+            <a:spAutoFit/>
+          </a:bodyPr>
+          <a:lstStyle/>
+          <a:p>
+            <a:pPr algn="l">
+              <a:spcAft>
+                <a:spcPts val="600"/>
+              </a:spcAft>
+            </a:pPr>
+            <a:r>
+              <a:rPr sz="1500" b="0">
+                <a:solidFill>
+                  <a:srgbClr val="202020"/>
+                </a:solidFill>
+                <a:latin typeface="맑은 고딕"/>
+              </a:rPr>
+              <a:t>원칙: 확진 라벨 없는 데이터는 학습에 쓰지 않는다 — 모델이 자기 예측을 정답처럼 배우는 오염 방지</a:t>
+            </a:r>
+          </a:p>
+          <a:p>
+            <a:pPr algn="l">
+              <a:spcAft>
+                <a:spcPts val="600"/>
+              </a:spcAft>
+            </a:pPr>
+            <a:r>
+              <a:rPr sz="1900" b="1">
+                <a:solidFill>
+                  <a:srgbClr val="2A78D6"/>
+                </a:solidFill>
+                <a:latin typeface="맑은 고딕"/>
+              </a:rPr>
+              <a:t>"지금 174명이라는 한계는, 서비스가 돌수록 스스로 풀리는 구조입니다"</a:t>
+            </a:r>
+          </a:p>
+        </p:txBody>
+      </p:sp>
     </p:spTree>
   </p:cSld>
   <p:clrMapOvr>
@@ -10533,7 +11404,7 @@
                 </a:solidFill>
                 <a:latin typeface="맑은 고딕"/>
               </a:rPr>
-              <a:t>02. 분석 질문</a:t>
+              <a:t>02. 전처리</a:t>
             </a:r>
           </a:p>
         </p:txBody>
@@ -10572,7 +11443,7 @@
                 </a:solidFill>
                 <a:latin typeface="맑은 고딕"/>
               </a:rPr>
-              <a:t>Q1~Q6 — 검증을 통과해야 서비스로 간다</a:t>
+              <a:t>하루 기록 11,499개를 '사람 단위 지표' 44개로 요약</a:t>
             </a:r>
           </a:p>
         </p:txBody>
@@ -10585,8 +11456,8 @@
         </p:nvSpPr>
         <p:spPr>
           <a:xfrm>
-            <a:off x="1005840" y="1737360"/>
-            <a:ext cx="1188720" cy="457200"/>
+            <a:off x="1097280" y="2286000"/>
+            <a:ext cx="10058400" cy="3657600"/>
           </a:xfrm>
           <a:prstGeom prst="rect">
             <a:avLst/>
@@ -10605,389 +11476,95 @@
               </a:spcAft>
             </a:pPr>
             <a:r>
-              <a:rPr sz="1800" b="1">
-                <a:solidFill>
-                  <a:srgbClr val="2A78D6"/>
-                </a:solidFill>
-                <a:latin typeface="맑은 고딕"/>
-              </a:rPr>
-              <a:t>Q1·Q2</a:t>
-            </a:r>
-          </a:p>
-        </p:txBody>
-      </p:sp>
-      <p:sp>
-        <p:nvSpPr>
-          <p:cNvPr id="6" name="TextBox 5"/>
-          <p:cNvSpPr txBox="1"/>
-          <p:nvPr/>
-        </p:nvSpPr>
-        <p:spPr>
-          <a:xfrm>
-            <a:off x="2286000" y="1737360"/>
-            <a:ext cx="9144000" cy="457200"/>
-          </a:xfrm>
-          <a:prstGeom prst="rect">
-            <a:avLst/>
-          </a:prstGeom>
-          <a:noFill/>
-        </p:spPr>
-        <p:txBody>
-          <a:bodyPr wrap="square">
-            <a:spAutoFit/>
-          </a:bodyPr>
-          <a:lstStyle/>
-          <a:p>
-            <a:pPr algn="l">
-              <a:spcAft>
-                <a:spcPts val="600"/>
-              </a:spcAft>
-            </a:pPr>
-            <a:r>
-              <a:rPr sz="1700" b="0">
+              <a:rPr sz="1800" b="0">
                 <a:solidFill>
                   <a:srgbClr val="202020"/>
                 </a:solidFill>
                 <a:latin typeface="맑은 고딕"/>
               </a:rPr>
-              <a:t>진단군별로 활동량·수면 패턴이 다른가?</a:t>
-            </a:r>
-          </a:p>
-        </p:txBody>
-      </p:sp>
-      <p:sp>
-        <p:nvSpPr>
-          <p:cNvPr id="7" name="TextBox 6"/>
-          <p:cNvSpPr txBox="1"/>
-          <p:nvPr/>
-        </p:nvSpPr>
-        <p:spPr>
-          <a:xfrm>
-            <a:off x="1005840" y="2450591"/>
-            <a:ext cx="1188720" cy="457200"/>
-          </a:xfrm>
-          <a:prstGeom prst="rect">
-            <a:avLst/>
-          </a:prstGeom>
-          <a:noFill/>
-        </p:spPr>
-        <p:txBody>
-          <a:bodyPr wrap="square">
-            <a:spAutoFit/>
-          </a:bodyPr>
-          <a:lstStyle/>
-          <a:p>
-            <a:pPr algn="l">
-              <a:spcAft>
-                <a:spcPts val="600"/>
-              </a:spcAft>
-            </a:pPr>
-            <a:r>
-              <a:rPr sz="1800" b="1">
-                <a:solidFill>
-                  <a:srgbClr val="2A78D6"/>
-                </a:solidFill>
-                <a:latin typeface="맑은 고딕"/>
-              </a:rPr>
-              <a:t>Q3</a:t>
-            </a:r>
-          </a:p>
-        </p:txBody>
-      </p:sp>
-      <p:sp>
-        <p:nvSpPr>
-          <p:cNvPr id="8" name="TextBox 7"/>
-          <p:cNvSpPr txBox="1"/>
-          <p:nvPr/>
-        </p:nvSpPr>
-        <p:spPr>
-          <a:xfrm>
-            <a:off x="2286000" y="2450591"/>
-            <a:ext cx="9144000" cy="457200"/>
-          </a:xfrm>
-          <a:prstGeom prst="rect">
-            <a:avLst/>
-          </a:prstGeom>
-          <a:noFill/>
-        </p:spPr>
-        <p:txBody>
-          <a:bodyPr wrap="square">
-            <a:spAutoFit/>
-          </a:bodyPr>
-          <a:lstStyle/>
-          <a:p>
-            <a:pPr algn="l">
-              <a:spcAft>
-                <a:spcPts val="600"/>
-              </a:spcAft>
-            </a:pPr>
-            <a:r>
-              <a:rPr sz="1700" b="0">
+              <a:t>① 신뢰 필터 — 반지 미착용이 긴 날(180분 이상)은 그날 기록 전체를 제외</a:t>
+            </a:r>
+          </a:p>
+          <a:p>
+            <a:pPr algn="l">
+              <a:spcAft>
+                <a:spcPts val="600"/>
+              </a:spcAft>
+            </a:pPr>
+            <a:r>
+              <a:rPr sz="1800" b="0">
                 <a:solidFill>
                   <a:srgbClr val="202020"/>
                 </a:solidFill>
                 <a:latin typeface="맑은 고딕"/>
               </a:rPr>
-              <a:t>병원 검사 없이 생활 기록만으로 위험군을 걸러낼 수 있는가?</a:t>
-            </a:r>
-          </a:p>
-        </p:txBody>
-      </p:sp>
-      <p:sp>
-        <p:nvSpPr>
-          <p:cNvPr id="9" name="TextBox 8"/>
-          <p:cNvSpPr txBox="1"/>
-          <p:nvPr/>
-        </p:nvSpPr>
-        <p:spPr>
-          <a:xfrm>
-            <a:off x="1005840" y="3163824"/>
-            <a:ext cx="1188720" cy="457200"/>
-          </a:xfrm>
-          <a:prstGeom prst="rect">
-            <a:avLst/>
-          </a:prstGeom>
-          <a:noFill/>
-        </p:spPr>
-        <p:txBody>
-          <a:bodyPr wrap="square">
-            <a:spAutoFit/>
-          </a:bodyPr>
-          <a:lstStyle/>
-          <a:p>
-            <a:pPr algn="l">
-              <a:spcAft>
-                <a:spcPts val="600"/>
-              </a:spcAft>
-            </a:pPr>
-            <a:r>
-              <a:rPr sz="1800" b="1">
-                <a:solidFill>
-                  <a:srgbClr val="2A78D6"/>
-                </a:solidFill>
-                <a:latin typeface="맑은 고딕"/>
-              </a:rPr>
-              <a:t>Q4</a:t>
-            </a:r>
-          </a:p>
-        </p:txBody>
-      </p:sp>
-      <p:sp>
-        <p:nvSpPr>
-          <p:cNvPr id="10" name="TextBox 9"/>
-          <p:cNvSpPr txBox="1"/>
-          <p:nvPr/>
-        </p:nvSpPr>
-        <p:spPr>
-          <a:xfrm>
-            <a:off x="2286000" y="3163824"/>
-            <a:ext cx="9144000" cy="457200"/>
-          </a:xfrm>
-          <a:prstGeom prst="rect">
-            <a:avLst/>
-          </a:prstGeom>
-          <a:noFill/>
-        </p:spPr>
-        <p:txBody>
-          <a:bodyPr wrap="square">
-            <a:spAutoFit/>
-          </a:bodyPr>
-          <a:lstStyle/>
-          <a:p>
-            <a:pPr algn="l">
-              <a:spcAft>
-                <a:spcPts val="600"/>
-              </a:spcAft>
-            </a:pPr>
-            <a:r>
-              <a:rPr sz="1700" b="0">
+              <a:t>② 매칭 — 활동·수면 기록을 사람 기준으로 진단 결과와 연결 (174명 전원 확인)</a:t>
+            </a:r>
+          </a:p>
+          <a:p>
+            <a:pPr algn="l">
+              <a:spcAft>
+                <a:spcPts val="600"/>
+              </a:spcAft>
+            </a:pPr>
+            <a:r>
+              <a:rPr sz="1800" b="0">
                 <a:solidFill>
                   <a:srgbClr val="202020"/>
                 </a:solidFill>
                 <a:latin typeface="맑은 고딕"/>
               </a:rPr>
-              <a:t>어떤 생활 지표가 판별에 가장 크게 기여하는가?</a:t>
-            </a:r>
-          </a:p>
-        </p:txBody>
-      </p:sp>
-      <p:sp>
-        <p:nvSpPr>
-          <p:cNvPr id="11" name="TextBox 10"/>
-          <p:cNvSpPr txBox="1"/>
-          <p:nvPr/>
-        </p:nvSpPr>
-        <p:spPr>
-          <a:xfrm>
-            <a:off x="1005840" y="3877056"/>
-            <a:ext cx="1188720" cy="457200"/>
-          </a:xfrm>
-          <a:prstGeom prst="rect">
-            <a:avLst/>
-          </a:prstGeom>
-          <a:noFill/>
-        </p:spPr>
-        <p:txBody>
-          <a:bodyPr wrap="square">
-            <a:spAutoFit/>
-          </a:bodyPr>
-          <a:lstStyle/>
-          <a:p>
-            <a:pPr algn="l">
-              <a:spcAft>
-                <a:spcPts val="600"/>
-              </a:spcAft>
-            </a:pPr>
-            <a:r>
-              <a:rPr sz="1800" b="1">
-                <a:solidFill>
-                  <a:srgbClr val="2A78D6"/>
-                </a:solidFill>
-                <a:latin typeface="맑은 고딕"/>
-              </a:rPr>
-              <a:t>Q5</a:t>
-            </a:r>
-          </a:p>
-        </p:txBody>
-      </p:sp>
-      <p:sp>
-        <p:nvSpPr>
-          <p:cNvPr id="12" name="TextBox 11"/>
-          <p:cNvSpPr txBox="1"/>
-          <p:nvPr/>
-        </p:nvSpPr>
-        <p:spPr>
-          <a:xfrm>
-            <a:off x="2286000" y="3877056"/>
-            <a:ext cx="9144000" cy="457200"/>
-          </a:xfrm>
-          <a:prstGeom prst="rect">
-            <a:avLst/>
-          </a:prstGeom>
-          <a:noFill/>
-        </p:spPr>
-        <p:txBody>
-          <a:bodyPr wrap="square">
-            <a:spAutoFit/>
-          </a:bodyPr>
-          <a:lstStyle/>
-          <a:p>
-            <a:pPr algn="l">
-              <a:spcAft>
-                <a:spcPts val="600"/>
-              </a:spcAft>
-            </a:pPr>
-            <a:r>
-              <a:rPr sz="1700" b="1">
+              <a:t>③ 요약 — 사람 1명당 28~118일 기록을 지표별 평균(수준) + 표준편차(들쭉날쭉함)로 압축</a:t>
+            </a:r>
+          </a:p>
+          <a:p>
+            <a:pPr algn="l">
+              <a:spcAft>
+                <a:spcPts val="600"/>
+              </a:spcAft>
+            </a:pPr>
+            <a:r>
+              <a:rPr sz="1000" b="0">
                 <a:solidFill>
                   <a:srgbClr val="202020"/>
                 </a:solidFill>
                 <a:latin typeface="맑은 고딕"/>
               </a:rPr>
-              <a:t>그 신호는 치매를 빼고 경도인지장애만 남겨도 유지되는가?  ← 검증 게이트</a:t>
-            </a:r>
-          </a:p>
-        </p:txBody>
-      </p:sp>
-      <p:sp>
-        <p:nvSpPr>
-          <p:cNvPr id="13" name="TextBox 12"/>
-          <p:cNvSpPr txBox="1"/>
-          <p:nvPr/>
-        </p:nvSpPr>
-        <p:spPr>
-          <a:xfrm>
-            <a:off x="1005840" y="4590288"/>
-            <a:ext cx="1188720" cy="457200"/>
-          </a:xfrm>
-          <a:prstGeom prst="rect">
-            <a:avLst/>
-          </a:prstGeom>
-          <a:noFill/>
-        </p:spPr>
-        <p:txBody>
-          <a:bodyPr wrap="square">
-            <a:spAutoFit/>
-          </a:bodyPr>
-          <a:lstStyle/>
-          <a:p>
-            <a:pPr algn="l">
-              <a:spcAft>
-                <a:spcPts val="600"/>
-              </a:spcAft>
-            </a:pPr>
-            <a:r>
-              <a:rPr sz="1800" b="1">
-                <a:solidFill>
-                  <a:srgbClr val="2A78D6"/>
-                </a:solidFill>
-                <a:latin typeface="맑은 고딕"/>
-              </a:rPr>
-              <a:t>Q6</a:t>
-            </a:r>
-          </a:p>
-        </p:txBody>
-      </p:sp>
-      <p:sp>
-        <p:nvSpPr>
-          <p:cNvPr id="14" name="TextBox 13"/>
-          <p:cNvSpPr txBox="1"/>
-          <p:nvPr/>
-        </p:nvSpPr>
-        <p:spPr>
-          <a:xfrm>
-            <a:off x="2286000" y="4590288"/>
-            <a:ext cx="9144000" cy="457200"/>
-          </a:xfrm>
-          <a:prstGeom prst="rect">
-            <a:avLst/>
-          </a:prstGeom>
-          <a:noFill/>
-        </p:spPr>
-        <p:txBody>
-          <a:bodyPr wrap="square">
-            <a:spAutoFit/>
-          </a:bodyPr>
-          <a:lstStyle/>
-          <a:p>
-            <a:pPr algn="l">
-              <a:spcAft>
-                <a:spcPts val="600"/>
-              </a:spcAft>
-            </a:pPr>
-            <a:r>
-              <a:rPr sz="1700" b="1">
+              <a:t/>
+            </a:r>
+          </a:p>
+          <a:p>
+            <a:pPr algn="l">
+              <a:spcAft>
+                <a:spcPts val="600"/>
+              </a:spcAft>
+            </a:pPr>
+            <a:r>
+              <a:rPr sz="2000" b="1">
+                <a:solidFill>
+                  <a:srgbClr val="104281"/>
+                </a:solidFill>
+                <a:latin typeface="맑은 고딕"/>
+              </a:rPr>
+              <a:t>→ 174명 × 44개 지표 테이블 완성 — 이후 모든 분석·모델·서비스가 이 표 하나에서 출발</a:t>
+            </a:r>
+          </a:p>
+          <a:p>
+            <a:pPr algn="l">
+              <a:spcAft>
+                <a:spcPts val="600"/>
+              </a:spcAft>
+            </a:pPr>
+            <a:r>
+              <a:rPr sz="1000" b="0">
                 <a:solidFill>
                   <a:srgbClr val="202020"/>
                 </a:solidFill>
                 <a:latin typeface="맑은 고딕"/>
               </a:rPr>
-              <a:t>그 성능은 우연이 아니라 통계적으로 의미 있는 수준인가?  ← 검증 게이트</a:t>
-            </a:r>
-          </a:p>
-        </p:txBody>
-      </p:sp>
-      <p:sp>
-        <p:nvSpPr>
-          <p:cNvPr id="15" name="TextBox 14"/>
-          <p:cNvSpPr txBox="1"/>
-          <p:nvPr/>
-        </p:nvSpPr>
-        <p:spPr>
-          <a:xfrm>
-            <a:off x="1005840" y="5486400"/>
-            <a:ext cx="10058400" cy="548640"/>
-          </a:xfrm>
-          <a:prstGeom prst="rect">
-            <a:avLst/>
-          </a:prstGeom>
-          <a:noFill/>
-        </p:spPr>
-        <p:txBody>
-          <a:bodyPr wrap="square">
-            <a:spAutoFit/>
-          </a:bodyPr>
-          <a:lstStyle/>
+              <a:t/>
+            </a:r>
+          </a:p>
           <a:p>
             <a:pPr algn="l">
               <a:spcAft>
@@ -11001,7 +11578,7 @@
                 </a:solidFill>
                 <a:latin typeface="맑은 고딕"/>
               </a:rPr>
-              <a:t>계획서 원칙: Q5·Q6 검증 결과에 따라 서비스가 주장할 수 있는 범위를 정한다</a:t>
+              <a:t>전처리 기준은 전부 코드로 고정 — 같은 원본을 넣으면 누가 실행해도 같은 표가 나온다</a:t>
             </a:r>
           </a:p>
         </p:txBody>

--- a/발표자료_최종본.pptx
+++ b/발표자료_최종본.pptx
@@ -1085,6 +1085,17 @@
           <a:p>
             <a:r>
               <a:t>상용화 관점 질문 대비: 업로드가 일회성으로 사라지지 않고 DB에 쌓이며, 검진 확진 결과가 연결된 데이터만 재학습에 씁니다. 라벨 없이 학습하면 모델이 자기 예측을 정답처럼 배우는 오염이 생기기 때문입니다. 전체 루프(적재→라벨→재학습→모델 교체)를 실제로 구현하고 테스트까지 마쳤습니다.</a:t>
+            </a:r>
+          </a:p>
+          <a:p/>
+          <a:p>
+            <a:r>
+              <a:t>[적재 상세 — 구체적으로 어떻게 저장되냐는 질문 대비]</a:t>
+            </a:r>
+          </a:p>
+          <a:p>
+            <a:r>
+              <a:t>예측 API가 응답을 돌려주기 직전에 자동 실행: ① uuid로 무작위 12자리 익명 ID 발급(개인 식별 정보 없음) ② uploads 테이블에 요약 1행(시각/일수/위험점수/판정, 확진 라벨 자리는 NULL로 시작) ③ upload_daily 테이블에 하루 기록=1행씩(58일치면 58행, 날짜/걸음수/수면효율 등 22개 컬럼 원본 그대로) ④ 한 트랜잭션으로 커밋, ID는 응답에 담아 반환(검진 결과 연결 시 사용). DB는 SQLite 파일(data/service.db) 하나 — 설치 불필요. 적재 실패해도 예측 응답은 정상(부가 기능). 확인은 /uploads/stats API 또는 DB 파일 직접 조회.</a:t>
             </a:r>
           </a:p>
         </p:txBody>
@@ -8676,7 +8687,7 @@
                 </a:solidFill>
                 <a:latin typeface="맑은 고딕"/>
               </a:rPr>
-              <a:t>06. 결론</a:t>
+              <a:t>05. 서비스</a:t>
             </a:r>
           </a:p>
         </p:txBody>
@@ -8715,7 +8726,7 @@
                 </a:solidFill>
                 <a:latin typeface="맑은 고딕"/>
               </a:rPr>
-              <a:t>5일 동안 만든 것은 숫자가 아니라, 믿을 수 있는 절차입니다</a:t>
+              <a:t>업로드는 사라지지 않는다 — 적재·재학습 파이프라인 (구현 완료)</a:t>
             </a:r>
           </a:p>
         </p:txBody>
@@ -8729,7 +8740,7 @@
         <p:spPr>
           <a:xfrm>
             <a:off x="914400" y="1691640"/>
-            <a:ext cx="10607040" cy="4846320"/>
+            <a:ext cx="3108960" cy="457200"/>
           </a:xfrm>
           <a:prstGeom prst="rect">
             <a:avLst/>
@@ -8750,171 +8761,339 @@
             <a:r>
               <a:rPr sz="1800" b="1">
                 <a:solidFill>
+                  <a:srgbClr val="104281"/>
+                </a:solidFill>
+                <a:latin typeface="맑은 고딕"/>
+              </a:rPr>
+              <a:t>①  업로드 자동 적재</a:t>
+            </a:r>
+          </a:p>
+        </p:txBody>
+      </p:sp>
+      <p:sp>
+        <p:nvSpPr>
+          <p:cNvPr id="6" name="TextBox 5"/>
+          <p:cNvSpPr txBox="1"/>
+          <p:nvPr/>
+        </p:nvSpPr>
+        <p:spPr>
+          <a:xfrm>
+            <a:off x="4114800" y="1719072"/>
+            <a:ext cx="7589520" cy="457200"/>
+          </a:xfrm>
+          <a:prstGeom prst="rect">
+            <a:avLst/>
+          </a:prstGeom>
+          <a:noFill/>
+        </p:spPr>
+        <p:txBody>
+          <a:bodyPr wrap="square">
+            <a:spAutoFit/>
+          </a:bodyPr>
+          <a:lstStyle/>
+          <a:p>
+            <a:pPr algn="l">
+              <a:spcAft>
+                <a:spcPts val="600"/>
+              </a:spcAft>
+            </a:pPr>
+            <a:r>
+              <a:rPr sz="1400" b="0">
+                <a:solidFill>
+                  <a:srgbClr val="202020"/>
+                </a:solidFill>
+                <a:latin typeface="맑은 고딕"/>
+              </a:rPr>
+              <a:t>예측과 동시에 DB에 익명 저장 — 일 단위 기록 + 예측 결과 (개인 식별 정보 없음)</a:t>
+            </a:r>
+          </a:p>
+        </p:txBody>
+      </p:sp>
+      <p:sp>
+        <p:nvSpPr>
+          <p:cNvPr id="7" name="TextBox 6"/>
+          <p:cNvSpPr txBox="1"/>
+          <p:nvPr/>
+        </p:nvSpPr>
+        <p:spPr>
+          <a:xfrm>
+            <a:off x="914400" y="2468880"/>
+            <a:ext cx="3108960" cy="457200"/>
+          </a:xfrm>
+          <a:prstGeom prst="rect">
+            <a:avLst/>
+          </a:prstGeom>
+          <a:noFill/>
+        </p:spPr>
+        <p:txBody>
+          <a:bodyPr wrap="square">
+            <a:spAutoFit/>
+          </a:bodyPr>
+          <a:lstStyle/>
+          <a:p>
+            <a:pPr algn="l">
+              <a:spcAft>
+                <a:spcPts val="600"/>
+              </a:spcAft>
+            </a:pPr>
+            <a:r>
+              <a:rPr sz="1800" b="1">
+                <a:solidFill>
+                  <a:srgbClr val="104281"/>
+                </a:solidFill>
+                <a:latin typeface="맑은 고딕"/>
+              </a:rPr>
+              <a:t>②  검진 결과 연결</a:t>
+            </a:r>
+          </a:p>
+        </p:txBody>
+      </p:sp>
+      <p:sp>
+        <p:nvSpPr>
+          <p:cNvPr id="8" name="TextBox 7"/>
+          <p:cNvSpPr txBox="1"/>
+          <p:nvPr/>
+        </p:nvSpPr>
+        <p:spPr>
+          <a:xfrm>
+            <a:off x="4114800" y="2496312"/>
+            <a:ext cx="7589520" cy="457200"/>
+          </a:xfrm>
+          <a:prstGeom prst="rect">
+            <a:avLst/>
+          </a:prstGeom>
+          <a:noFill/>
+        </p:spPr>
+        <p:txBody>
+          <a:bodyPr wrap="square">
+            <a:spAutoFit/>
+          </a:bodyPr>
+          <a:lstStyle/>
+          <a:p>
+            <a:pPr algn="l">
+              <a:spcAft>
+                <a:spcPts val="600"/>
+              </a:spcAft>
+            </a:pPr>
+            <a:r>
+              <a:rPr sz="1400" b="0">
+                <a:solidFill>
+                  <a:srgbClr val="202020"/>
+                </a:solidFill>
+                <a:latin typeface="맑은 고딕"/>
+              </a:rPr>
+              <a:t>위험군 안내를 받고 검진한 사용자의 확진 결과를 기관이 입력 (API 구현)</a:t>
+            </a:r>
+          </a:p>
+        </p:txBody>
+      </p:sp>
+      <p:sp>
+        <p:nvSpPr>
+          <p:cNvPr id="9" name="TextBox 8"/>
+          <p:cNvSpPr txBox="1"/>
+          <p:nvPr/>
+        </p:nvSpPr>
+        <p:spPr>
+          <a:xfrm>
+            <a:off x="914400" y="3246120"/>
+            <a:ext cx="3108960" cy="457200"/>
+          </a:xfrm>
+          <a:prstGeom prst="rect">
+            <a:avLst/>
+          </a:prstGeom>
+          <a:noFill/>
+        </p:spPr>
+        <p:txBody>
+          <a:bodyPr wrap="square">
+            <a:spAutoFit/>
+          </a:bodyPr>
+          <a:lstStyle/>
+          <a:p>
+            <a:pPr algn="l">
+              <a:spcAft>
+                <a:spcPts val="600"/>
+              </a:spcAft>
+            </a:pPr>
+            <a:r>
+              <a:rPr sz="1800" b="1">
+                <a:solidFill>
+                  <a:srgbClr val="104281"/>
+                </a:solidFill>
+                <a:latin typeface="맑은 고딕"/>
+              </a:rPr>
+              <a:t>③  재학습</a:t>
+            </a:r>
+          </a:p>
+        </p:txBody>
+      </p:sp>
+      <p:sp>
+        <p:nvSpPr>
+          <p:cNvPr id="10" name="TextBox 9"/>
+          <p:cNvSpPr txBox="1"/>
+          <p:nvPr/>
+        </p:nvSpPr>
+        <p:spPr>
+          <a:xfrm>
+            <a:off x="4114800" y="3273552"/>
+            <a:ext cx="7589520" cy="457200"/>
+          </a:xfrm>
+          <a:prstGeom prst="rect">
+            <a:avLst/>
+          </a:prstGeom>
+          <a:noFill/>
+        </p:spPr>
+        <p:txBody>
+          <a:bodyPr wrap="square">
+            <a:spAutoFit/>
+          </a:bodyPr>
+          <a:lstStyle/>
+          <a:p>
+            <a:pPr algn="l">
+              <a:spcAft>
+                <a:spcPts val="600"/>
+              </a:spcAft>
+            </a:pPr>
+            <a:r>
+              <a:rPr sz="1400" b="0">
+                <a:solidFill>
+                  <a:srgbClr val="202020"/>
+                </a:solidFill>
+                <a:latin typeface="맑은 고딕"/>
+              </a:rPr>
+              <a:t>확진 라벨이 붙은 데이터만 기존 174명과 결합 — 같은 무누수 검증 절차로 재학습</a:t>
+            </a:r>
+          </a:p>
+        </p:txBody>
+      </p:sp>
+      <p:sp>
+        <p:nvSpPr>
+          <p:cNvPr id="11" name="TextBox 10"/>
+          <p:cNvSpPr txBox="1"/>
+          <p:nvPr/>
+        </p:nvSpPr>
+        <p:spPr>
+          <a:xfrm>
+            <a:off x="914400" y="4023360"/>
+            <a:ext cx="3108960" cy="457200"/>
+          </a:xfrm>
+          <a:prstGeom prst="rect">
+            <a:avLst/>
+          </a:prstGeom>
+          <a:noFill/>
+        </p:spPr>
+        <p:txBody>
+          <a:bodyPr wrap="square">
+            <a:spAutoFit/>
+          </a:bodyPr>
+          <a:lstStyle/>
+          <a:p>
+            <a:pPr algn="l">
+              <a:spcAft>
+                <a:spcPts val="600"/>
+              </a:spcAft>
+            </a:pPr>
+            <a:r>
+              <a:rPr sz="1800" b="1">
+                <a:solidFill>
+                  <a:srgbClr val="104281"/>
+                </a:solidFill>
+                <a:latin typeface="맑은 고딕"/>
+              </a:rPr>
+              <a:t>④  모델 교체</a:t>
+            </a:r>
+          </a:p>
+        </p:txBody>
+      </p:sp>
+      <p:sp>
+        <p:nvSpPr>
+          <p:cNvPr id="12" name="TextBox 11"/>
+          <p:cNvSpPr txBox="1"/>
+          <p:nvPr/>
+        </p:nvSpPr>
+        <p:spPr>
+          <a:xfrm>
+            <a:off x="4114800" y="4050792"/>
+            <a:ext cx="7589520" cy="457200"/>
+          </a:xfrm>
+          <a:prstGeom prst="rect">
+            <a:avLst/>
+          </a:prstGeom>
+          <a:noFill/>
+        </p:spPr>
+        <p:txBody>
+          <a:bodyPr wrap="square">
+            <a:spAutoFit/>
+          </a:bodyPr>
+          <a:lstStyle/>
+          <a:p>
+            <a:pPr algn="l">
+              <a:spcAft>
+                <a:spcPts val="600"/>
+              </a:spcAft>
+            </a:pPr>
+            <a:r>
+              <a:rPr sz="1400" b="0">
+                <a:solidFill>
+                  <a:srgbClr val="202020"/>
+                </a:solidFill>
+                <a:latin typeface="맑은 고딕"/>
+              </a:rPr>
+              <a:t>기존 모델 자동 백업 후 교체 → 서비스 재시작만 하면 새 모델 적용</a:t>
+            </a:r>
+          </a:p>
+        </p:txBody>
+      </p:sp>
+      <p:sp>
+        <p:nvSpPr>
+          <p:cNvPr id="13" name="TextBox 12"/>
+          <p:cNvSpPr txBox="1"/>
+          <p:nvPr/>
+        </p:nvSpPr>
+        <p:spPr>
+          <a:xfrm>
+            <a:off x="914400" y="5029200"/>
+            <a:ext cx="10515600" cy="1188720"/>
+          </a:xfrm>
+          <a:prstGeom prst="rect">
+            <a:avLst/>
+          </a:prstGeom>
+          <a:noFill/>
+        </p:spPr>
+        <p:txBody>
+          <a:bodyPr wrap="square">
+            <a:spAutoFit/>
+          </a:bodyPr>
+          <a:lstStyle/>
+          <a:p>
+            <a:pPr algn="l">
+              <a:spcAft>
+                <a:spcPts val="600"/>
+              </a:spcAft>
+            </a:pPr>
+            <a:r>
+              <a:rPr sz="1500" b="0">
+                <a:solidFill>
+                  <a:srgbClr val="202020"/>
+                </a:solidFill>
+                <a:latin typeface="맑은 고딕"/>
+              </a:rPr>
+              <a:t>원칙: 확진 라벨 없는 데이터는 학습에 쓰지 않는다 — 모델이 자기 예측을 정답처럼 배우는 오염 방지</a:t>
+            </a:r>
+          </a:p>
+          <a:p>
+            <a:pPr algn="l">
+              <a:spcAft>
+                <a:spcPts val="600"/>
+              </a:spcAft>
+            </a:pPr>
+            <a:r>
+              <a:rPr sz="1900" b="1">
+                <a:solidFill>
                   <a:srgbClr val="2A78D6"/>
                 </a:solidFill>
                 <a:latin typeface="맑은 고딕"/>
               </a:rPr>
-              <a:t>확인한 것</a:t>
-            </a:r>
-          </a:p>
-          <a:p>
-            <a:pPr algn="l">
-              <a:spcAft>
-                <a:spcPts val="600"/>
-              </a:spcAft>
-            </a:pPr>
-            <a:r>
-              <a:rPr sz="1600" b="0">
-                <a:solidFill>
-                  <a:srgbClr val="202020"/>
-                </a:solidFill>
-                <a:latin typeface="맑은 고딕"/>
-              </a:rPr>
-              <a:t>· 활동량 평균이 아니라 "생활 패턴의 불규칙함"이 위험군을 가른다</a:t>
-            </a:r>
-          </a:p>
-          <a:p>
-            <a:pPr algn="l">
-              <a:spcAft>
-                <a:spcPts val="600"/>
-              </a:spcAft>
-            </a:pPr>
-            <a:r>
-              <a:rPr sz="1600" b="0">
-                <a:solidFill>
-                  <a:srgbClr val="202020"/>
-                </a:solidFill>
-                <a:latin typeface="맑은 고딕"/>
-              </a:rPr>
-              <a:t>· 그 구분 능력은 우연이 아니다 (우연일 확률 0.6%)</a:t>
-            </a:r>
-          </a:p>
-          <a:p>
-            <a:pPr algn="l">
-              <a:spcAft>
-                <a:spcPts val="600"/>
-              </a:spcAft>
-            </a:pPr>
-            <a:r>
-              <a:rPr sz="800" b="0">
-                <a:solidFill>
-                  <a:srgbClr val="202020"/>
-                </a:solidFill>
-                <a:latin typeface="맑은 고딕"/>
-              </a:rPr>
-              <a:t/>
-            </a:r>
-          </a:p>
-          <a:p>
-            <a:pPr algn="l">
-              <a:spcAft>
-                <a:spcPts val="600"/>
-              </a:spcAft>
-            </a:pPr>
-            <a:r>
-              <a:rPr sz="1800" b="1">
-                <a:solidFill>
-                  <a:srgbClr val="2A78D6"/>
-                </a:solidFill>
-                <a:latin typeface="맑은 고딕"/>
-              </a:rPr>
-              <a:t>한계 — 숨기지 않고 명시</a:t>
-            </a:r>
-          </a:p>
-          <a:p>
-            <a:pPr algn="l">
-              <a:spcAft>
-                <a:spcPts val="600"/>
-              </a:spcAft>
-            </a:pPr>
-            <a:r>
-              <a:rPr sz="1600" b="0">
-                <a:solidFill>
-                  <a:srgbClr val="202020"/>
-                </a:solidFill>
-                <a:latin typeface="맑은 고딕"/>
-              </a:rPr>
-              <a:t>· 표본 174명(치매 12명), 한 지역(광주)·한 시기 데이터 — 일반화에는 더 큰 데이터 필요</a:t>
-            </a:r>
-          </a:p>
-          <a:p>
-            <a:pPr algn="l">
-              <a:spcAft>
-                <a:spcPts val="600"/>
-              </a:spcAft>
-            </a:pPr>
-            <a:r>
-              <a:rPr sz="1600" b="0">
-                <a:solidFill>
-                  <a:srgbClr val="202020"/>
-                </a:solidFill>
-                <a:latin typeface="맑은 고딕"/>
-              </a:rPr>
-              <a:t>· 경도인지장애 단독 조기 신호는 미확인 · 재현율 수치는 통계적으로 미확정</a:t>
-            </a:r>
-          </a:p>
-          <a:p>
-            <a:pPr algn="l">
-              <a:spcAft>
-                <a:spcPts val="600"/>
-              </a:spcAft>
-            </a:pPr>
-            <a:r>
-              <a:rPr sz="800" b="0">
-                <a:solidFill>
-                  <a:srgbClr val="202020"/>
-                </a:solidFill>
-                <a:latin typeface="맑은 고딕"/>
-              </a:rPr>
-              <a:t/>
-            </a:r>
-          </a:p>
-          <a:p>
-            <a:pPr algn="l">
-              <a:spcAft>
-                <a:spcPts val="600"/>
-              </a:spcAft>
-            </a:pPr>
-            <a:r>
-              <a:rPr sz="1800" b="1">
-                <a:solidFill>
-                  <a:srgbClr val="2A78D6"/>
-                </a:solidFill>
-                <a:latin typeface="맑은 고딕"/>
-              </a:rPr>
-              <a:t>그래서 진짜 산출물은</a:t>
-            </a:r>
-          </a:p>
-          <a:p>
-            <a:pPr algn="l">
-              <a:spcAft>
-                <a:spcPts val="600"/>
-              </a:spcAft>
-            </a:pPr>
-            <a:r>
-              <a:rPr sz="1600" b="1">
-                <a:solidFill>
-                  <a:srgbClr val="104281"/>
-                </a:solidFill>
-                <a:latin typeface="맑은 고딕"/>
-              </a:rPr>
-              <a:t>· "시험 문제를 미리 본 셈"인 데이터 누수 실수를 스스로 찾아 고치고, 우연 여부까지 검증한 분석 절차</a:t>
-            </a:r>
-          </a:p>
-          <a:p>
-            <a:pPr algn="l">
-              <a:spcAft>
-                <a:spcPts val="600"/>
-              </a:spcAft>
-            </a:pPr>
-            <a:r>
-              <a:rPr sz="1600" b="1">
-                <a:solidFill>
-                  <a:srgbClr val="104281"/>
-                </a:solidFill>
-                <a:latin typeface="맑은 고딕"/>
-              </a:rPr>
-              <a:t>· 병원·기관의 정식 데이터가 들어오면 코드 수정 없이 그대로 재학습·재검증 가능</a:t>
+              <a:t>"지금 174명이라는 한계는, 서비스가 돌수록 스스로 풀리는 구조입니다"</a:t>
             </a:r>
           </a:p>
         </p:txBody>
@@ -9014,7 +9193,7 @@
                 </a:solidFill>
                 <a:latin typeface="맑은 고딕"/>
               </a:rPr>
-              <a:t>06. 확장 방향</a:t>
+              <a:t>06. 결론</a:t>
             </a:r>
           </a:p>
         </p:txBody>
@@ -9053,7 +9232,7 @@
                 </a:solidFill>
                 <a:latin typeface="맑은 고딕"/>
               </a:rPr>
-              <a:t>스크리닝에서 끝나지 않는다 — 2단계 로드맵</a:t>
+              <a:t>5일 동안 만든 것은 숫자가 아니라, 믿을 수 있는 절차입니다</a:t>
             </a:r>
           </a:p>
         </p:txBody>
@@ -9066,8 +9245,8 @@
         </p:nvSpPr>
         <p:spPr>
           <a:xfrm>
-            <a:off x="914400" y="2286000"/>
-            <a:ext cx="10607040" cy="4389120"/>
+            <a:off x="914400" y="1691640"/>
+            <a:ext cx="10607040" cy="4846320"/>
           </a:xfrm>
           <a:prstGeom prst="rect">
             <a:avLst/>
@@ -9086,141 +9265,173 @@
               </a:spcAft>
             </a:pPr>
             <a:r>
-              <a:rPr sz="1900" b="1">
+              <a:rPr sz="1800" b="1">
+                <a:solidFill>
+                  <a:srgbClr val="2A78D6"/>
+                </a:solidFill>
+                <a:latin typeface="맑은 고딕"/>
+              </a:rPr>
+              <a:t>확인한 것</a:t>
+            </a:r>
+          </a:p>
+          <a:p>
+            <a:pPr algn="l">
+              <a:spcAft>
+                <a:spcPts val="600"/>
+              </a:spcAft>
+            </a:pPr>
+            <a:r>
+              <a:rPr sz="1600" b="0">
+                <a:solidFill>
+                  <a:srgbClr val="202020"/>
+                </a:solidFill>
+                <a:latin typeface="맑은 고딕"/>
+              </a:rPr>
+              <a:t>· 활동량 평균이 아니라 "생활 패턴의 불규칙함"이 위험군을 가른다</a:t>
+            </a:r>
+          </a:p>
+          <a:p>
+            <a:pPr algn="l">
+              <a:spcAft>
+                <a:spcPts val="600"/>
+              </a:spcAft>
+            </a:pPr>
+            <a:r>
+              <a:rPr sz="1600" b="0">
+                <a:solidFill>
+                  <a:srgbClr val="202020"/>
+                </a:solidFill>
+                <a:latin typeface="맑은 고딕"/>
+              </a:rPr>
+              <a:t>· 그 구분 능력은 우연이 아니다 (우연일 확률 0.6%)</a:t>
+            </a:r>
+          </a:p>
+          <a:p>
+            <a:pPr algn="l">
+              <a:spcAft>
+                <a:spcPts val="600"/>
+              </a:spcAft>
+            </a:pPr>
+            <a:r>
+              <a:rPr sz="800" b="0">
+                <a:solidFill>
+                  <a:srgbClr val="202020"/>
+                </a:solidFill>
+                <a:latin typeface="맑은 고딕"/>
+              </a:rPr>
+              <a:t/>
+            </a:r>
+          </a:p>
+          <a:p>
+            <a:pPr algn="l">
+              <a:spcAft>
+                <a:spcPts val="600"/>
+              </a:spcAft>
+            </a:pPr>
+            <a:r>
+              <a:rPr sz="1800" b="1">
+                <a:solidFill>
+                  <a:srgbClr val="2A78D6"/>
+                </a:solidFill>
+                <a:latin typeface="맑은 고딕"/>
+              </a:rPr>
+              <a:t>한계 — 숨기지 않고 명시</a:t>
+            </a:r>
+          </a:p>
+          <a:p>
+            <a:pPr algn="l">
+              <a:spcAft>
+                <a:spcPts val="600"/>
+              </a:spcAft>
+            </a:pPr>
+            <a:r>
+              <a:rPr sz="1600" b="0">
+                <a:solidFill>
+                  <a:srgbClr val="202020"/>
+                </a:solidFill>
+                <a:latin typeface="맑은 고딕"/>
+              </a:rPr>
+              <a:t>· 표본 174명(치매 12명), 한 지역(광주)·한 시기 데이터 — 일반화에는 더 큰 데이터 필요</a:t>
+            </a:r>
+          </a:p>
+          <a:p>
+            <a:pPr algn="l">
+              <a:spcAft>
+                <a:spcPts val="600"/>
+              </a:spcAft>
+            </a:pPr>
+            <a:r>
+              <a:rPr sz="1600" b="0">
+                <a:solidFill>
+                  <a:srgbClr val="202020"/>
+                </a:solidFill>
+                <a:latin typeface="맑은 고딕"/>
+              </a:rPr>
+              <a:t>· 경도인지장애 단독 조기 신호는 미확인 · 재현율 수치는 통계적으로 미확정</a:t>
+            </a:r>
+          </a:p>
+          <a:p>
+            <a:pPr algn="l">
+              <a:spcAft>
+                <a:spcPts val="600"/>
+              </a:spcAft>
+            </a:pPr>
+            <a:r>
+              <a:rPr sz="800" b="0">
+                <a:solidFill>
+                  <a:srgbClr val="202020"/>
+                </a:solidFill>
+                <a:latin typeface="맑은 고딕"/>
+              </a:rPr>
+              <a:t/>
+            </a:r>
+          </a:p>
+          <a:p>
+            <a:pPr algn="l">
+              <a:spcAft>
+                <a:spcPts val="600"/>
+              </a:spcAft>
+            </a:pPr>
+            <a:r>
+              <a:rPr sz="1800" b="1">
+                <a:solidFill>
+                  <a:srgbClr val="2A78D6"/>
+                </a:solidFill>
+                <a:latin typeface="맑은 고딕"/>
+              </a:rPr>
+              <a:t>그래서 진짜 산출물은</a:t>
+            </a:r>
+          </a:p>
+          <a:p>
+            <a:pPr algn="l">
+              <a:spcAft>
+                <a:spcPts val="600"/>
+              </a:spcAft>
+            </a:pPr>
+            <a:r>
+              <a:rPr sz="1600" b="1">
                 <a:solidFill>
                   <a:srgbClr val="104281"/>
                 </a:solidFill>
                 <a:latin typeface="맑은 고딕"/>
               </a:rPr>
-              <a:t>1단계 (이번 구현)  —  스크리닝</a:t>
-            </a:r>
-          </a:p>
-          <a:p>
-            <a:pPr algn="l">
-              <a:spcAft>
-                <a:spcPts val="600"/>
-              </a:spcAft>
-            </a:pPr>
-            <a:r>
-              <a:rPr sz="1600" b="0">
-                <a:solidFill>
-                  <a:srgbClr val="202020"/>
-                </a:solidFill>
-                <a:latin typeface="맑은 고딕"/>
-              </a:rPr>
-              <a:t>생활 기록 업로드 → 위험 신호 확인 → 치매안심센터 연결</a:t>
-            </a:r>
-          </a:p>
-          <a:p>
-            <a:pPr algn="l">
-              <a:spcAft>
-                <a:spcPts val="600"/>
-              </a:spcAft>
-            </a:pPr>
-            <a:r>
-              <a:rPr sz="1000" b="0">
-                <a:solidFill>
-                  <a:srgbClr val="202020"/>
-                </a:solidFill>
-                <a:latin typeface="맑은 고딕"/>
-              </a:rPr>
-              <a:t/>
-            </a:r>
-          </a:p>
-          <a:p>
-            <a:pPr algn="l">
-              <a:spcAft>
-                <a:spcPts val="600"/>
-              </a:spcAft>
-            </a:pPr>
-            <a:r>
-              <a:rPr sz="1900" b="1">
+              <a:t>· "시험 문제를 미리 본 셈"인 데이터 누수 실수를 스스로 찾아 고치고, 우연 여부까지 검증한 분석 절차</a:t>
+            </a:r>
+          </a:p>
+          <a:p>
+            <a:pPr algn="l">
+              <a:spcAft>
+                <a:spcPts val="600"/>
+              </a:spcAft>
+            </a:pPr>
+            <a:r>
+              <a:rPr sz="1600" b="1">
                 <a:solidFill>
                   <a:srgbClr val="104281"/>
                 </a:solidFill>
                 <a:latin typeface="맑은 고딕"/>
               </a:rPr>
-              <a:t>2단계 (사업 확장 방향)  —  웨어러블 연계 모니터링</a:t>
-            </a:r>
-          </a:p>
-          <a:p>
-            <a:pPr algn="l">
-              <a:spcAft>
-                <a:spcPts val="600"/>
-              </a:spcAft>
-            </a:pPr>
-            <a:r>
-              <a:rPr sz="1600" b="0">
-                <a:solidFill>
-                  <a:srgbClr val="202020"/>
-                </a:solidFill>
-                <a:latin typeface="맑은 고딕"/>
-              </a:rPr>
-              <a:t>· 위험군 판정자가 웨어러블을 계속 착용, 악화 시점을 놓치지 않고 재안내</a:t>
-            </a:r>
-          </a:p>
-          <a:p>
-            <a:pPr algn="l">
-              <a:spcAft>
-                <a:spcPts val="600"/>
-              </a:spcAft>
-            </a:pPr>
-            <a:r>
-              <a:rPr sz="1600" b="0">
-                <a:solidFill>
-                  <a:srgbClr val="202020"/>
-                </a:solidFill>
-                <a:latin typeface="맑은 고딕"/>
-              </a:rPr>
-              <a:t>· 데이터 적재·재학습 루프는 이번에 구현 완료 — 검진 결과가 연결될수록 모델이 계속 좋아지는 구조</a:t>
-            </a:r>
-          </a:p>
-          <a:p>
-            <a:pPr algn="l">
-              <a:spcAft>
-                <a:spcPts val="600"/>
-              </a:spcAft>
-            </a:pPr>
-            <a:r>
-              <a:rPr sz="1600" b="0">
-                <a:solidFill>
-                  <a:srgbClr val="202020"/>
-                </a:solidFill>
-                <a:latin typeface="맑은 고딕"/>
-              </a:rPr>
-              <a:t>· 요양기관·치매안심센터 제휴, 개인/기관용 구독형 대시보드</a:t>
-            </a:r>
-          </a:p>
-          <a:p>
-            <a:pPr algn="l">
-              <a:spcAft>
-                <a:spcPts val="600"/>
-              </a:spcAft>
-            </a:pPr>
-            <a:r>
-              <a:rPr sz="1000" b="0">
-                <a:solidFill>
-                  <a:srgbClr val="202020"/>
-                </a:solidFill>
-                <a:latin typeface="맑은 고딕"/>
-              </a:rPr>
-              <a:t/>
-            </a:r>
-          </a:p>
-          <a:p>
-            <a:pPr algn="l">
-              <a:spcAft>
-                <a:spcPts val="600"/>
-              </a:spcAft>
-            </a:pPr>
-            <a:r>
-              <a:rPr sz="1500" b="0">
-                <a:solidFill>
-                  <a:srgbClr val="666666"/>
-                </a:solidFill>
-                <a:latin typeface="맑은 고딕"/>
-              </a:rPr>
-              <a:t>필요한 것: 더 큰 정식 데이터 · 나이/성별/학력 정보 · 실제 발병 여부를 따라가는 추적 검증</a:t>
+              <a:t>· 병원·기관의 정식 데이터가 들어오면 코드 수정 없이 그대로 재학습·재검증 가능</a:t>
             </a:r>
           </a:p>
         </p:txBody>
@@ -9252,7 +9463,7 @@
         <p:spPr>
           <a:xfrm>
             <a:off x="0" y="0"/>
-            <a:ext cx="12191695" cy="6858000"/>
+            <a:ext cx="12191695" cy="146304"/>
           </a:xfrm>
           <a:prstGeom prst="rect">
             <a:avLst/>
@@ -9294,8 +9505,8 @@
         </p:nvSpPr>
         <p:spPr>
           <a:xfrm>
-            <a:off x="914400" y="2651760"/>
-            <a:ext cx="10332720" cy="914400"/>
+            <a:off x="502920" y="292608"/>
+            <a:ext cx="10515600" cy="365760"/>
           </a:xfrm>
           <a:prstGeom prst="rect">
             <a:avLst/>
@@ -9308,19 +9519,19 @@
           </a:bodyPr>
           <a:lstStyle/>
           <a:p>
-            <a:pPr algn="ctr">
-              <a:spcAft>
-                <a:spcPts val="600"/>
-              </a:spcAft>
-            </a:pPr>
-            <a:r>
-              <a:rPr sz="4000" b="1">
-                <a:solidFill>
-                  <a:srgbClr val="FFFFFF"/>
-                </a:solidFill>
-                <a:latin typeface="맑은 고딕"/>
-              </a:rPr>
-              <a:t>감사합니다</a:t>
+            <a:pPr algn="l">
+              <a:spcAft>
+                <a:spcPts val="600"/>
+              </a:spcAft>
+            </a:pPr>
+            <a:r>
+              <a:rPr sz="1300" b="1">
+                <a:solidFill>
+                  <a:srgbClr val="2A78D6"/>
+                </a:solidFill>
+                <a:latin typeface="맑은 고딕"/>
+              </a:rPr>
+              <a:t>06. 확장 방향</a:t>
             </a:r>
           </a:p>
         </p:txBody>
@@ -9333,8 +9544,8 @@
         </p:nvSpPr>
         <p:spPr>
           <a:xfrm>
-            <a:off x="914400" y="3749039"/>
-            <a:ext cx="10332720" cy="731520"/>
+            <a:off x="502920" y="621792"/>
+            <a:ext cx="11155680" cy="731520"/>
           </a:xfrm>
           <a:prstGeom prst="rect">
             <a:avLst/>
@@ -9347,19 +9558,186 @@
           </a:bodyPr>
           <a:lstStyle/>
           <a:p>
-            <a:pPr algn="ctr">
-              <a:spcAft>
-                <a:spcPts val="600"/>
-              </a:spcAft>
-            </a:pPr>
-            <a:r>
-              <a:rPr sz="1800" b="0">
-                <a:solidFill>
-                  <a:srgbClr val="BFD4F0"/>
-                </a:solidFill>
-                <a:latin typeface="맑은 고딕"/>
-              </a:rPr>
-              <a:t>Q&amp;A  |  팀 찾아조</a:t>
+            <a:pPr algn="l">
+              <a:spcAft>
+                <a:spcPts val="600"/>
+              </a:spcAft>
+            </a:pPr>
+            <a:r>
+              <a:rPr sz="2800" b="1">
+                <a:solidFill>
+                  <a:srgbClr val="104281"/>
+                </a:solidFill>
+                <a:latin typeface="맑은 고딕"/>
+              </a:rPr>
+              <a:t>스크리닝에서 끝나지 않는다 — 2단계 로드맵</a:t>
+            </a:r>
+          </a:p>
+        </p:txBody>
+      </p:sp>
+      <p:sp>
+        <p:nvSpPr>
+          <p:cNvPr id="5" name="TextBox 4"/>
+          <p:cNvSpPr txBox="1"/>
+          <p:nvPr/>
+        </p:nvSpPr>
+        <p:spPr>
+          <a:xfrm>
+            <a:off x="914400" y="2286000"/>
+            <a:ext cx="10607040" cy="4389120"/>
+          </a:xfrm>
+          <a:prstGeom prst="rect">
+            <a:avLst/>
+          </a:prstGeom>
+          <a:noFill/>
+        </p:spPr>
+        <p:txBody>
+          <a:bodyPr wrap="square">
+            <a:spAutoFit/>
+          </a:bodyPr>
+          <a:lstStyle/>
+          <a:p>
+            <a:pPr algn="l">
+              <a:spcAft>
+                <a:spcPts val="600"/>
+              </a:spcAft>
+            </a:pPr>
+            <a:r>
+              <a:rPr sz="1900" b="1">
+                <a:solidFill>
+                  <a:srgbClr val="104281"/>
+                </a:solidFill>
+                <a:latin typeface="맑은 고딕"/>
+              </a:rPr>
+              <a:t>1단계 (이번 구현)  —  스크리닝</a:t>
+            </a:r>
+          </a:p>
+          <a:p>
+            <a:pPr algn="l">
+              <a:spcAft>
+                <a:spcPts val="600"/>
+              </a:spcAft>
+            </a:pPr>
+            <a:r>
+              <a:rPr sz="1600" b="0">
+                <a:solidFill>
+                  <a:srgbClr val="202020"/>
+                </a:solidFill>
+                <a:latin typeface="맑은 고딕"/>
+              </a:rPr>
+              <a:t>생활 기록 업로드 → 위험 신호 확인 → 치매안심센터 연결</a:t>
+            </a:r>
+          </a:p>
+          <a:p>
+            <a:pPr algn="l">
+              <a:spcAft>
+                <a:spcPts val="600"/>
+              </a:spcAft>
+            </a:pPr>
+            <a:r>
+              <a:rPr sz="1000" b="0">
+                <a:solidFill>
+                  <a:srgbClr val="202020"/>
+                </a:solidFill>
+                <a:latin typeface="맑은 고딕"/>
+              </a:rPr>
+              <a:t/>
+            </a:r>
+          </a:p>
+          <a:p>
+            <a:pPr algn="l">
+              <a:spcAft>
+                <a:spcPts val="600"/>
+              </a:spcAft>
+            </a:pPr>
+            <a:r>
+              <a:rPr sz="1900" b="1">
+                <a:solidFill>
+                  <a:srgbClr val="104281"/>
+                </a:solidFill>
+                <a:latin typeface="맑은 고딕"/>
+              </a:rPr>
+              <a:t>2단계 (사업 확장 방향)  —  웨어러블 연계 모니터링</a:t>
+            </a:r>
+          </a:p>
+          <a:p>
+            <a:pPr algn="l">
+              <a:spcAft>
+                <a:spcPts val="600"/>
+              </a:spcAft>
+            </a:pPr>
+            <a:r>
+              <a:rPr sz="1600" b="0">
+                <a:solidFill>
+                  <a:srgbClr val="202020"/>
+                </a:solidFill>
+                <a:latin typeface="맑은 고딕"/>
+              </a:rPr>
+              <a:t>· 위험군 판정자가 웨어러블을 계속 착용, 악화 시점을 놓치지 않고 재안내</a:t>
+            </a:r>
+          </a:p>
+          <a:p>
+            <a:pPr algn="l">
+              <a:spcAft>
+                <a:spcPts val="600"/>
+              </a:spcAft>
+            </a:pPr>
+            <a:r>
+              <a:rPr sz="1600" b="0">
+                <a:solidFill>
+                  <a:srgbClr val="202020"/>
+                </a:solidFill>
+                <a:latin typeface="맑은 고딕"/>
+              </a:rPr>
+              <a:t>· 데이터 적재·재학습 루프는 이번에 구현 완료 — 검진 결과가 연결될수록 모델이 계속 좋아지는 구조</a:t>
+            </a:r>
+          </a:p>
+          <a:p>
+            <a:pPr algn="l">
+              <a:spcAft>
+                <a:spcPts val="600"/>
+              </a:spcAft>
+            </a:pPr>
+            <a:r>
+              <a:rPr sz="1600" b="0">
+                <a:solidFill>
+                  <a:srgbClr val="202020"/>
+                </a:solidFill>
+                <a:latin typeface="맑은 고딕"/>
+              </a:rPr>
+              <a:t>· 요양기관·치매안심센터 제휴, 개인/기관용 구독형 대시보드</a:t>
+            </a:r>
+          </a:p>
+          <a:p>
+            <a:pPr algn="l">
+              <a:spcAft>
+                <a:spcPts val="600"/>
+              </a:spcAft>
+            </a:pPr>
+            <a:r>
+              <a:rPr sz="1000" b="0">
+                <a:solidFill>
+                  <a:srgbClr val="202020"/>
+                </a:solidFill>
+                <a:latin typeface="맑은 고딕"/>
+              </a:rPr>
+              <a:t/>
+            </a:r>
+          </a:p>
+          <a:p>
+            <a:pPr algn="l">
+              <a:spcAft>
+                <a:spcPts val="600"/>
+              </a:spcAft>
+            </a:pPr>
+            <a:r>
+              <a:rPr sz="1500" b="0">
+                <a:solidFill>
+                  <a:srgbClr val="666666"/>
+                </a:solidFill>
+                <a:latin typeface="맑은 고딕"/>
+              </a:rPr>
+              <a:t>필요한 것: 더 큰 정식 데이터 · 나이/성별/학력 정보 · 실제 발병 여부를 따라가는 추적 검증</a:t>
             </a:r>
           </a:p>
         </p:txBody>
@@ -9391,7 +9769,7 @@
         <p:spPr>
           <a:xfrm>
             <a:off x="0" y="0"/>
-            <a:ext cx="12191695" cy="146304"/>
+            <a:ext cx="12191695" cy="6858000"/>
           </a:xfrm>
           <a:prstGeom prst="rect">
             <a:avLst/>
@@ -9433,8 +9811,8 @@
         </p:nvSpPr>
         <p:spPr>
           <a:xfrm>
-            <a:off x="502920" y="292608"/>
-            <a:ext cx="10515600" cy="365760"/>
+            <a:off x="914400" y="2651760"/>
+            <a:ext cx="10332720" cy="914400"/>
           </a:xfrm>
           <a:prstGeom prst="rect">
             <a:avLst/>
@@ -9447,19 +9825,19 @@
           </a:bodyPr>
           <a:lstStyle/>
           <a:p>
-            <a:pPr algn="l">
-              <a:spcAft>
-                <a:spcPts val="600"/>
-              </a:spcAft>
-            </a:pPr>
-            <a:r>
-              <a:rPr sz="1300" b="1">
-                <a:solidFill>
-                  <a:srgbClr val="2A78D6"/>
-                </a:solidFill>
-                <a:latin typeface="맑은 고딕"/>
-              </a:rPr>
-              <a:t>05. 서비스</a:t>
+            <a:pPr algn="ctr">
+              <a:spcAft>
+                <a:spcPts val="600"/>
+              </a:spcAft>
+            </a:pPr>
+            <a:r>
+              <a:rPr sz="4000" b="1">
+                <a:solidFill>
+                  <a:srgbClr val="FFFFFF"/>
+                </a:solidFill>
+                <a:latin typeface="맑은 고딕"/>
+              </a:rPr>
+              <a:t>감사합니다</a:t>
             </a:r>
           </a:p>
         </p:txBody>
@@ -9472,8 +9850,8 @@
         </p:nvSpPr>
         <p:spPr>
           <a:xfrm>
-            <a:off x="502920" y="621792"/>
-            <a:ext cx="11155680" cy="731520"/>
+            <a:off x="914400" y="3749039"/>
+            <a:ext cx="10332720" cy="731520"/>
           </a:xfrm>
           <a:prstGeom prst="rect">
             <a:avLst/>
@@ -9486,386 +9864,19 @@
           </a:bodyPr>
           <a:lstStyle/>
           <a:p>
-            <a:pPr algn="l">
-              <a:spcAft>
-                <a:spcPts val="600"/>
-              </a:spcAft>
-            </a:pPr>
-            <a:r>
-              <a:rPr sz="2800" b="1">
-                <a:solidFill>
-                  <a:srgbClr val="104281"/>
-                </a:solidFill>
-                <a:latin typeface="맑은 고딕"/>
-              </a:rPr>
-              <a:t>업로드는 사라지지 않는다 — 적재·재학습 파이프라인 (구현 완료)</a:t>
-            </a:r>
-          </a:p>
-        </p:txBody>
-      </p:sp>
-      <p:sp>
-        <p:nvSpPr>
-          <p:cNvPr id="5" name="TextBox 4"/>
-          <p:cNvSpPr txBox="1"/>
-          <p:nvPr/>
-        </p:nvSpPr>
-        <p:spPr>
-          <a:xfrm>
-            <a:off x="914400" y="1691640"/>
-            <a:ext cx="3108960" cy="457200"/>
-          </a:xfrm>
-          <a:prstGeom prst="rect">
-            <a:avLst/>
-          </a:prstGeom>
-          <a:noFill/>
-        </p:spPr>
-        <p:txBody>
-          <a:bodyPr wrap="square">
-            <a:spAutoFit/>
-          </a:bodyPr>
-          <a:lstStyle/>
-          <a:p>
-            <a:pPr algn="l">
-              <a:spcAft>
-                <a:spcPts val="600"/>
-              </a:spcAft>
-            </a:pPr>
-            <a:r>
-              <a:rPr sz="1800" b="1">
-                <a:solidFill>
-                  <a:srgbClr val="104281"/>
-                </a:solidFill>
-                <a:latin typeface="맑은 고딕"/>
-              </a:rPr>
-              <a:t>①  업로드 자동 적재</a:t>
-            </a:r>
-          </a:p>
-        </p:txBody>
-      </p:sp>
-      <p:sp>
-        <p:nvSpPr>
-          <p:cNvPr id="6" name="TextBox 5"/>
-          <p:cNvSpPr txBox="1"/>
-          <p:nvPr/>
-        </p:nvSpPr>
-        <p:spPr>
-          <a:xfrm>
-            <a:off x="4114800" y="1719072"/>
-            <a:ext cx="7589520" cy="457200"/>
-          </a:xfrm>
-          <a:prstGeom prst="rect">
-            <a:avLst/>
-          </a:prstGeom>
-          <a:noFill/>
-        </p:spPr>
-        <p:txBody>
-          <a:bodyPr wrap="square">
-            <a:spAutoFit/>
-          </a:bodyPr>
-          <a:lstStyle/>
-          <a:p>
-            <a:pPr algn="l">
-              <a:spcAft>
-                <a:spcPts val="600"/>
-              </a:spcAft>
-            </a:pPr>
-            <a:r>
-              <a:rPr sz="1400" b="0">
-                <a:solidFill>
-                  <a:srgbClr val="202020"/>
-                </a:solidFill>
-                <a:latin typeface="맑은 고딕"/>
-              </a:rPr>
-              <a:t>예측과 동시에 DB에 익명 저장 — 일 단위 기록 + 예측 결과 (개인 식별 정보 없음)</a:t>
-            </a:r>
-          </a:p>
-        </p:txBody>
-      </p:sp>
-      <p:sp>
-        <p:nvSpPr>
-          <p:cNvPr id="7" name="TextBox 6"/>
-          <p:cNvSpPr txBox="1"/>
-          <p:nvPr/>
-        </p:nvSpPr>
-        <p:spPr>
-          <a:xfrm>
-            <a:off x="914400" y="2468880"/>
-            <a:ext cx="3108960" cy="457200"/>
-          </a:xfrm>
-          <a:prstGeom prst="rect">
-            <a:avLst/>
-          </a:prstGeom>
-          <a:noFill/>
-        </p:spPr>
-        <p:txBody>
-          <a:bodyPr wrap="square">
-            <a:spAutoFit/>
-          </a:bodyPr>
-          <a:lstStyle/>
-          <a:p>
-            <a:pPr algn="l">
-              <a:spcAft>
-                <a:spcPts val="600"/>
-              </a:spcAft>
-            </a:pPr>
-            <a:r>
-              <a:rPr sz="1800" b="1">
-                <a:solidFill>
-                  <a:srgbClr val="104281"/>
-                </a:solidFill>
-                <a:latin typeface="맑은 고딕"/>
-              </a:rPr>
-              <a:t>②  검진 결과 연결</a:t>
-            </a:r>
-          </a:p>
-        </p:txBody>
-      </p:sp>
-      <p:sp>
-        <p:nvSpPr>
-          <p:cNvPr id="8" name="TextBox 7"/>
-          <p:cNvSpPr txBox="1"/>
-          <p:nvPr/>
-        </p:nvSpPr>
-        <p:spPr>
-          <a:xfrm>
-            <a:off x="4114800" y="2496312"/>
-            <a:ext cx="7589520" cy="457200"/>
-          </a:xfrm>
-          <a:prstGeom prst="rect">
-            <a:avLst/>
-          </a:prstGeom>
-          <a:noFill/>
-        </p:spPr>
-        <p:txBody>
-          <a:bodyPr wrap="square">
-            <a:spAutoFit/>
-          </a:bodyPr>
-          <a:lstStyle/>
-          <a:p>
-            <a:pPr algn="l">
-              <a:spcAft>
-                <a:spcPts val="600"/>
-              </a:spcAft>
-            </a:pPr>
-            <a:r>
-              <a:rPr sz="1400" b="0">
-                <a:solidFill>
-                  <a:srgbClr val="202020"/>
-                </a:solidFill>
-                <a:latin typeface="맑은 고딕"/>
-              </a:rPr>
-              <a:t>위험군 안내를 받고 검진한 사용자의 확진 결과를 기관이 입력 (API 구현)</a:t>
-            </a:r>
-          </a:p>
-        </p:txBody>
-      </p:sp>
-      <p:sp>
-        <p:nvSpPr>
-          <p:cNvPr id="9" name="TextBox 8"/>
-          <p:cNvSpPr txBox="1"/>
-          <p:nvPr/>
-        </p:nvSpPr>
-        <p:spPr>
-          <a:xfrm>
-            <a:off x="914400" y="3246120"/>
-            <a:ext cx="3108960" cy="457200"/>
-          </a:xfrm>
-          <a:prstGeom prst="rect">
-            <a:avLst/>
-          </a:prstGeom>
-          <a:noFill/>
-        </p:spPr>
-        <p:txBody>
-          <a:bodyPr wrap="square">
-            <a:spAutoFit/>
-          </a:bodyPr>
-          <a:lstStyle/>
-          <a:p>
-            <a:pPr algn="l">
-              <a:spcAft>
-                <a:spcPts val="600"/>
-              </a:spcAft>
-            </a:pPr>
-            <a:r>
-              <a:rPr sz="1800" b="1">
-                <a:solidFill>
-                  <a:srgbClr val="104281"/>
-                </a:solidFill>
-                <a:latin typeface="맑은 고딕"/>
-              </a:rPr>
-              <a:t>③  재학습</a:t>
-            </a:r>
-          </a:p>
-        </p:txBody>
-      </p:sp>
-      <p:sp>
-        <p:nvSpPr>
-          <p:cNvPr id="10" name="TextBox 9"/>
-          <p:cNvSpPr txBox="1"/>
-          <p:nvPr/>
-        </p:nvSpPr>
-        <p:spPr>
-          <a:xfrm>
-            <a:off x="4114800" y="3273552"/>
-            <a:ext cx="7589520" cy="457200"/>
-          </a:xfrm>
-          <a:prstGeom prst="rect">
-            <a:avLst/>
-          </a:prstGeom>
-          <a:noFill/>
-        </p:spPr>
-        <p:txBody>
-          <a:bodyPr wrap="square">
-            <a:spAutoFit/>
-          </a:bodyPr>
-          <a:lstStyle/>
-          <a:p>
-            <a:pPr algn="l">
-              <a:spcAft>
-                <a:spcPts val="600"/>
-              </a:spcAft>
-            </a:pPr>
-            <a:r>
-              <a:rPr sz="1400" b="0">
-                <a:solidFill>
-                  <a:srgbClr val="202020"/>
-                </a:solidFill>
-                <a:latin typeface="맑은 고딕"/>
-              </a:rPr>
-              <a:t>확진 라벨이 붙은 데이터만 기존 174명과 결합 — 같은 무누수 검증 절차로 재학습</a:t>
-            </a:r>
-          </a:p>
-        </p:txBody>
-      </p:sp>
-      <p:sp>
-        <p:nvSpPr>
-          <p:cNvPr id="11" name="TextBox 10"/>
-          <p:cNvSpPr txBox="1"/>
-          <p:nvPr/>
-        </p:nvSpPr>
-        <p:spPr>
-          <a:xfrm>
-            <a:off x="914400" y="4023360"/>
-            <a:ext cx="3108960" cy="457200"/>
-          </a:xfrm>
-          <a:prstGeom prst="rect">
-            <a:avLst/>
-          </a:prstGeom>
-          <a:noFill/>
-        </p:spPr>
-        <p:txBody>
-          <a:bodyPr wrap="square">
-            <a:spAutoFit/>
-          </a:bodyPr>
-          <a:lstStyle/>
-          <a:p>
-            <a:pPr algn="l">
-              <a:spcAft>
-                <a:spcPts val="600"/>
-              </a:spcAft>
-            </a:pPr>
-            <a:r>
-              <a:rPr sz="1800" b="1">
-                <a:solidFill>
-                  <a:srgbClr val="104281"/>
-                </a:solidFill>
-                <a:latin typeface="맑은 고딕"/>
-              </a:rPr>
-              <a:t>④  모델 교체</a:t>
-            </a:r>
-          </a:p>
-        </p:txBody>
-      </p:sp>
-      <p:sp>
-        <p:nvSpPr>
-          <p:cNvPr id="12" name="TextBox 11"/>
-          <p:cNvSpPr txBox="1"/>
-          <p:nvPr/>
-        </p:nvSpPr>
-        <p:spPr>
-          <a:xfrm>
-            <a:off x="4114800" y="4050792"/>
-            <a:ext cx="7589520" cy="457200"/>
-          </a:xfrm>
-          <a:prstGeom prst="rect">
-            <a:avLst/>
-          </a:prstGeom>
-          <a:noFill/>
-        </p:spPr>
-        <p:txBody>
-          <a:bodyPr wrap="square">
-            <a:spAutoFit/>
-          </a:bodyPr>
-          <a:lstStyle/>
-          <a:p>
-            <a:pPr algn="l">
-              <a:spcAft>
-                <a:spcPts val="600"/>
-              </a:spcAft>
-            </a:pPr>
-            <a:r>
-              <a:rPr sz="1400" b="0">
-                <a:solidFill>
-                  <a:srgbClr val="202020"/>
-                </a:solidFill>
-                <a:latin typeface="맑은 고딕"/>
-              </a:rPr>
-              <a:t>기존 모델 자동 백업 후 교체 → 서비스 재시작만 하면 새 모델 적용</a:t>
-            </a:r>
-          </a:p>
-        </p:txBody>
-      </p:sp>
-      <p:sp>
-        <p:nvSpPr>
-          <p:cNvPr id="13" name="TextBox 12"/>
-          <p:cNvSpPr txBox="1"/>
-          <p:nvPr/>
-        </p:nvSpPr>
-        <p:spPr>
-          <a:xfrm>
-            <a:off x="914400" y="5029200"/>
-            <a:ext cx="10515600" cy="1188720"/>
-          </a:xfrm>
-          <a:prstGeom prst="rect">
-            <a:avLst/>
-          </a:prstGeom>
-          <a:noFill/>
-        </p:spPr>
-        <p:txBody>
-          <a:bodyPr wrap="square">
-            <a:spAutoFit/>
-          </a:bodyPr>
-          <a:lstStyle/>
-          <a:p>
-            <a:pPr algn="l">
-              <a:spcAft>
-                <a:spcPts val="600"/>
-              </a:spcAft>
-            </a:pPr>
-            <a:r>
-              <a:rPr sz="1500" b="0">
-                <a:solidFill>
-                  <a:srgbClr val="202020"/>
-                </a:solidFill>
-                <a:latin typeface="맑은 고딕"/>
-              </a:rPr>
-              <a:t>원칙: 확진 라벨 없는 데이터는 학습에 쓰지 않는다 — 모델이 자기 예측을 정답처럼 배우는 오염 방지</a:t>
-            </a:r>
-          </a:p>
-          <a:p>
-            <a:pPr algn="l">
-              <a:spcAft>
-                <a:spcPts val="600"/>
-              </a:spcAft>
-            </a:pPr>
-            <a:r>
-              <a:rPr sz="1900" b="1">
-                <a:solidFill>
-                  <a:srgbClr val="2A78D6"/>
-                </a:solidFill>
-                <a:latin typeface="맑은 고딕"/>
-              </a:rPr>
-              <a:t>"지금 174명이라는 한계는, 서비스가 돌수록 스스로 풀리는 구조입니다"</a:t>
+            <a:pPr algn="ctr">
+              <a:spcAft>
+                <a:spcPts val="600"/>
+              </a:spcAft>
+            </a:pPr>
+            <a:r>
+              <a:rPr sz="1800" b="0">
+                <a:solidFill>
+                  <a:srgbClr val="BFD4F0"/>
+                </a:solidFill>
+                <a:latin typeface="맑은 고딕"/>
+              </a:rPr>
+              <a:t>Q&amp;A  |  팀 찾아조</a:t>
             </a:r>
           </a:p>
         </p:txBody>
